--- a/Documentation/Weekly Report/week14/CMSC-4920-Week14Report-Group2.pptx
+++ b/Documentation/Weekly Report/week14/CMSC-4920-Week14Report-Group2.pptx
@@ -5,7 +5,7 @@
     <p:sldMasterId id="2147483648" r:id="rId1"/>
   </p:sldMasterIdLst>
   <p:notesMasterIdLst>
-    <p:notesMasterId r:id="rId10"/>
+    <p:notesMasterId r:id="rId9"/>
   </p:notesMasterIdLst>
   <p:sldIdLst>
     <p:sldId id="256" r:id="rId2"/>
@@ -13,9 +13,8 @@
     <p:sldId id="265" r:id="rId4"/>
     <p:sldId id="266" r:id="rId5"/>
     <p:sldId id="258" r:id="rId6"/>
-    <p:sldId id="264" r:id="rId7"/>
-    <p:sldId id="259" r:id="rId8"/>
-    <p:sldId id="260" r:id="rId9"/>
+    <p:sldId id="259" r:id="rId7"/>
+    <p:sldId id="260" r:id="rId8"/>
   </p:sldIdLst>
   <p:sldSz cx="12192000" cy="6858000"/>
   <p:notesSz cx="6858000" cy="9144000"/>
@@ -122,6 +121,14 @@
 </p:presentation>
 </file>
 
+<file path=ppt/revisionInfo.xml><?xml version="1.0" encoding="utf-8"?>
+<p1510:revInfo xmlns:a="http://schemas.openxmlformats.org/drawingml/2006/main" xmlns:r="http://schemas.openxmlformats.org/officeDocument/2006/relationships" xmlns:p1510="http://schemas.microsoft.com/office/powerpoint/2015/10/main">
+  <p1510:revLst>
+    <p1510:client id="{CCB6696A-4F6B-4729-BD3B-FECB1658CA32}" v="2" dt="2026-04-16T20:33:55.802"/>
+  </p1510:revLst>
+</p1510:revInfo>
+</file>
+
 <file path=ppt/changesInfos/changesInfo1.xml><?xml version="1.0" encoding="utf-8"?>
 <pc:chgInfo xmlns:a="http://schemas.openxmlformats.org/drawingml/2006/main" xmlns:r="http://schemas.openxmlformats.org/officeDocument/2006/relationships" xmlns:ac="http://schemas.microsoft.com/office/drawing/2013/main/command" xmlns:pc="http://schemas.microsoft.com/office/powerpoint/2013/main/command">
   <pc:docChgLst>
@@ -131,21 +138,6 @@
       <pc:docMkLst>
         <pc:docMk/>
       </pc:docMkLst>
-      <pc:sldChg chg="modSp mod">
-        <pc:chgData name="John Gerega" userId="bd3e1e46fb6a714b" providerId="LiveId" clId="{45F0C402-C550-4C82-B31D-5B32217A5E94}" dt="2026-03-29T13:00:56.525" v="2636" actId="20577"/>
-        <pc:sldMkLst>
-          <pc:docMk/>
-          <pc:sldMk cId="2561402868" sldId="264"/>
-        </pc:sldMkLst>
-        <pc:graphicFrameChg chg="mod modGraphic">
-          <ac:chgData name="John Gerega" userId="bd3e1e46fb6a714b" providerId="LiveId" clId="{45F0C402-C550-4C82-B31D-5B32217A5E94}" dt="2026-03-29T13:00:56.525" v="2636" actId="20577"/>
-          <ac:graphicFrameMkLst>
-            <pc:docMk/>
-            <pc:sldMk cId="2561402868" sldId="264"/>
-            <ac:graphicFrameMk id="27" creationId="{D6B93F0B-FEB0-EDAB-CFE1-A57DEFE97FCD}"/>
-          </ac:graphicFrameMkLst>
-        </pc:graphicFrameChg>
-      </pc:sldChg>
       <pc:sldChg chg="addSp delSp modSp mod">
         <pc:chgData name="John Gerega" userId="bd3e1e46fb6a714b" providerId="LiveId" clId="{45F0C402-C550-4C82-B31D-5B32217A5E94}" dt="2026-04-04T21:42:06.712" v="2692" actId="20577"/>
         <pc:sldMkLst>
@@ -183,21 +175,13 @@
             <ac:spMk id="4" creationId="{86ED9EE4-56A8-6AFD-BE9A-A35D2ABC59A0}"/>
           </ac:spMkLst>
         </pc:spChg>
-        <pc:spChg chg="add mod">
-          <ac:chgData name="John Gerega" userId="bd3e1e46fb6a714b" providerId="LiveId" clId="{45F0C402-C550-4C82-B31D-5B32217A5E94}" dt="2026-04-04T21:43:59.122" v="3258" actId="20577"/>
-          <ac:spMkLst>
-            <pc:docMk/>
-            <pc:sldMk cId="3526335932" sldId="266"/>
-            <ac:spMk id="6" creationId="{3B13CF04-9C06-053E-69E2-58CD31C3D276}"/>
-          </ac:spMkLst>
-        </pc:spChg>
       </pc:sldChg>
     </pc:docChg>
   </pc:docChgLst>
   <pc:docChgLst>
     <pc:chgData name="Margo Bonal" userId="18c9fa0f-b53d-478b-9dc0-6ad88786c19f" providerId="ADAL" clId="{93D479E5-F67F-4B8A-A78F-A0B574A116B6}"/>
-    <pc:docChg chg="undo custSel addSld delSld modSld">
-      <pc:chgData name="Margo Bonal" userId="18c9fa0f-b53d-478b-9dc0-6ad88786c19f" providerId="ADAL" clId="{93D479E5-F67F-4B8A-A78F-A0B574A116B6}" dt="2026-04-12T10:51:28.860" v="1342" actId="14100"/>
+    <pc:docChg chg="undo redo custSel addSld delSld modSld">
+      <pc:chgData name="Margo Bonal" userId="18c9fa0f-b53d-478b-9dc0-6ad88786c19f" providerId="ADAL" clId="{93D479E5-F67F-4B8A-A78F-A0B574A116B6}" dt="2026-04-16T20:37:33.721" v="1798" actId="20577"/>
       <pc:docMkLst>
         <pc:docMk/>
       </pc:docMkLst>
@@ -215,46 +199,22 @@
             <ac:picMk id="5" creationId="{B0894097-9C9B-8B23-3BC5-11C154EBBAD5}"/>
           </ac:picMkLst>
         </pc:picChg>
-        <pc:picChg chg="del">
-          <ac:chgData name="Margo Bonal" userId="18c9fa0f-b53d-478b-9dc0-6ad88786c19f" providerId="ADAL" clId="{93D479E5-F67F-4B8A-A78F-A0B574A116B6}" dt="2026-04-12T10:50:53.798" v="1333" actId="478"/>
-          <ac:picMkLst>
-            <pc:docMk/>
-            <pc:sldMk cId="3713997872" sldId="259"/>
-            <ac:picMk id="6" creationId="{0D4E0165-E852-9E37-91F6-9A7920B23AEB}"/>
-          </ac:picMkLst>
-        </pc:picChg>
       </pc:sldChg>
-      <pc:sldChg chg="modSp mod">
-        <pc:chgData name="Margo Bonal" userId="18c9fa0f-b53d-478b-9dc0-6ad88786c19f" providerId="ADAL" clId="{93D479E5-F67F-4B8A-A78F-A0B574A116B6}" dt="2026-04-05T23:08:31.942" v="1065" actId="20577"/>
+      <pc:sldChg chg="modSp del mod">
+        <pc:chgData name="Margo Bonal" userId="18c9fa0f-b53d-478b-9dc0-6ad88786c19f" providerId="ADAL" clId="{93D479E5-F67F-4B8A-A78F-A0B574A116B6}" dt="2026-04-16T20:30:48.780" v="1491" actId="2696"/>
         <pc:sldMkLst>
           <pc:docMk/>
           <pc:sldMk cId="2561402868" sldId="264"/>
         </pc:sldMkLst>
-        <pc:spChg chg="mod">
-          <ac:chgData name="Margo Bonal" userId="18c9fa0f-b53d-478b-9dc0-6ad88786c19f" providerId="ADAL" clId="{93D479E5-F67F-4B8A-A78F-A0B574A116B6}" dt="2026-03-21T14:21:56.751" v="935" actId="27636"/>
-          <ac:spMkLst>
-            <pc:docMk/>
-            <pc:sldMk cId="2561402868" sldId="264"/>
-            <ac:spMk id="9" creationId="{D6D36DC8-D9BF-8C26-69EA-ED89E34DB644}"/>
-          </ac:spMkLst>
-        </pc:spChg>
-        <pc:graphicFrameChg chg="mod modGraphic">
-          <ac:chgData name="Margo Bonal" userId="18c9fa0f-b53d-478b-9dc0-6ad88786c19f" providerId="ADAL" clId="{93D479E5-F67F-4B8A-A78F-A0B574A116B6}" dt="2026-04-05T23:08:31.942" v="1065" actId="20577"/>
-          <ac:graphicFrameMkLst>
-            <pc:docMk/>
-            <pc:sldMk cId="2561402868" sldId="264"/>
-            <ac:graphicFrameMk id="27" creationId="{D6B93F0B-FEB0-EDAB-CFE1-A57DEFE97FCD}"/>
-          </ac:graphicFrameMkLst>
-        </pc:graphicFrameChg>
       </pc:sldChg>
       <pc:sldChg chg="delSp modSp mod">
-        <pc:chgData name="Margo Bonal" userId="18c9fa0f-b53d-478b-9dc0-6ad88786c19f" providerId="ADAL" clId="{93D479E5-F67F-4B8A-A78F-A0B574A116B6}" dt="2026-04-12T10:49:28.496" v="1332" actId="313"/>
+        <pc:chgData name="Margo Bonal" userId="18c9fa0f-b53d-478b-9dc0-6ad88786c19f" providerId="ADAL" clId="{93D479E5-F67F-4B8A-A78F-A0B574A116B6}" dt="2026-04-16T20:37:33.721" v="1798" actId="20577"/>
         <pc:sldMkLst>
           <pc:docMk/>
           <pc:sldMk cId="2428741132" sldId="265"/>
         </pc:sldMkLst>
         <pc:spChg chg="mod">
-          <ac:chgData name="Margo Bonal" userId="18c9fa0f-b53d-478b-9dc0-6ad88786c19f" providerId="ADAL" clId="{93D479E5-F67F-4B8A-A78F-A0B574A116B6}" dt="2026-04-12T10:49:28.496" v="1332" actId="313"/>
+          <ac:chgData name="Margo Bonal" userId="18c9fa0f-b53d-478b-9dc0-6ad88786c19f" providerId="ADAL" clId="{93D479E5-F67F-4B8A-A78F-A0B574A116B6}" dt="2026-04-16T20:37:33.721" v="1798" actId="20577"/>
           <ac:spMkLst>
             <pc:docMk/>
             <pc:sldMk cId="2428741132" sldId="265"/>
@@ -262,8 +222,8 @@
           </ac:spMkLst>
         </pc:spChg>
       </pc:sldChg>
-      <pc:sldChg chg="modSp mod">
-        <pc:chgData name="Margo Bonal" userId="18c9fa0f-b53d-478b-9dc0-6ad88786c19f" providerId="ADAL" clId="{93D479E5-F67F-4B8A-A78F-A0B574A116B6}" dt="2026-04-12T10:48:33.259" v="1261" actId="20577"/>
+      <pc:sldChg chg="addSp delSp modSp mod">
+        <pc:chgData name="Margo Bonal" userId="18c9fa0f-b53d-478b-9dc0-6ad88786c19f" providerId="ADAL" clId="{93D479E5-F67F-4B8A-A78F-A0B574A116B6}" dt="2026-04-16T20:34:54.221" v="1762" actId="20577"/>
         <pc:sldMkLst>
           <pc:docMk/>
           <pc:sldMk cId="3526335932" sldId="266"/>
@@ -277,19 +237,27 @@
           </ac:spMkLst>
         </pc:spChg>
         <pc:spChg chg="mod">
-          <ac:chgData name="Margo Bonal" userId="18c9fa0f-b53d-478b-9dc0-6ad88786c19f" providerId="ADAL" clId="{93D479E5-F67F-4B8A-A78F-A0B574A116B6}" dt="2026-04-12T10:48:12.135" v="1220" actId="20577"/>
+          <ac:chgData name="Margo Bonal" userId="18c9fa0f-b53d-478b-9dc0-6ad88786c19f" providerId="ADAL" clId="{93D479E5-F67F-4B8A-A78F-A0B574A116B6}" dt="2026-04-16T20:33:46.324" v="1643"/>
           <ac:spMkLst>
             <pc:docMk/>
             <pc:sldMk cId="3526335932" sldId="266"/>
             <ac:spMk id="4" creationId="{86ED9EE4-56A8-6AFD-BE9A-A35D2ABC59A0}"/>
           </ac:spMkLst>
         </pc:spChg>
-        <pc:spChg chg="mod">
-          <ac:chgData name="Margo Bonal" userId="18c9fa0f-b53d-478b-9dc0-6ad88786c19f" providerId="ADAL" clId="{93D479E5-F67F-4B8A-A78F-A0B574A116B6}" dt="2026-04-12T10:48:33.259" v="1261" actId="20577"/>
+        <pc:spChg chg="del mod">
+          <ac:chgData name="Margo Bonal" userId="18c9fa0f-b53d-478b-9dc0-6ad88786c19f" providerId="ADAL" clId="{93D479E5-F67F-4B8A-A78F-A0B574A116B6}" dt="2026-04-16T20:33:52.540" v="1645" actId="478"/>
           <ac:spMkLst>
             <pc:docMk/>
             <pc:sldMk cId="3526335932" sldId="266"/>
             <ac:spMk id="6" creationId="{3B13CF04-9C06-053E-69E2-58CD31C3D276}"/>
+          </ac:spMkLst>
+        </pc:spChg>
+        <pc:spChg chg="add mod">
+          <ac:chgData name="Margo Bonal" userId="18c9fa0f-b53d-478b-9dc0-6ad88786c19f" providerId="ADAL" clId="{93D479E5-F67F-4B8A-A78F-A0B574A116B6}" dt="2026-04-16T20:34:54.221" v="1762" actId="20577"/>
+          <ac:spMkLst>
+            <pc:docMk/>
+            <pc:sldMk cId="3526335932" sldId="266"/>
+            <ac:spMk id="7" creationId="{23A9500D-5A04-3835-D25E-8A73CF136F8C}"/>
           </ac:spMkLst>
         </pc:spChg>
       </pc:sldChg>
@@ -302,29 +270,6 @@
       <pc:docMkLst>
         <pc:docMk/>
       </pc:docMkLst>
-      <pc:sldChg chg="modSp mod">
-        <pc:chgData name="Margo Bonal" userId="18c9fa0f-b53d-478b-9dc0-6ad88786c19f" providerId="ADAL" clId="{57E2D5E0-CA32-47BE-A2DC-7B0365E99328}" dt="2026-03-28T15:09:10.496" v="233" actId="20577"/>
-        <pc:sldMkLst>
-          <pc:docMk/>
-          <pc:sldMk cId="2561402868" sldId="264"/>
-        </pc:sldMkLst>
-        <pc:spChg chg="mod">
-          <ac:chgData name="Margo Bonal" userId="18c9fa0f-b53d-478b-9dc0-6ad88786c19f" providerId="ADAL" clId="{57E2D5E0-CA32-47BE-A2DC-7B0365E99328}" dt="2026-03-28T13:35:29.157" v="163" actId="27636"/>
-          <ac:spMkLst>
-            <pc:docMk/>
-            <pc:sldMk cId="2561402868" sldId="264"/>
-            <ac:spMk id="9" creationId="{D6D36DC8-D9BF-8C26-69EA-ED89E34DB644}"/>
-          </ac:spMkLst>
-        </pc:spChg>
-        <pc:graphicFrameChg chg="mod modGraphic">
-          <ac:chgData name="Margo Bonal" userId="18c9fa0f-b53d-478b-9dc0-6ad88786c19f" providerId="ADAL" clId="{57E2D5E0-CA32-47BE-A2DC-7B0365E99328}" dt="2026-03-28T15:09:10.496" v="233" actId="20577"/>
-          <ac:graphicFrameMkLst>
-            <pc:docMk/>
-            <pc:sldMk cId="2561402868" sldId="264"/>
-            <ac:graphicFrameMk id="27" creationId="{D6B93F0B-FEB0-EDAB-CFE1-A57DEFE97FCD}"/>
-          </ac:graphicFrameMkLst>
-        </pc:graphicFrameChg>
-      </pc:sldChg>
       <pc:sldChg chg="delSp modSp mod">
         <pc:chgData name="Margo Bonal" userId="18c9fa0f-b53d-478b-9dc0-6ad88786c19f" providerId="ADAL" clId="{57E2D5E0-CA32-47BE-A2DC-7B0365E99328}" dt="2026-03-28T15:12:52.323" v="352" actId="20577"/>
         <pc:sldMkLst>
@@ -369,788 +314,6 @@
 </file>
 
 <file path=ppt/diagrams/colors1.xml><?xml version="1.0" encoding="utf-8"?>
-<dgm:colorsDef xmlns:dgm="http://schemas.openxmlformats.org/drawingml/2006/diagram" xmlns:a="http://schemas.openxmlformats.org/drawingml/2006/main" uniqueId="urn:microsoft.com/office/officeart/2005/8/colors/colorful3">
-  <dgm:title val=""/>
-  <dgm:desc val=""/>
-  <dgm:catLst>
-    <dgm:cat type="colorful" pri="10300"/>
-  </dgm:catLst>
-  <dgm:styleLbl name="node0">
-    <dgm:fillClrLst meth="repeat">
-      <a:schemeClr val="accent2"/>
-    </dgm:fillClrLst>
-    <dgm:linClrLst meth="repeat">
-      <a:schemeClr val="lt1"/>
-    </dgm:linClrLst>
-    <dgm:effectClrLst/>
-    <dgm:txLinClrLst/>
-    <dgm:txFillClrLst/>
-    <dgm:txEffectClrLst/>
-  </dgm:styleLbl>
-  <dgm:styleLbl name="node1">
-    <dgm:fillClrLst>
-      <a:schemeClr val="accent3"/>
-      <a:schemeClr val="accent4"/>
-    </dgm:fillClrLst>
-    <dgm:linClrLst meth="repeat">
-      <a:schemeClr val="lt1"/>
-    </dgm:linClrLst>
-    <dgm:effectClrLst/>
-    <dgm:txLinClrLst/>
-    <dgm:txFillClrLst/>
-    <dgm:txEffectClrLst/>
-  </dgm:styleLbl>
-  <dgm:styleLbl name="alignNode1">
-    <dgm:fillClrLst>
-      <a:schemeClr val="accent3"/>
-      <a:schemeClr val="accent4"/>
-    </dgm:fillClrLst>
-    <dgm:linClrLst>
-      <a:schemeClr val="accent3"/>
-      <a:schemeClr val="accent4"/>
-    </dgm:linClrLst>
-    <dgm:effectClrLst/>
-    <dgm:txLinClrLst/>
-    <dgm:txFillClrLst/>
-    <dgm:txEffectClrLst/>
-  </dgm:styleLbl>
-  <dgm:styleLbl name="lnNode1">
-    <dgm:fillClrLst>
-      <a:schemeClr val="accent3"/>
-      <a:schemeClr val="accent4"/>
-    </dgm:fillClrLst>
-    <dgm:linClrLst meth="repeat">
-      <a:schemeClr val="lt1"/>
-    </dgm:linClrLst>
-    <dgm:effectClrLst/>
-    <dgm:txLinClrLst/>
-    <dgm:txFillClrLst/>
-    <dgm:txEffectClrLst/>
-  </dgm:styleLbl>
-  <dgm:styleLbl name="vennNode1">
-    <dgm:fillClrLst>
-      <a:schemeClr val="accent3">
-        <a:alpha val="50000"/>
-      </a:schemeClr>
-      <a:schemeClr val="accent4">
-        <a:alpha val="50000"/>
-      </a:schemeClr>
-    </dgm:fillClrLst>
-    <dgm:linClrLst meth="repeat">
-      <a:schemeClr val="lt1"/>
-    </dgm:linClrLst>
-    <dgm:effectClrLst/>
-    <dgm:txLinClrLst/>
-    <dgm:txFillClrLst/>
-    <dgm:txEffectClrLst/>
-  </dgm:styleLbl>
-  <dgm:styleLbl name="node2">
-    <dgm:fillClrLst>
-      <a:schemeClr val="accent4"/>
-    </dgm:fillClrLst>
-    <dgm:linClrLst meth="repeat">
-      <a:schemeClr val="lt1"/>
-    </dgm:linClrLst>
-    <dgm:effectClrLst/>
-    <dgm:txLinClrLst/>
-    <dgm:txFillClrLst/>
-    <dgm:txEffectClrLst/>
-  </dgm:styleLbl>
-  <dgm:styleLbl name="node3">
-    <dgm:fillClrLst>
-      <a:schemeClr val="accent5"/>
-    </dgm:fillClrLst>
-    <dgm:linClrLst meth="repeat">
-      <a:schemeClr val="lt1"/>
-    </dgm:linClrLst>
-    <dgm:effectClrLst/>
-    <dgm:txLinClrLst/>
-    <dgm:txFillClrLst/>
-    <dgm:txEffectClrLst/>
-  </dgm:styleLbl>
-  <dgm:styleLbl name="node4">
-    <dgm:fillClrLst>
-      <a:schemeClr val="accent6"/>
-    </dgm:fillClrLst>
-    <dgm:linClrLst meth="repeat">
-      <a:schemeClr val="lt1"/>
-    </dgm:linClrLst>
-    <dgm:effectClrLst/>
-    <dgm:txLinClrLst/>
-    <dgm:txFillClrLst/>
-    <dgm:txEffectClrLst/>
-  </dgm:styleLbl>
-  <dgm:styleLbl name="fgImgPlace1">
-    <dgm:fillClrLst>
-      <a:schemeClr val="accent3">
-        <a:tint val="50000"/>
-      </a:schemeClr>
-      <a:schemeClr val="accent4">
-        <a:tint val="50000"/>
-      </a:schemeClr>
-    </dgm:fillClrLst>
-    <dgm:linClrLst meth="repeat">
-      <a:schemeClr val="lt1"/>
-    </dgm:linClrLst>
-    <dgm:effectClrLst/>
-    <dgm:txLinClrLst/>
-    <dgm:txFillClrLst meth="repeat">
-      <a:schemeClr val="lt1"/>
-    </dgm:txFillClrLst>
-    <dgm:txEffectClrLst/>
-  </dgm:styleLbl>
-  <dgm:styleLbl name="alignImgPlace1">
-    <dgm:fillClrLst>
-      <a:schemeClr val="accent3">
-        <a:tint val="50000"/>
-      </a:schemeClr>
-      <a:schemeClr val="accent4">
-        <a:tint val="20000"/>
-      </a:schemeClr>
-    </dgm:fillClrLst>
-    <dgm:linClrLst meth="repeat">
-      <a:schemeClr val="lt1"/>
-    </dgm:linClrLst>
-    <dgm:effectClrLst/>
-    <dgm:txLinClrLst/>
-    <dgm:txFillClrLst meth="repeat">
-      <a:schemeClr val="lt1"/>
-    </dgm:txFillClrLst>
-    <dgm:txEffectClrLst/>
-  </dgm:styleLbl>
-  <dgm:styleLbl name="bgImgPlace1">
-    <dgm:fillClrLst>
-      <a:schemeClr val="accent3">
-        <a:tint val="50000"/>
-      </a:schemeClr>
-      <a:schemeClr val="accent4">
-        <a:tint val="20000"/>
-      </a:schemeClr>
-    </dgm:fillClrLst>
-    <dgm:linClrLst meth="repeat">
-      <a:schemeClr val="lt1"/>
-    </dgm:linClrLst>
-    <dgm:effectClrLst/>
-    <dgm:txLinClrLst/>
-    <dgm:txFillClrLst meth="repeat">
-      <a:schemeClr val="lt1"/>
-    </dgm:txFillClrLst>
-    <dgm:txEffectClrLst/>
-  </dgm:styleLbl>
-  <dgm:styleLbl name="sibTrans2D1">
-    <dgm:fillClrLst>
-      <a:schemeClr val="accent3"/>
-      <a:schemeClr val="accent4"/>
-    </dgm:fillClrLst>
-    <dgm:linClrLst meth="repeat">
-      <a:schemeClr val="lt1"/>
-    </dgm:linClrLst>
-    <dgm:effectClrLst/>
-    <dgm:txLinClrLst/>
-    <dgm:txFillClrLst/>
-    <dgm:txEffectClrLst/>
-  </dgm:styleLbl>
-  <dgm:styleLbl name="fgSibTrans2D1">
-    <dgm:fillClrLst>
-      <a:schemeClr val="accent3"/>
-      <a:schemeClr val="accent4"/>
-    </dgm:fillClrLst>
-    <dgm:linClrLst meth="repeat">
-      <a:schemeClr val="lt1"/>
-    </dgm:linClrLst>
-    <dgm:effectClrLst/>
-    <dgm:txLinClrLst/>
-    <dgm:txFillClrLst meth="repeat">
-      <a:schemeClr val="lt1"/>
-    </dgm:txFillClrLst>
-    <dgm:txEffectClrLst/>
-  </dgm:styleLbl>
-  <dgm:styleLbl name="bgSibTrans2D1">
-    <dgm:fillClrLst>
-      <a:schemeClr val="accent3"/>
-      <a:schemeClr val="accent4"/>
-    </dgm:fillClrLst>
-    <dgm:linClrLst meth="repeat">
-      <a:schemeClr val="lt1"/>
-    </dgm:linClrLst>
-    <dgm:effectClrLst/>
-    <dgm:txLinClrLst/>
-    <dgm:txFillClrLst meth="repeat">
-      <a:schemeClr val="lt1"/>
-    </dgm:txFillClrLst>
-    <dgm:txEffectClrLst/>
-  </dgm:styleLbl>
-  <dgm:styleLbl name="sibTrans1D1">
-    <dgm:fillClrLst/>
-    <dgm:linClrLst>
-      <a:schemeClr val="accent3"/>
-      <a:schemeClr val="accent4"/>
-    </dgm:linClrLst>
-    <dgm:effectClrLst/>
-    <dgm:txLinClrLst/>
-    <dgm:txFillClrLst meth="repeat">
-      <a:schemeClr val="tx1"/>
-    </dgm:txFillClrLst>
-    <dgm:txEffectClrLst/>
-  </dgm:styleLbl>
-  <dgm:styleLbl name="callout">
-    <dgm:fillClrLst meth="repeat">
-      <a:schemeClr val="accent3"/>
-    </dgm:fillClrLst>
-    <dgm:linClrLst meth="repeat">
-      <a:schemeClr val="accent3">
-        <a:tint val="50000"/>
-      </a:schemeClr>
-    </dgm:linClrLst>
-    <dgm:effectClrLst/>
-    <dgm:txLinClrLst/>
-    <dgm:txFillClrLst meth="repeat">
-      <a:schemeClr val="tx1"/>
-    </dgm:txFillClrLst>
-    <dgm:txEffectClrLst/>
-  </dgm:styleLbl>
-  <dgm:styleLbl name="asst0">
-    <dgm:fillClrLst meth="repeat">
-      <a:schemeClr val="accent3"/>
-    </dgm:fillClrLst>
-    <dgm:linClrLst meth="repeat">
-      <a:schemeClr val="lt1">
-        <a:shade val="80000"/>
-      </a:schemeClr>
-    </dgm:linClrLst>
-    <dgm:effectClrLst/>
-    <dgm:txLinClrLst/>
-    <dgm:txFillClrLst/>
-    <dgm:txEffectClrLst/>
-  </dgm:styleLbl>
-  <dgm:styleLbl name="asst1">
-    <dgm:fillClrLst meth="repeat">
-      <a:schemeClr val="accent4"/>
-    </dgm:fillClrLst>
-    <dgm:linClrLst meth="repeat">
-      <a:schemeClr val="lt1">
-        <a:shade val="80000"/>
-      </a:schemeClr>
-    </dgm:linClrLst>
-    <dgm:effectClrLst/>
-    <dgm:txLinClrLst/>
-    <dgm:txFillClrLst/>
-    <dgm:txEffectClrLst/>
-  </dgm:styleLbl>
-  <dgm:styleLbl name="asst2">
-    <dgm:fillClrLst>
-      <a:schemeClr val="accent5"/>
-    </dgm:fillClrLst>
-    <dgm:linClrLst meth="repeat">
-      <a:schemeClr val="lt1"/>
-    </dgm:linClrLst>
-    <dgm:effectClrLst/>
-    <dgm:txLinClrLst/>
-    <dgm:txFillClrLst/>
-    <dgm:txEffectClrLst/>
-  </dgm:styleLbl>
-  <dgm:styleLbl name="asst3">
-    <dgm:fillClrLst>
-      <a:schemeClr val="accent6"/>
-    </dgm:fillClrLst>
-    <dgm:linClrLst meth="repeat">
-      <a:schemeClr val="lt1"/>
-    </dgm:linClrLst>
-    <dgm:effectClrLst/>
-    <dgm:txLinClrLst/>
-    <dgm:txFillClrLst/>
-    <dgm:txEffectClrLst/>
-  </dgm:styleLbl>
-  <dgm:styleLbl name="asst4">
-    <dgm:fillClrLst>
-      <a:schemeClr val="accent1"/>
-    </dgm:fillClrLst>
-    <dgm:linClrLst meth="repeat">
-      <a:schemeClr val="lt1"/>
-    </dgm:linClrLst>
-    <dgm:effectClrLst/>
-    <dgm:txLinClrLst/>
-    <dgm:txFillClrLst/>
-    <dgm:txEffectClrLst/>
-  </dgm:styleLbl>
-  <dgm:styleLbl name="parChTrans2D1">
-    <dgm:fillClrLst meth="repeat">
-      <a:schemeClr val="accent2"/>
-    </dgm:fillClrLst>
-    <dgm:linClrLst meth="repeat">
-      <a:schemeClr val="lt1"/>
-    </dgm:linClrLst>
-    <dgm:effectClrLst/>
-    <dgm:txLinClrLst/>
-    <dgm:txFillClrLst meth="repeat">
-      <a:schemeClr val="lt1"/>
-    </dgm:txFillClrLst>
-    <dgm:txEffectClrLst/>
-  </dgm:styleLbl>
-  <dgm:styleLbl name="parChTrans2D2">
-    <dgm:fillClrLst meth="repeat">
-      <a:schemeClr val="accent3"/>
-    </dgm:fillClrLst>
-    <dgm:linClrLst meth="repeat">
-      <a:schemeClr val="lt1"/>
-    </dgm:linClrLst>
-    <dgm:effectClrLst/>
-    <dgm:txLinClrLst/>
-    <dgm:txFillClrLst/>
-    <dgm:txEffectClrLst/>
-  </dgm:styleLbl>
-  <dgm:styleLbl name="parChTrans2D3">
-    <dgm:fillClrLst meth="repeat">
-      <a:schemeClr val="accent4"/>
-    </dgm:fillClrLst>
-    <dgm:linClrLst meth="repeat">
-      <a:schemeClr val="lt1"/>
-    </dgm:linClrLst>
-    <dgm:effectClrLst/>
-    <dgm:txLinClrLst/>
-    <dgm:txFillClrLst/>
-    <dgm:txEffectClrLst/>
-  </dgm:styleLbl>
-  <dgm:styleLbl name="parChTrans2D4">
-    <dgm:fillClrLst meth="repeat">
-      <a:schemeClr val="accent5"/>
-    </dgm:fillClrLst>
-    <dgm:linClrLst meth="repeat">
-      <a:schemeClr val="lt1"/>
-    </dgm:linClrLst>
-    <dgm:effectClrLst/>
-    <dgm:txLinClrLst/>
-    <dgm:txFillClrLst meth="repeat">
-      <a:schemeClr val="lt1"/>
-    </dgm:txFillClrLst>
-    <dgm:txEffectClrLst/>
-  </dgm:styleLbl>
-  <dgm:styleLbl name="parChTrans1D1">
-    <dgm:fillClrLst meth="repeat">
-      <a:schemeClr val="accent3"/>
-    </dgm:fillClrLst>
-    <dgm:linClrLst meth="repeat">
-      <a:schemeClr val="accent3"/>
-    </dgm:linClrLst>
-    <dgm:effectClrLst/>
-    <dgm:txLinClrLst/>
-    <dgm:txFillClrLst meth="repeat">
-      <a:schemeClr val="tx1"/>
-    </dgm:txFillClrLst>
-    <dgm:txEffectClrLst/>
-  </dgm:styleLbl>
-  <dgm:styleLbl name="parChTrans1D2">
-    <dgm:fillClrLst meth="repeat">
-      <a:schemeClr val="accent2">
-        <a:tint val="90000"/>
-      </a:schemeClr>
-    </dgm:fillClrLst>
-    <dgm:linClrLst meth="repeat">
-      <a:schemeClr val="accent4"/>
-    </dgm:linClrLst>
-    <dgm:effectClrLst/>
-    <dgm:txLinClrLst/>
-    <dgm:txFillClrLst meth="repeat">
-      <a:schemeClr val="tx1"/>
-    </dgm:txFillClrLst>
-    <dgm:txEffectClrLst/>
-  </dgm:styleLbl>
-  <dgm:styleLbl name="parChTrans1D3">
-    <dgm:fillClrLst meth="repeat">
-      <a:schemeClr val="accent2">
-        <a:tint val="70000"/>
-      </a:schemeClr>
-    </dgm:fillClrLst>
-    <dgm:linClrLst meth="repeat">
-      <a:schemeClr val="accent5"/>
-    </dgm:linClrLst>
-    <dgm:effectClrLst/>
-    <dgm:txLinClrLst/>
-    <dgm:txFillClrLst meth="repeat">
-      <a:schemeClr val="tx1"/>
-    </dgm:txFillClrLst>
-    <dgm:txEffectClrLst/>
-  </dgm:styleLbl>
-  <dgm:styleLbl name="parChTrans1D4">
-    <dgm:fillClrLst meth="repeat">
-      <a:schemeClr val="accent6">
-        <a:tint val="50000"/>
-      </a:schemeClr>
-    </dgm:fillClrLst>
-    <dgm:linClrLst meth="repeat">
-      <a:schemeClr val="accent6"/>
-    </dgm:linClrLst>
-    <dgm:effectClrLst/>
-    <dgm:txLinClrLst/>
-    <dgm:txFillClrLst meth="repeat">
-      <a:schemeClr val="tx1"/>
-    </dgm:txFillClrLst>
-    <dgm:txEffectClrLst/>
-  </dgm:styleLbl>
-  <dgm:styleLbl name="fgAcc1">
-    <dgm:fillClrLst meth="repeat">
-      <a:schemeClr val="lt1">
-        <a:alpha val="90000"/>
-      </a:schemeClr>
-    </dgm:fillClrLst>
-    <dgm:linClrLst>
-      <a:schemeClr val="accent3"/>
-      <a:schemeClr val="accent4"/>
-    </dgm:linClrLst>
-    <dgm:effectClrLst/>
-    <dgm:txLinClrLst/>
-    <dgm:txFillClrLst meth="repeat">
-      <a:schemeClr val="dk1"/>
-    </dgm:txFillClrLst>
-    <dgm:txEffectClrLst/>
-  </dgm:styleLbl>
-  <dgm:styleLbl name="conFgAcc1">
-    <dgm:fillClrLst meth="repeat">
-      <a:schemeClr val="lt1">
-        <a:alpha val="90000"/>
-      </a:schemeClr>
-    </dgm:fillClrLst>
-    <dgm:linClrLst>
-      <a:schemeClr val="accent3"/>
-      <a:schemeClr val="accent4"/>
-    </dgm:linClrLst>
-    <dgm:effectClrLst/>
-    <dgm:txLinClrLst/>
-    <dgm:txFillClrLst meth="repeat">
-      <a:schemeClr val="dk1"/>
-    </dgm:txFillClrLst>
-    <dgm:txEffectClrLst/>
-  </dgm:styleLbl>
-  <dgm:styleLbl name="alignAcc1">
-    <dgm:fillClrLst meth="repeat">
-      <a:schemeClr val="lt1">
-        <a:alpha val="90000"/>
-      </a:schemeClr>
-    </dgm:fillClrLst>
-    <dgm:linClrLst>
-      <a:schemeClr val="accent3"/>
-      <a:schemeClr val="accent4"/>
-    </dgm:linClrLst>
-    <dgm:effectClrLst/>
-    <dgm:txLinClrLst/>
-    <dgm:txFillClrLst meth="repeat">
-      <a:schemeClr val="dk1"/>
-    </dgm:txFillClrLst>
-    <dgm:txEffectClrLst/>
-  </dgm:styleLbl>
-  <dgm:styleLbl name="trAlignAcc1">
-    <dgm:fillClrLst meth="repeat">
-      <a:schemeClr val="lt1">
-        <a:alpha val="40000"/>
-      </a:schemeClr>
-    </dgm:fillClrLst>
-    <dgm:linClrLst meth="repeat">
-      <a:schemeClr val="accent2"/>
-    </dgm:linClrLst>
-    <dgm:effectClrLst/>
-    <dgm:txLinClrLst/>
-    <dgm:txFillClrLst meth="repeat">
-      <a:schemeClr val="dk1"/>
-    </dgm:txFillClrLst>
-    <dgm:txEffectClrLst/>
-  </dgm:styleLbl>
-  <dgm:styleLbl name="bgAcc1">
-    <dgm:fillClrLst meth="repeat">
-      <a:schemeClr val="lt1">
-        <a:alpha val="90000"/>
-      </a:schemeClr>
-    </dgm:fillClrLst>
-    <dgm:linClrLst>
-      <a:schemeClr val="accent3"/>
-      <a:schemeClr val="accent4"/>
-    </dgm:linClrLst>
-    <dgm:effectClrLst/>
-    <dgm:txLinClrLst/>
-    <dgm:txFillClrLst meth="repeat">
-      <a:schemeClr val="dk1"/>
-    </dgm:txFillClrLst>
-    <dgm:txEffectClrLst/>
-  </dgm:styleLbl>
-  <dgm:styleLbl name="solidFgAcc1">
-    <dgm:fillClrLst meth="repeat">
-      <a:schemeClr val="lt1"/>
-    </dgm:fillClrLst>
-    <dgm:linClrLst>
-      <a:schemeClr val="accent3"/>
-      <a:schemeClr val="accent4"/>
-    </dgm:linClrLst>
-    <dgm:effectClrLst/>
-    <dgm:txLinClrLst/>
-    <dgm:txFillClrLst meth="repeat">
-      <a:schemeClr val="dk1"/>
-    </dgm:txFillClrLst>
-    <dgm:txEffectClrLst/>
-  </dgm:styleLbl>
-  <dgm:styleLbl name="solidAlignAcc1">
-    <dgm:fillClrLst meth="repeat">
-      <a:schemeClr val="lt1"/>
-    </dgm:fillClrLst>
-    <dgm:linClrLst>
-      <a:schemeClr val="accent3"/>
-      <a:schemeClr val="accent4"/>
-    </dgm:linClrLst>
-    <dgm:effectClrLst/>
-    <dgm:txLinClrLst/>
-    <dgm:txFillClrLst meth="repeat">
-      <a:schemeClr val="dk1"/>
-    </dgm:txFillClrLst>
-    <dgm:txEffectClrLst/>
-  </dgm:styleLbl>
-  <dgm:styleLbl name="solidBgAcc1">
-    <dgm:fillClrLst meth="repeat">
-      <a:schemeClr val="lt1"/>
-    </dgm:fillClrLst>
-    <dgm:linClrLst>
-      <a:schemeClr val="accent3"/>
-      <a:schemeClr val="accent4"/>
-    </dgm:linClrLst>
-    <dgm:effectClrLst/>
-    <dgm:txLinClrLst/>
-    <dgm:txFillClrLst meth="repeat">
-      <a:schemeClr val="dk1"/>
-    </dgm:txFillClrLst>
-    <dgm:txEffectClrLst/>
-  </dgm:styleLbl>
-  <dgm:styleLbl name="fgAccFollowNode1">
-    <dgm:fillClrLst>
-      <a:schemeClr val="accent3">
-        <a:tint val="40000"/>
-        <a:alpha val="90000"/>
-      </a:schemeClr>
-      <a:schemeClr val="accent4">
-        <a:tint val="40000"/>
-        <a:alpha val="90000"/>
-      </a:schemeClr>
-    </dgm:fillClrLst>
-    <dgm:linClrLst>
-      <a:schemeClr val="accent3">
-        <a:tint val="40000"/>
-        <a:alpha val="90000"/>
-      </a:schemeClr>
-      <a:schemeClr val="accent4">
-        <a:tint val="40000"/>
-        <a:alpha val="90000"/>
-      </a:schemeClr>
-    </dgm:linClrLst>
-    <dgm:effectClrLst/>
-    <dgm:txLinClrLst/>
-    <dgm:txFillClrLst meth="repeat">
-      <a:schemeClr val="dk1"/>
-    </dgm:txFillClrLst>
-    <dgm:txEffectClrLst/>
-  </dgm:styleLbl>
-  <dgm:styleLbl name="alignAccFollowNode1">
-    <dgm:fillClrLst>
-      <a:schemeClr val="accent3">
-        <a:tint val="40000"/>
-        <a:alpha val="90000"/>
-      </a:schemeClr>
-      <a:schemeClr val="accent4">
-        <a:tint val="40000"/>
-        <a:alpha val="90000"/>
-      </a:schemeClr>
-    </dgm:fillClrLst>
-    <dgm:linClrLst>
-      <a:schemeClr val="accent3">
-        <a:tint val="40000"/>
-        <a:alpha val="90000"/>
-      </a:schemeClr>
-      <a:schemeClr val="accent4">
-        <a:tint val="40000"/>
-        <a:alpha val="90000"/>
-      </a:schemeClr>
-    </dgm:linClrLst>
-    <dgm:effectClrLst/>
-    <dgm:txLinClrLst/>
-    <dgm:txFillClrLst meth="repeat">
-      <a:schemeClr val="dk1"/>
-    </dgm:txFillClrLst>
-    <dgm:txEffectClrLst/>
-  </dgm:styleLbl>
-  <dgm:styleLbl name="bgAccFollowNode1">
-    <dgm:fillClrLst>
-      <a:schemeClr val="accent3">
-        <a:tint val="40000"/>
-        <a:alpha val="90000"/>
-      </a:schemeClr>
-      <a:schemeClr val="accent4">
-        <a:tint val="40000"/>
-        <a:alpha val="90000"/>
-      </a:schemeClr>
-    </dgm:fillClrLst>
-    <dgm:linClrLst>
-      <a:schemeClr val="accent3">
-        <a:tint val="40000"/>
-        <a:alpha val="90000"/>
-      </a:schemeClr>
-      <a:schemeClr val="accent4">
-        <a:tint val="40000"/>
-        <a:alpha val="90000"/>
-      </a:schemeClr>
-    </dgm:linClrLst>
-    <dgm:effectClrLst/>
-    <dgm:txLinClrLst/>
-    <dgm:txFillClrLst meth="repeat">
-      <a:schemeClr val="dk1"/>
-    </dgm:txFillClrLst>
-    <dgm:txEffectClrLst/>
-  </dgm:styleLbl>
-  <dgm:styleLbl name="fgAcc0">
-    <dgm:fillClrLst meth="repeat">
-      <a:schemeClr val="lt1">
-        <a:alpha val="90000"/>
-      </a:schemeClr>
-    </dgm:fillClrLst>
-    <dgm:linClrLst>
-      <a:schemeClr val="accent2"/>
-    </dgm:linClrLst>
-    <dgm:effectClrLst/>
-    <dgm:txLinClrLst/>
-    <dgm:txFillClrLst meth="repeat">
-      <a:schemeClr val="dk1"/>
-    </dgm:txFillClrLst>
-    <dgm:txEffectClrLst/>
-  </dgm:styleLbl>
-  <dgm:styleLbl name="fgAcc2">
-    <dgm:fillClrLst meth="repeat">
-      <a:schemeClr val="lt1">
-        <a:alpha val="90000"/>
-      </a:schemeClr>
-    </dgm:fillClrLst>
-    <dgm:linClrLst>
-      <a:schemeClr val="accent4"/>
-    </dgm:linClrLst>
-    <dgm:effectClrLst/>
-    <dgm:txLinClrLst/>
-    <dgm:txFillClrLst meth="repeat">
-      <a:schemeClr val="dk1"/>
-    </dgm:txFillClrLst>
-    <dgm:txEffectClrLst/>
-  </dgm:styleLbl>
-  <dgm:styleLbl name="fgAcc3">
-    <dgm:fillClrLst meth="repeat">
-      <a:schemeClr val="lt1">
-        <a:alpha val="90000"/>
-      </a:schemeClr>
-    </dgm:fillClrLst>
-    <dgm:linClrLst>
-      <a:schemeClr val="accent5"/>
-    </dgm:linClrLst>
-    <dgm:effectClrLst/>
-    <dgm:txLinClrLst/>
-    <dgm:txFillClrLst meth="repeat">
-      <a:schemeClr val="dk1"/>
-    </dgm:txFillClrLst>
-    <dgm:txEffectClrLst/>
-  </dgm:styleLbl>
-  <dgm:styleLbl name="fgAcc4">
-    <dgm:fillClrLst meth="repeat">
-      <a:schemeClr val="lt1">
-        <a:alpha val="90000"/>
-      </a:schemeClr>
-    </dgm:fillClrLst>
-    <dgm:linClrLst>
-      <a:schemeClr val="accent6"/>
-    </dgm:linClrLst>
-    <dgm:effectClrLst/>
-    <dgm:txLinClrLst/>
-    <dgm:txFillClrLst meth="repeat">
-      <a:schemeClr val="dk1"/>
-    </dgm:txFillClrLst>
-    <dgm:txEffectClrLst/>
-  </dgm:styleLbl>
-  <dgm:styleLbl name="bgShp">
-    <dgm:fillClrLst meth="repeat">
-      <a:schemeClr val="accent3">
-        <a:tint val="40000"/>
-      </a:schemeClr>
-    </dgm:fillClrLst>
-    <dgm:linClrLst meth="repeat">
-      <a:schemeClr val="dk1"/>
-    </dgm:linClrLst>
-    <dgm:effectClrLst/>
-    <dgm:txLinClrLst/>
-    <dgm:txFillClrLst meth="repeat">
-      <a:schemeClr val="dk1"/>
-    </dgm:txFillClrLst>
-    <dgm:txEffectClrLst/>
-  </dgm:styleLbl>
-  <dgm:styleLbl name="dkBgShp">
-    <dgm:fillClrLst meth="repeat">
-      <a:schemeClr val="accent3">
-        <a:shade val="90000"/>
-      </a:schemeClr>
-    </dgm:fillClrLst>
-    <dgm:linClrLst meth="repeat">
-      <a:schemeClr val="dk1"/>
-    </dgm:linClrLst>
-    <dgm:effectClrLst/>
-    <dgm:txLinClrLst/>
-    <dgm:txFillClrLst meth="repeat">
-      <a:schemeClr val="lt1"/>
-    </dgm:txFillClrLst>
-    <dgm:txEffectClrLst/>
-  </dgm:styleLbl>
-  <dgm:styleLbl name="trBgShp">
-    <dgm:fillClrLst meth="repeat">
-      <a:schemeClr val="accent2">
-        <a:tint val="50000"/>
-        <a:alpha val="40000"/>
-      </a:schemeClr>
-    </dgm:fillClrLst>
-    <dgm:linClrLst meth="repeat">
-      <a:schemeClr val="accent3"/>
-    </dgm:linClrLst>
-    <dgm:effectClrLst/>
-    <dgm:txLinClrLst/>
-    <dgm:txFillClrLst meth="repeat">
-      <a:schemeClr val="lt1"/>
-    </dgm:txFillClrLst>
-    <dgm:txEffectClrLst/>
-  </dgm:styleLbl>
-  <dgm:styleLbl name="fgShp">
-    <dgm:fillClrLst meth="repeat">
-      <a:schemeClr val="accent3">
-        <a:tint val="40000"/>
-      </a:schemeClr>
-    </dgm:fillClrLst>
-    <dgm:linClrLst meth="repeat">
-      <a:schemeClr val="lt1"/>
-    </dgm:linClrLst>
-    <dgm:effectClrLst/>
-    <dgm:txLinClrLst/>
-    <dgm:txFillClrLst meth="repeat">
-      <a:schemeClr val="dk1"/>
-    </dgm:txFillClrLst>
-    <dgm:txEffectClrLst/>
-  </dgm:styleLbl>
-  <dgm:styleLbl name="revTx">
-    <dgm:fillClrLst meth="repeat">
-      <a:schemeClr val="lt1">
-        <a:alpha val="0"/>
-      </a:schemeClr>
-    </dgm:fillClrLst>
-    <dgm:linClrLst meth="repeat">
-      <a:schemeClr val="dk1">
-        <a:alpha val="0"/>
-      </a:schemeClr>
-    </dgm:linClrLst>
-    <dgm:effectClrLst/>
-    <dgm:txLinClrLst/>
-    <dgm:txFillClrLst meth="repeat">
-      <a:schemeClr val="tx1"/>
-    </dgm:txFillClrLst>
-    <dgm:txEffectClrLst/>
-  </dgm:styleLbl>
-</dgm:colorsDef>
-</file>
-
-<file path=ppt/diagrams/colors2.xml><?xml version="1.0" encoding="utf-8"?>
 <dgm:colorsDef xmlns:dgm="http://schemas.openxmlformats.org/drawingml/2006/diagram" xmlns:a="http://schemas.openxmlformats.org/drawingml/2006/main" uniqueId="urn:microsoft.com/office/officeart/2005/8/colors/colorful3">
   <dgm:title val=""/>
   <dgm:desc val=""/>
@@ -2167,314 +1330,6 @@
 </dgm:dataModel>
 </file>
 
-<file path=ppt/diagrams/data2.xml><?xml version="1.0" encoding="utf-8"?>
-<dgm:dataModel xmlns:dgm="http://schemas.openxmlformats.org/drawingml/2006/diagram" xmlns:a="http://schemas.openxmlformats.org/drawingml/2006/main">
-  <dgm:ptLst>
-    <dgm:pt modelId="{875220B3-5F43-41BF-82F0-F1D5090E78B1}" type="doc">
-      <dgm:prSet loTypeId="urn:microsoft.com/office/officeart/2005/8/layout/hierarchy1" loCatId="hierarchy" qsTypeId="urn:microsoft.com/office/officeart/2005/8/quickstyle/simple1" qsCatId="simple" csTypeId="urn:microsoft.com/office/officeart/2005/8/colors/colorful3" csCatId="colorful" phldr="1"/>
-      <dgm:spPr/>
-      <dgm:t>
-        <a:bodyPr/>
-        <a:lstStyle/>
-        <a:p>
-          <a:endParaRPr lang="en-US"/>
-        </a:p>
-      </dgm:t>
-    </dgm:pt>
-    <dgm:pt modelId="{7D77D55D-8CCB-40C4-94CB-4B06CD8B8779}">
-      <dgm:prSet/>
-      <dgm:spPr/>
-      <dgm:t>
-        <a:bodyPr/>
-        <a:lstStyle/>
-        <a:p>
-          <a:r>
-            <a:rPr lang="en-US" dirty="0"/>
-            <a:t>Make a Hard Copy of User Manual</a:t>
-          </a:r>
-        </a:p>
-      </dgm:t>
-    </dgm:pt>
-    <dgm:pt modelId="{6A9C7EF0-5CCC-409B-8130-14FC63A16319}" type="parTrans" cxnId="{A836B724-0D4D-49B8-8C7E-FE8E2C59804C}">
-      <dgm:prSet/>
-      <dgm:spPr/>
-      <dgm:t>
-        <a:bodyPr/>
-        <a:lstStyle/>
-        <a:p>
-          <a:endParaRPr lang="en-US"/>
-        </a:p>
-      </dgm:t>
-    </dgm:pt>
-    <dgm:pt modelId="{3EAD9D27-CDC1-4D2B-8EDB-51D7B39371E6}" type="sibTrans" cxnId="{A836B724-0D4D-49B8-8C7E-FE8E2C59804C}">
-      <dgm:prSet/>
-      <dgm:spPr/>
-      <dgm:t>
-        <a:bodyPr/>
-        <a:lstStyle/>
-        <a:p>
-          <a:endParaRPr lang="en-US"/>
-        </a:p>
-      </dgm:t>
-    </dgm:pt>
-    <dgm:pt modelId="{9C35D664-F4ED-4924-B85E-A22D43967662}">
-      <dgm:prSet/>
-      <dgm:spPr/>
-      <dgm:t>
-        <a:bodyPr/>
-        <a:lstStyle/>
-        <a:p>
-          <a:r>
-            <a:rPr lang="en-US" dirty="0"/>
-            <a:t>Practice Final Presentation</a:t>
-          </a:r>
-        </a:p>
-      </dgm:t>
-    </dgm:pt>
-    <dgm:pt modelId="{C36022C4-2A61-4049-9E7C-3331704CC85B}" type="parTrans" cxnId="{96D4C5E8-25DD-4F37-89A6-060DD8940082}">
-      <dgm:prSet/>
-      <dgm:spPr/>
-      <dgm:t>
-        <a:bodyPr/>
-        <a:lstStyle/>
-        <a:p>
-          <a:endParaRPr lang="en-US"/>
-        </a:p>
-      </dgm:t>
-    </dgm:pt>
-    <dgm:pt modelId="{8166ABFB-FA54-4D42-B19D-457B349DE33D}" type="sibTrans" cxnId="{96D4C5E8-25DD-4F37-89A6-060DD8940082}">
-      <dgm:prSet/>
-      <dgm:spPr/>
-      <dgm:t>
-        <a:bodyPr/>
-        <a:lstStyle/>
-        <a:p>
-          <a:endParaRPr lang="en-US"/>
-        </a:p>
-      </dgm:t>
-    </dgm:pt>
-    <dgm:pt modelId="{C49388FA-8759-42AF-B435-0EC20E6DCE5A}">
-      <dgm:prSet/>
-      <dgm:spPr/>
-      <dgm:t>
-        <a:bodyPr/>
-        <a:lstStyle/>
-        <a:p>
-          <a:r>
-            <a:rPr lang="en-US" dirty="0"/>
-            <a:t>Continue Work on the Final Presentation Slides</a:t>
-          </a:r>
-        </a:p>
-      </dgm:t>
-    </dgm:pt>
-    <dgm:pt modelId="{A7FDF1A3-16E2-4E7B-8E33-66EC6AB64844}" type="parTrans" cxnId="{5D3769DF-636C-4089-9393-E8D3AFCE8089}">
-      <dgm:prSet/>
-      <dgm:spPr/>
-      <dgm:t>
-        <a:bodyPr/>
-        <a:lstStyle/>
-        <a:p>
-          <a:endParaRPr lang="en-US"/>
-        </a:p>
-      </dgm:t>
-    </dgm:pt>
-    <dgm:pt modelId="{72F98EF2-B12B-4A57-A73C-7E6A778B34D1}" type="sibTrans" cxnId="{5D3769DF-636C-4089-9393-E8D3AFCE8089}">
-      <dgm:prSet/>
-      <dgm:spPr/>
-      <dgm:t>
-        <a:bodyPr/>
-        <a:lstStyle/>
-        <a:p>
-          <a:endParaRPr lang="en-US"/>
-        </a:p>
-      </dgm:t>
-    </dgm:pt>
-    <dgm:pt modelId="{CFFC745A-582B-4305-AFB6-C7730C8AA2CC}">
-      <dgm:prSet/>
-      <dgm:spPr/>
-      <dgm:t>
-        <a:bodyPr/>
-        <a:lstStyle/>
-        <a:p>
-          <a:r>
-            <a:rPr lang="en-US" dirty="0"/>
-            <a:t>Continue Testing/Debugging Project</a:t>
-          </a:r>
-        </a:p>
-      </dgm:t>
-    </dgm:pt>
-    <dgm:pt modelId="{B9E7BF58-A98B-4D6B-905C-CA13F8AC758B}" type="parTrans" cxnId="{183FDA93-1A29-47D6-AEC1-00CDFABC21C6}">
-      <dgm:prSet/>
-      <dgm:spPr/>
-      <dgm:t>
-        <a:bodyPr/>
-        <a:lstStyle/>
-        <a:p>
-          <a:endParaRPr lang="en-US"/>
-        </a:p>
-      </dgm:t>
-    </dgm:pt>
-    <dgm:pt modelId="{2E6863E9-19BE-4B40-B701-A6159F4DE04E}" type="sibTrans" cxnId="{183FDA93-1A29-47D6-AEC1-00CDFABC21C6}">
-      <dgm:prSet/>
-      <dgm:spPr/>
-      <dgm:t>
-        <a:bodyPr/>
-        <a:lstStyle/>
-        <a:p>
-          <a:endParaRPr lang="en-US"/>
-        </a:p>
-      </dgm:t>
-    </dgm:pt>
-    <dgm:pt modelId="{F85EEB6F-AAF0-4C94-BC92-C847D8A79108}" type="pres">
-      <dgm:prSet presAssocID="{875220B3-5F43-41BF-82F0-F1D5090E78B1}" presName="hierChild1" presStyleCnt="0">
-        <dgm:presLayoutVars>
-          <dgm:chPref val="1"/>
-          <dgm:dir/>
-          <dgm:animOne val="branch"/>
-          <dgm:animLvl val="lvl"/>
-          <dgm:resizeHandles/>
-        </dgm:presLayoutVars>
-      </dgm:prSet>
-      <dgm:spPr/>
-    </dgm:pt>
-    <dgm:pt modelId="{1B7C8F59-19C7-4811-ACF5-94E83EF18D53}" type="pres">
-      <dgm:prSet presAssocID="{7D77D55D-8CCB-40C4-94CB-4B06CD8B8779}" presName="hierRoot1" presStyleCnt="0"/>
-      <dgm:spPr/>
-    </dgm:pt>
-    <dgm:pt modelId="{8918ADED-6A57-4174-8DFD-B8853753C67B}" type="pres">
-      <dgm:prSet presAssocID="{7D77D55D-8CCB-40C4-94CB-4B06CD8B8779}" presName="composite" presStyleCnt="0"/>
-      <dgm:spPr/>
-    </dgm:pt>
-    <dgm:pt modelId="{98190555-19A4-4CFA-B5ED-89857792E0B9}" type="pres">
-      <dgm:prSet presAssocID="{7D77D55D-8CCB-40C4-94CB-4B06CD8B8779}" presName="background" presStyleLbl="node0" presStyleIdx="0" presStyleCnt="4"/>
-      <dgm:spPr/>
-    </dgm:pt>
-    <dgm:pt modelId="{1183B01D-027F-4222-9A5D-26614D621D81}" type="pres">
-      <dgm:prSet presAssocID="{7D77D55D-8CCB-40C4-94CB-4B06CD8B8779}" presName="text" presStyleLbl="fgAcc0" presStyleIdx="0" presStyleCnt="4">
-        <dgm:presLayoutVars>
-          <dgm:chPref val="3"/>
-        </dgm:presLayoutVars>
-      </dgm:prSet>
-      <dgm:spPr/>
-    </dgm:pt>
-    <dgm:pt modelId="{769B866C-995B-4621-BF4F-632E3E797DE6}" type="pres">
-      <dgm:prSet presAssocID="{7D77D55D-8CCB-40C4-94CB-4B06CD8B8779}" presName="hierChild2" presStyleCnt="0"/>
-      <dgm:spPr/>
-    </dgm:pt>
-    <dgm:pt modelId="{7C0E07B7-20A4-4341-8762-1E58F807E8BA}" type="pres">
-      <dgm:prSet presAssocID="{9C35D664-F4ED-4924-B85E-A22D43967662}" presName="hierRoot1" presStyleCnt="0"/>
-      <dgm:spPr/>
-    </dgm:pt>
-    <dgm:pt modelId="{167A3E1F-AD74-4598-B50A-3C9D400D900E}" type="pres">
-      <dgm:prSet presAssocID="{9C35D664-F4ED-4924-B85E-A22D43967662}" presName="composite" presStyleCnt="0"/>
-      <dgm:spPr/>
-    </dgm:pt>
-    <dgm:pt modelId="{FE1BC2AB-A6F4-451D-B5E4-EBBE2F580413}" type="pres">
-      <dgm:prSet presAssocID="{9C35D664-F4ED-4924-B85E-A22D43967662}" presName="background" presStyleLbl="node0" presStyleIdx="1" presStyleCnt="4"/>
-      <dgm:spPr/>
-    </dgm:pt>
-    <dgm:pt modelId="{EE8EEF36-F451-494C-9D0C-6D4B4B602222}" type="pres">
-      <dgm:prSet presAssocID="{9C35D664-F4ED-4924-B85E-A22D43967662}" presName="text" presStyleLbl="fgAcc0" presStyleIdx="1" presStyleCnt="4">
-        <dgm:presLayoutVars>
-          <dgm:chPref val="3"/>
-        </dgm:presLayoutVars>
-      </dgm:prSet>
-      <dgm:spPr/>
-    </dgm:pt>
-    <dgm:pt modelId="{7BE69AD2-283F-47B6-B4ED-6AF7473EBC65}" type="pres">
-      <dgm:prSet presAssocID="{9C35D664-F4ED-4924-B85E-A22D43967662}" presName="hierChild2" presStyleCnt="0"/>
-      <dgm:spPr/>
-    </dgm:pt>
-    <dgm:pt modelId="{8FCB07DD-8C86-4759-993A-97EAB36CF060}" type="pres">
-      <dgm:prSet presAssocID="{C49388FA-8759-42AF-B435-0EC20E6DCE5A}" presName="hierRoot1" presStyleCnt="0"/>
-      <dgm:spPr/>
-    </dgm:pt>
-    <dgm:pt modelId="{E82A0866-4149-47CD-B7FE-725DE8D2F42E}" type="pres">
-      <dgm:prSet presAssocID="{C49388FA-8759-42AF-B435-0EC20E6DCE5A}" presName="composite" presStyleCnt="0"/>
-      <dgm:spPr/>
-    </dgm:pt>
-    <dgm:pt modelId="{D5A840D2-D89A-4DE4-9831-61DED3425ED9}" type="pres">
-      <dgm:prSet presAssocID="{C49388FA-8759-42AF-B435-0EC20E6DCE5A}" presName="background" presStyleLbl="node0" presStyleIdx="2" presStyleCnt="4"/>
-      <dgm:spPr/>
-    </dgm:pt>
-    <dgm:pt modelId="{D12292E6-4F4E-4072-8A83-08E55313428E}" type="pres">
-      <dgm:prSet presAssocID="{C49388FA-8759-42AF-B435-0EC20E6DCE5A}" presName="text" presStyleLbl="fgAcc0" presStyleIdx="2" presStyleCnt="4">
-        <dgm:presLayoutVars>
-          <dgm:chPref val="3"/>
-        </dgm:presLayoutVars>
-      </dgm:prSet>
-      <dgm:spPr/>
-    </dgm:pt>
-    <dgm:pt modelId="{4846E4EF-BE4F-4C74-9B33-E579B1E66ED7}" type="pres">
-      <dgm:prSet presAssocID="{C49388FA-8759-42AF-B435-0EC20E6DCE5A}" presName="hierChild2" presStyleCnt="0"/>
-      <dgm:spPr/>
-    </dgm:pt>
-    <dgm:pt modelId="{EBA713AF-B350-4D3E-A9E7-FD3AFE718B21}" type="pres">
-      <dgm:prSet presAssocID="{CFFC745A-582B-4305-AFB6-C7730C8AA2CC}" presName="hierRoot1" presStyleCnt="0"/>
-      <dgm:spPr/>
-    </dgm:pt>
-    <dgm:pt modelId="{465E7B60-C054-45A0-BC18-BEE959253085}" type="pres">
-      <dgm:prSet presAssocID="{CFFC745A-582B-4305-AFB6-C7730C8AA2CC}" presName="composite" presStyleCnt="0"/>
-      <dgm:spPr/>
-    </dgm:pt>
-    <dgm:pt modelId="{46DC7518-C20F-4A8F-980E-6F93A13BFE65}" type="pres">
-      <dgm:prSet presAssocID="{CFFC745A-582B-4305-AFB6-C7730C8AA2CC}" presName="background" presStyleLbl="node0" presStyleIdx="3" presStyleCnt="4"/>
-      <dgm:spPr/>
-    </dgm:pt>
-    <dgm:pt modelId="{C8AF0AA2-E714-4CB1-A409-2A27219D89BF}" type="pres">
-      <dgm:prSet presAssocID="{CFFC745A-582B-4305-AFB6-C7730C8AA2CC}" presName="text" presStyleLbl="fgAcc0" presStyleIdx="3" presStyleCnt="4">
-        <dgm:presLayoutVars>
-          <dgm:chPref val="3"/>
-        </dgm:presLayoutVars>
-      </dgm:prSet>
-      <dgm:spPr/>
-    </dgm:pt>
-    <dgm:pt modelId="{2F22A7AE-00F5-4983-8818-B1D14472C994}" type="pres">
-      <dgm:prSet presAssocID="{CFFC745A-582B-4305-AFB6-C7730C8AA2CC}" presName="hierChild2" presStyleCnt="0"/>
-      <dgm:spPr/>
-    </dgm:pt>
-  </dgm:ptLst>
-  <dgm:cxnLst>
-    <dgm:cxn modelId="{66C80707-24F5-4682-9A8A-C5E58C7BB3D0}" type="presOf" srcId="{7D77D55D-8CCB-40C4-94CB-4B06CD8B8779}" destId="{1183B01D-027F-4222-9A5D-26614D621D81}" srcOrd="0" destOrd="0" presId="urn:microsoft.com/office/officeart/2005/8/layout/hierarchy1"/>
-    <dgm:cxn modelId="{A836B724-0D4D-49B8-8C7E-FE8E2C59804C}" srcId="{875220B3-5F43-41BF-82F0-F1D5090E78B1}" destId="{7D77D55D-8CCB-40C4-94CB-4B06CD8B8779}" srcOrd="0" destOrd="0" parTransId="{6A9C7EF0-5CCC-409B-8130-14FC63A16319}" sibTransId="{3EAD9D27-CDC1-4D2B-8EDB-51D7B39371E6}"/>
-    <dgm:cxn modelId="{BC06C170-83F3-4F9D-8D58-ADC0D316C39A}" type="presOf" srcId="{875220B3-5F43-41BF-82F0-F1D5090E78B1}" destId="{F85EEB6F-AAF0-4C94-BC92-C847D8A79108}" srcOrd="0" destOrd="0" presId="urn:microsoft.com/office/officeart/2005/8/layout/hierarchy1"/>
-    <dgm:cxn modelId="{DD169F84-35BC-47BE-A340-208AE56CF63E}" type="presOf" srcId="{C49388FA-8759-42AF-B435-0EC20E6DCE5A}" destId="{D12292E6-4F4E-4072-8A83-08E55313428E}" srcOrd="0" destOrd="0" presId="urn:microsoft.com/office/officeart/2005/8/layout/hierarchy1"/>
-    <dgm:cxn modelId="{176D2593-FB8E-482F-AA33-5DDF8D5040D9}" type="presOf" srcId="{9C35D664-F4ED-4924-B85E-A22D43967662}" destId="{EE8EEF36-F451-494C-9D0C-6D4B4B602222}" srcOrd="0" destOrd="0" presId="urn:microsoft.com/office/officeart/2005/8/layout/hierarchy1"/>
-    <dgm:cxn modelId="{183FDA93-1A29-47D6-AEC1-00CDFABC21C6}" srcId="{875220B3-5F43-41BF-82F0-F1D5090E78B1}" destId="{CFFC745A-582B-4305-AFB6-C7730C8AA2CC}" srcOrd="3" destOrd="0" parTransId="{B9E7BF58-A98B-4D6B-905C-CA13F8AC758B}" sibTransId="{2E6863E9-19BE-4B40-B701-A6159F4DE04E}"/>
-    <dgm:cxn modelId="{D983329C-95DE-48B7-A472-282C9EC5571D}" type="presOf" srcId="{CFFC745A-582B-4305-AFB6-C7730C8AA2CC}" destId="{C8AF0AA2-E714-4CB1-A409-2A27219D89BF}" srcOrd="0" destOrd="0" presId="urn:microsoft.com/office/officeart/2005/8/layout/hierarchy1"/>
-    <dgm:cxn modelId="{5D3769DF-636C-4089-9393-E8D3AFCE8089}" srcId="{875220B3-5F43-41BF-82F0-F1D5090E78B1}" destId="{C49388FA-8759-42AF-B435-0EC20E6DCE5A}" srcOrd="2" destOrd="0" parTransId="{A7FDF1A3-16E2-4E7B-8E33-66EC6AB64844}" sibTransId="{72F98EF2-B12B-4A57-A73C-7E6A778B34D1}"/>
-    <dgm:cxn modelId="{96D4C5E8-25DD-4F37-89A6-060DD8940082}" srcId="{875220B3-5F43-41BF-82F0-F1D5090E78B1}" destId="{9C35D664-F4ED-4924-B85E-A22D43967662}" srcOrd="1" destOrd="0" parTransId="{C36022C4-2A61-4049-9E7C-3331704CC85B}" sibTransId="{8166ABFB-FA54-4D42-B19D-457B349DE33D}"/>
-    <dgm:cxn modelId="{01649F12-1BD6-4C2C-89A4-CFE7E333F9CF}" type="presParOf" srcId="{F85EEB6F-AAF0-4C94-BC92-C847D8A79108}" destId="{1B7C8F59-19C7-4811-ACF5-94E83EF18D53}" srcOrd="0" destOrd="0" presId="urn:microsoft.com/office/officeart/2005/8/layout/hierarchy1"/>
-    <dgm:cxn modelId="{A314521F-BA19-4579-9A48-D2E934E1FF31}" type="presParOf" srcId="{1B7C8F59-19C7-4811-ACF5-94E83EF18D53}" destId="{8918ADED-6A57-4174-8DFD-B8853753C67B}" srcOrd="0" destOrd="0" presId="urn:microsoft.com/office/officeart/2005/8/layout/hierarchy1"/>
-    <dgm:cxn modelId="{6916FB5B-39B8-4EA3-83C9-0C86F5F7BE2F}" type="presParOf" srcId="{8918ADED-6A57-4174-8DFD-B8853753C67B}" destId="{98190555-19A4-4CFA-B5ED-89857792E0B9}" srcOrd="0" destOrd="0" presId="urn:microsoft.com/office/officeart/2005/8/layout/hierarchy1"/>
-    <dgm:cxn modelId="{8C08263C-C809-4394-83BF-74040C874CD4}" type="presParOf" srcId="{8918ADED-6A57-4174-8DFD-B8853753C67B}" destId="{1183B01D-027F-4222-9A5D-26614D621D81}" srcOrd="1" destOrd="0" presId="urn:microsoft.com/office/officeart/2005/8/layout/hierarchy1"/>
-    <dgm:cxn modelId="{E2F1B48C-A965-4AB5-B094-77A8B6CD6D51}" type="presParOf" srcId="{1B7C8F59-19C7-4811-ACF5-94E83EF18D53}" destId="{769B866C-995B-4621-BF4F-632E3E797DE6}" srcOrd="1" destOrd="0" presId="urn:microsoft.com/office/officeart/2005/8/layout/hierarchy1"/>
-    <dgm:cxn modelId="{A592AF79-D520-4991-85FC-DBB8DCFBC0A7}" type="presParOf" srcId="{F85EEB6F-AAF0-4C94-BC92-C847D8A79108}" destId="{7C0E07B7-20A4-4341-8762-1E58F807E8BA}" srcOrd="1" destOrd="0" presId="urn:microsoft.com/office/officeart/2005/8/layout/hierarchy1"/>
-    <dgm:cxn modelId="{56FA8E76-F67A-482A-B107-AA13883A5CBC}" type="presParOf" srcId="{7C0E07B7-20A4-4341-8762-1E58F807E8BA}" destId="{167A3E1F-AD74-4598-B50A-3C9D400D900E}" srcOrd="0" destOrd="0" presId="urn:microsoft.com/office/officeart/2005/8/layout/hierarchy1"/>
-    <dgm:cxn modelId="{14150A9E-7CC0-4811-957A-131E4B9B2627}" type="presParOf" srcId="{167A3E1F-AD74-4598-B50A-3C9D400D900E}" destId="{FE1BC2AB-A6F4-451D-B5E4-EBBE2F580413}" srcOrd="0" destOrd="0" presId="urn:microsoft.com/office/officeart/2005/8/layout/hierarchy1"/>
-    <dgm:cxn modelId="{99EDCC81-F193-4332-A323-8BCBECC681EA}" type="presParOf" srcId="{167A3E1F-AD74-4598-B50A-3C9D400D900E}" destId="{EE8EEF36-F451-494C-9D0C-6D4B4B602222}" srcOrd="1" destOrd="0" presId="urn:microsoft.com/office/officeart/2005/8/layout/hierarchy1"/>
-    <dgm:cxn modelId="{42BAF63D-4FB1-4BEC-8C69-B10C7C60B6D8}" type="presParOf" srcId="{7C0E07B7-20A4-4341-8762-1E58F807E8BA}" destId="{7BE69AD2-283F-47B6-B4ED-6AF7473EBC65}" srcOrd="1" destOrd="0" presId="urn:microsoft.com/office/officeart/2005/8/layout/hierarchy1"/>
-    <dgm:cxn modelId="{9E312B85-B3DA-43A3-9960-F6A171A99142}" type="presParOf" srcId="{F85EEB6F-AAF0-4C94-BC92-C847D8A79108}" destId="{8FCB07DD-8C86-4759-993A-97EAB36CF060}" srcOrd="2" destOrd="0" presId="urn:microsoft.com/office/officeart/2005/8/layout/hierarchy1"/>
-    <dgm:cxn modelId="{0D559596-C91C-4589-83F5-35F1216C2813}" type="presParOf" srcId="{8FCB07DD-8C86-4759-993A-97EAB36CF060}" destId="{E82A0866-4149-47CD-B7FE-725DE8D2F42E}" srcOrd="0" destOrd="0" presId="urn:microsoft.com/office/officeart/2005/8/layout/hierarchy1"/>
-    <dgm:cxn modelId="{425BA405-6B44-4056-B0AB-C714B302121B}" type="presParOf" srcId="{E82A0866-4149-47CD-B7FE-725DE8D2F42E}" destId="{D5A840D2-D89A-4DE4-9831-61DED3425ED9}" srcOrd="0" destOrd="0" presId="urn:microsoft.com/office/officeart/2005/8/layout/hierarchy1"/>
-    <dgm:cxn modelId="{DAC7D9F8-EEE6-4839-A7ED-D5CE080908F4}" type="presParOf" srcId="{E82A0866-4149-47CD-B7FE-725DE8D2F42E}" destId="{D12292E6-4F4E-4072-8A83-08E55313428E}" srcOrd="1" destOrd="0" presId="urn:microsoft.com/office/officeart/2005/8/layout/hierarchy1"/>
-    <dgm:cxn modelId="{67554DFF-CD30-4AD1-B9CF-7016847BE9E4}" type="presParOf" srcId="{8FCB07DD-8C86-4759-993A-97EAB36CF060}" destId="{4846E4EF-BE4F-4C74-9B33-E579B1E66ED7}" srcOrd="1" destOrd="0" presId="urn:microsoft.com/office/officeart/2005/8/layout/hierarchy1"/>
-    <dgm:cxn modelId="{CE007A34-B5C2-4838-9DFC-DD9B8270EFF8}" type="presParOf" srcId="{F85EEB6F-AAF0-4C94-BC92-C847D8A79108}" destId="{EBA713AF-B350-4D3E-A9E7-FD3AFE718B21}" srcOrd="3" destOrd="0" presId="urn:microsoft.com/office/officeart/2005/8/layout/hierarchy1"/>
-    <dgm:cxn modelId="{D7BA36EF-EF1D-43D2-B7B9-1AB9C37608D9}" type="presParOf" srcId="{EBA713AF-B350-4D3E-A9E7-FD3AFE718B21}" destId="{465E7B60-C054-45A0-BC18-BEE959253085}" srcOrd="0" destOrd="0" presId="urn:microsoft.com/office/officeart/2005/8/layout/hierarchy1"/>
-    <dgm:cxn modelId="{40A4C08E-B6DA-4998-9B7C-596A8EF1B3AA}" type="presParOf" srcId="{465E7B60-C054-45A0-BC18-BEE959253085}" destId="{46DC7518-C20F-4A8F-980E-6F93A13BFE65}" srcOrd="0" destOrd="0" presId="urn:microsoft.com/office/officeart/2005/8/layout/hierarchy1"/>
-    <dgm:cxn modelId="{FD20B367-E8C6-4038-AF22-F365CFCE4C66}" type="presParOf" srcId="{465E7B60-C054-45A0-BC18-BEE959253085}" destId="{C8AF0AA2-E714-4CB1-A409-2A27219D89BF}" srcOrd="1" destOrd="0" presId="urn:microsoft.com/office/officeart/2005/8/layout/hierarchy1"/>
-    <dgm:cxn modelId="{4D2D0A47-2210-4D3E-921A-CA67AA49BCA2}" type="presParOf" srcId="{EBA713AF-B350-4D3E-A9E7-FD3AFE718B21}" destId="{2F22A7AE-00F5-4983-8818-B1D14472C994}" srcOrd="1" destOrd="0" presId="urn:microsoft.com/office/officeart/2005/8/layout/hierarchy1"/>
-  </dgm:cxnLst>
-  <dgm:bg/>
-  <dgm:whole/>
-  <dgm:extLst>
-    <a:ext uri="http://schemas.microsoft.com/office/drawing/2008/diagram">
-      <dsp:dataModelExt xmlns:dsp="http://schemas.microsoft.com/office/drawing/2008/diagram" relId="rId6" minVer="http://schemas.openxmlformats.org/drawingml/2006/diagram"/>
-    </a:ext>
-  </dgm:extLst>
-</dgm:dataModel>
-</file>
-
 <file path=ppt/diagrams/drawing1.xml><?xml version="1.0" encoding="utf-8"?>
 <dsp:drawing xmlns:dgm="http://schemas.openxmlformats.org/drawingml/2006/diagram" xmlns:dsp="http://schemas.microsoft.com/office/drawing/2008/diagram" xmlns:a="http://schemas.openxmlformats.org/drawingml/2006/main">
   <dsp:spTree>
@@ -2791,542 +1646,6 @@
       <dsp:txXfrm>
         <a:off x="5893475" y="2963569"/>
         <a:ext cx="3600000" cy="720000"/>
-      </dsp:txXfrm>
-    </dsp:sp>
-  </dsp:spTree>
-</dsp:drawing>
-</file>
-
-<file path=ppt/diagrams/drawing2.xml><?xml version="1.0" encoding="utf-8"?>
-<dsp:drawing xmlns:dgm="http://schemas.openxmlformats.org/drawingml/2006/diagram" xmlns:dsp="http://schemas.microsoft.com/office/drawing/2008/diagram" xmlns:a="http://schemas.openxmlformats.org/drawingml/2006/main">
-  <dsp:spTree>
-    <dsp:nvGrpSpPr>
-      <dsp:cNvPr id="0" name=""/>
-      <dsp:cNvGrpSpPr/>
-    </dsp:nvGrpSpPr>
-    <dsp:grpSpPr/>
-    <dsp:sp modelId="{98190555-19A4-4CFA-B5ED-89857792E0B9}">
-      <dsp:nvSpPr>
-        <dsp:cNvPr id="0" name=""/>
-        <dsp:cNvSpPr/>
-      </dsp:nvSpPr>
-      <dsp:spPr>
-        <a:xfrm>
-          <a:off x="3080" y="711013"/>
-          <a:ext cx="2199649" cy="1396777"/>
-        </a:xfrm>
-        <a:prstGeom prst="roundRect">
-          <a:avLst>
-            <a:gd name="adj" fmla="val 10000"/>
-          </a:avLst>
-        </a:prstGeom>
-        <a:solidFill>
-          <a:schemeClr val="accent2">
-            <a:hueOff val="0"/>
-            <a:satOff val="0"/>
-            <a:lumOff val="0"/>
-            <a:alphaOff val="0"/>
-          </a:schemeClr>
-        </a:solidFill>
-        <a:ln w="19050" cap="flat" cmpd="sng" algn="ctr">
-          <a:solidFill>
-            <a:schemeClr val="lt1">
-              <a:hueOff val="0"/>
-              <a:satOff val="0"/>
-              <a:lumOff val="0"/>
-              <a:alphaOff val="0"/>
-            </a:schemeClr>
-          </a:solidFill>
-          <a:prstDash val="solid"/>
-          <a:miter lim="800000"/>
-        </a:ln>
-        <a:effectLst/>
-      </dsp:spPr>
-      <dsp:style>
-        <a:lnRef idx="2">
-          <a:scrgbClr r="0" g="0" b="0"/>
-        </a:lnRef>
-        <a:fillRef idx="1">
-          <a:scrgbClr r="0" g="0" b="0"/>
-        </a:fillRef>
-        <a:effectRef idx="0">
-          <a:scrgbClr r="0" g="0" b="0"/>
-        </a:effectRef>
-        <a:fontRef idx="minor">
-          <a:schemeClr val="lt1"/>
-        </a:fontRef>
-      </dsp:style>
-    </dsp:sp>
-    <dsp:sp modelId="{1183B01D-027F-4222-9A5D-26614D621D81}">
-      <dsp:nvSpPr>
-        <dsp:cNvPr id="0" name=""/>
-        <dsp:cNvSpPr/>
-      </dsp:nvSpPr>
-      <dsp:spPr>
-        <a:xfrm>
-          <a:off x="247486" y="943198"/>
-          <a:ext cx="2199649" cy="1396777"/>
-        </a:xfrm>
-        <a:prstGeom prst="roundRect">
-          <a:avLst>
-            <a:gd name="adj" fmla="val 10000"/>
-          </a:avLst>
-        </a:prstGeom>
-        <a:solidFill>
-          <a:schemeClr val="lt1">
-            <a:alpha val="90000"/>
-            <a:hueOff val="0"/>
-            <a:satOff val="0"/>
-            <a:lumOff val="0"/>
-            <a:alphaOff val="0"/>
-          </a:schemeClr>
-        </a:solidFill>
-        <a:ln w="19050" cap="flat" cmpd="sng" algn="ctr">
-          <a:solidFill>
-            <a:schemeClr val="accent2">
-              <a:hueOff val="0"/>
-              <a:satOff val="0"/>
-              <a:lumOff val="0"/>
-              <a:alphaOff val="0"/>
-            </a:schemeClr>
-          </a:solidFill>
-          <a:prstDash val="solid"/>
-          <a:miter lim="800000"/>
-        </a:ln>
-        <a:effectLst/>
-      </dsp:spPr>
-      <dsp:style>
-        <a:lnRef idx="2">
-          <a:scrgbClr r="0" g="0" b="0"/>
-        </a:lnRef>
-        <a:fillRef idx="1">
-          <a:scrgbClr r="0" g="0" b="0"/>
-        </a:fillRef>
-        <a:effectRef idx="0">
-          <a:scrgbClr r="0" g="0" b="0"/>
-        </a:effectRef>
-        <a:fontRef idx="minor"/>
-      </dsp:style>
-      <dsp:txBody>
-        <a:bodyPr spcFirstLastPara="0" vert="horz" wrap="square" lIns="72390" tIns="72390" rIns="72390" bIns="72390" numCol="1" spcCol="1270" anchor="ctr" anchorCtr="0">
-          <a:noAutofit/>
-        </a:bodyPr>
-        <a:lstStyle/>
-        <a:p>
-          <a:pPr marL="0" lvl="0" indent="0" algn="ctr" defTabSz="844550">
-            <a:lnSpc>
-              <a:spcPct val="90000"/>
-            </a:lnSpc>
-            <a:spcBef>
-              <a:spcPct val="0"/>
-            </a:spcBef>
-            <a:spcAft>
-              <a:spcPct val="35000"/>
-            </a:spcAft>
-            <a:buNone/>
-          </a:pPr>
-          <a:r>
-            <a:rPr lang="en-US" sz="1900" kern="1200" dirty="0"/>
-            <a:t>Make a Hard Copy of User Manual</a:t>
-          </a:r>
-        </a:p>
-      </dsp:txBody>
-      <dsp:txXfrm>
-        <a:off x="288396" y="984108"/>
-        <a:ext cx="2117829" cy="1314957"/>
-      </dsp:txXfrm>
-    </dsp:sp>
-    <dsp:sp modelId="{FE1BC2AB-A6F4-451D-B5E4-EBBE2F580413}">
-      <dsp:nvSpPr>
-        <dsp:cNvPr id="0" name=""/>
-        <dsp:cNvSpPr/>
-      </dsp:nvSpPr>
-      <dsp:spPr>
-        <a:xfrm>
-          <a:off x="2691541" y="711013"/>
-          <a:ext cx="2199649" cy="1396777"/>
-        </a:xfrm>
-        <a:prstGeom prst="roundRect">
-          <a:avLst>
-            <a:gd name="adj" fmla="val 10000"/>
-          </a:avLst>
-        </a:prstGeom>
-        <a:solidFill>
-          <a:schemeClr val="accent2">
-            <a:hueOff val="0"/>
-            <a:satOff val="0"/>
-            <a:lumOff val="0"/>
-            <a:alphaOff val="0"/>
-          </a:schemeClr>
-        </a:solidFill>
-        <a:ln w="19050" cap="flat" cmpd="sng" algn="ctr">
-          <a:solidFill>
-            <a:schemeClr val="lt1">
-              <a:hueOff val="0"/>
-              <a:satOff val="0"/>
-              <a:lumOff val="0"/>
-              <a:alphaOff val="0"/>
-            </a:schemeClr>
-          </a:solidFill>
-          <a:prstDash val="solid"/>
-          <a:miter lim="800000"/>
-        </a:ln>
-        <a:effectLst/>
-      </dsp:spPr>
-      <dsp:style>
-        <a:lnRef idx="2">
-          <a:scrgbClr r="0" g="0" b="0"/>
-        </a:lnRef>
-        <a:fillRef idx="1">
-          <a:scrgbClr r="0" g="0" b="0"/>
-        </a:fillRef>
-        <a:effectRef idx="0">
-          <a:scrgbClr r="0" g="0" b="0"/>
-        </a:effectRef>
-        <a:fontRef idx="minor">
-          <a:schemeClr val="lt1"/>
-        </a:fontRef>
-      </dsp:style>
-    </dsp:sp>
-    <dsp:sp modelId="{EE8EEF36-F451-494C-9D0C-6D4B4B602222}">
-      <dsp:nvSpPr>
-        <dsp:cNvPr id="0" name=""/>
-        <dsp:cNvSpPr/>
-      </dsp:nvSpPr>
-      <dsp:spPr>
-        <a:xfrm>
-          <a:off x="2935947" y="943198"/>
-          <a:ext cx="2199649" cy="1396777"/>
-        </a:xfrm>
-        <a:prstGeom prst="roundRect">
-          <a:avLst>
-            <a:gd name="adj" fmla="val 10000"/>
-          </a:avLst>
-        </a:prstGeom>
-        <a:solidFill>
-          <a:schemeClr val="lt1">
-            <a:alpha val="90000"/>
-            <a:hueOff val="0"/>
-            <a:satOff val="0"/>
-            <a:lumOff val="0"/>
-            <a:alphaOff val="0"/>
-          </a:schemeClr>
-        </a:solidFill>
-        <a:ln w="19050" cap="flat" cmpd="sng" algn="ctr">
-          <a:solidFill>
-            <a:schemeClr val="accent2">
-              <a:hueOff val="0"/>
-              <a:satOff val="0"/>
-              <a:lumOff val="0"/>
-              <a:alphaOff val="0"/>
-            </a:schemeClr>
-          </a:solidFill>
-          <a:prstDash val="solid"/>
-          <a:miter lim="800000"/>
-        </a:ln>
-        <a:effectLst/>
-      </dsp:spPr>
-      <dsp:style>
-        <a:lnRef idx="2">
-          <a:scrgbClr r="0" g="0" b="0"/>
-        </a:lnRef>
-        <a:fillRef idx="1">
-          <a:scrgbClr r="0" g="0" b="0"/>
-        </a:fillRef>
-        <a:effectRef idx="0">
-          <a:scrgbClr r="0" g="0" b="0"/>
-        </a:effectRef>
-        <a:fontRef idx="minor"/>
-      </dsp:style>
-      <dsp:txBody>
-        <a:bodyPr spcFirstLastPara="0" vert="horz" wrap="square" lIns="72390" tIns="72390" rIns="72390" bIns="72390" numCol="1" spcCol="1270" anchor="ctr" anchorCtr="0">
-          <a:noAutofit/>
-        </a:bodyPr>
-        <a:lstStyle/>
-        <a:p>
-          <a:pPr marL="0" lvl="0" indent="0" algn="ctr" defTabSz="844550">
-            <a:lnSpc>
-              <a:spcPct val="90000"/>
-            </a:lnSpc>
-            <a:spcBef>
-              <a:spcPct val="0"/>
-            </a:spcBef>
-            <a:spcAft>
-              <a:spcPct val="35000"/>
-            </a:spcAft>
-            <a:buNone/>
-          </a:pPr>
-          <a:r>
-            <a:rPr lang="en-US" sz="1900" kern="1200" dirty="0"/>
-            <a:t>Practice Final Presentation</a:t>
-          </a:r>
-        </a:p>
-      </dsp:txBody>
-      <dsp:txXfrm>
-        <a:off x="2976857" y="984108"/>
-        <a:ext cx="2117829" cy="1314957"/>
-      </dsp:txXfrm>
-    </dsp:sp>
-    <dsp:sp modelId="{D5A840D2-D89A-4DE4-9831-61DED3425ED9}">
-      <dsp:nvSpPr>
-        <dsp:cNvPr id="0" name=""/>
-        <dsp:cNvSpPr/>
-      </dsp:nvSpPr>
-      <dsp:spPr>
-        <a:xfrm>
-          <a:off x="5380002" y="711013"/>
-          <a:ext cx="2199649" cy="1396777"/>
-        </a:xfrm>
-        <a:prstGeom prst="roundRect">
-          <a:avLst>
-            <a:gd name="adj" fmla="val 10000"/>
-          </a:avLst>
-        </a:prstGeom>
-        <a:solidFill>
-          <a:schemeClr val="accent2">
-            <a:hueOff val="0"/>
-            <a:satOff val="0"/>
-            <a:lumOff val="0"/>
-            <a:alphaOff val="0"/>
-          </a:schemeClr>
-        </a:solidFill>
-        <a:ln w="19050" cap="flat" cmpd="sng" algn="ctr">
-          <a:solidFill>
-            <a:schemeClr val="lt1">
-              <a:hueOff val="0"/>
-              <a:satOff val="0"/>
-              <a:lumOff val="0"/>
-              <a:alphaOff val="0"/>
-            </a:schemeClr>
-          </a:solidFill>
-          <a:prstDash val="solid"/>
-          <a:miter lim="800000"/>
-        </a:ln>
-        <a:effectLst/>
-      </dsp:spPr>
-      <dsp:style>
-        <a:lnRef idx="2">
-          <a:scrgbClr r="0" g="0" b="0"/>
-        </a:lnRef>
-        <a:fillRef idx="1">
-          <a:scrgbClr r="0" g="0" b="0"/>
-        </a:fillRef>
-        <a:effectRef idx="0">
-          <a:scrgbClr r="0" g="0" b="0"/>
-        </a:effectRef>
-        <a:fontRef idx="minor">
-          <a:schemeClr val="lt1"/>
-        </a:fontRef>
-      </dsp:style>
-    </dsp:sp>
-    <dsp:sp modelId="{D12292E6-4F4E-4072-8A83-08E55313428E}">
-      <dsp:nvSpPr>
-        <dsp:cNvPr id="0" name=""/>
-        <dsp:cNvSpPr/>
-      </dsp:nvSpPr>
-      <dsp:spPr>
-        <a:xfrm>
-          <a:off x="5624408" y="943198"/>
-          <a:ext cx="2199649" cy="1396777"/>
-        </a:xfrm>
-        <a:prstGeom prst="roundRect">
-          <a:avLst>
-            <a:gd name="adj" fmla="val 10000"/>
-          </a:avLst>
-        </a:prstGeom>
-        <a:solidFill>
-          <a:schemeClr val="lt1">
-            <a:alpha val="90000"/>
-            <a:hueOff val="0"/>
-            <a:satOff val="0"/>
-            <a:lumOff val="0"/>
-            <a:alphaOff val="0"/>
-          </a:schemeClr>
-        </a:solidFill>
-        <a:ln w="19050" cap="flat" cmpd="sng" algn="ctr">
-          <a:solidFill>
-            <a:schemeClr val="accent2">
-              <a:hueOff val="0"/>
-              <a:satOff val="0"/>
-              <a:lumOff val="0"/>
-              <a:alphaOff val="0"/>
-            </a:schemeClr>
-          </a:solidFill>
-          <a:prstDash val="solid"/>
-          <a:miter lim="800000"/>
-        </a:ln>
-        <a:effectLst/>
-      </dsp:spPr>
-      <dsp:style>
-        <a:lnRef idx="2">
-          <a:scrgbClr r="0" g="0" b="0"/>
-        </a:lnRef>
-        <a:fillRef idx="1">
-          <a:scrgbClr r="0" g="0" b="0"/>
-        </a:fillRef>
-        <a:effectRef idx="0">
-          <a:scrgbClr r="0" g="0" b="0"/>
-        </a:effectRef>
-        <a:fontRef idx="minor"/>
-      </dsp:style>
-      <dsp:txBody>
-        <a:bodyPr spcFirstLastPara="0" vert="horz" wrap="square" lIns="72390" tIns="72390" rIns="72390" bIns="72390" numCol="1" spcCol="1270" anchor="ctr" anchorCtr="0">
-          <a:noAutofit/>
-        </a:bodyPr>
-        <a:lstStyle/>
-        <a:p>
-          <a:pPr marL="0" lvl="0" indent="0" algn="ctr" defTabSz="844550">
-            <a:lnSpc>
-              <a:spcPct val="90000"/>
-            </a:lnSpc>
-            <a:spcBef>
-              <a:spcPct val="0"/>
-            </a:spcBef>
-            <a:spcAft>
-              <a:spcPct val="35000"/>
-            </a:spcAft>
-            <a:buNone/>
-          </a:pPr>
-          <a:r>
-            <a:rPr lang="en-US" sz="1900" kern="1200" dirty="0"/>
-            <a:t>Continue Work on the Final Presentation Slides</a:t>
-          </a:r>
-        </a:p>
-      </dsp:txBody>
-      <dsp:txXfrm>
-        <a:off x="5665318" y="984108"/>
-        <a:ext cx="2117829" cy="1314957"/>
-      </dsp:txXfrm>
-    </dsp:sp>
-    <dsp:sp modelId="{46DC7518-C20F-4A8F-980E-6F93A13BFE65}">
-      <dsp:nvSpPr>
-        <dsp:cNvPr id="0" name=""/>
-        <dsp:cNvSpPr/>
-      </dsp:nvSpPr>
-      <dsp:spPr>
-        <a:xfrm>
-          <a:off x="8068463" y="711013"/>
-          <a:ext cx="2199649" cy="1396777"/>
-        </a:xfrm>
-        <a:prstGeom prst="roundRect">
-          <a:avLst>
-            <a:gd name="adj" fmla="val 10000"/>
-          </a:avLst>
-        </a:prstGeom>
-        <a:solidFill>
-          <a:schemeClr val="accent2">
-            <a:hueOff val="0"/>
-            <a:satOff val="0"/>
-            <a:lumOff val="0"/>
-            <a:alphaOff val="0"/>
-          </a:schemeClr>
-        </a:solidFill>
-        <a:ln w="19050" cap="flat" cmpd="sng" algn="ctr">
-          <a:solidFill>
-            <a:schemeClr val="lt1">
-              <a:hueOff val="0"/>
-              <a:satOff val="0"/>
-              <a:lumOff val="0"/>
-              <a:alphaOff val="0"/>
-            </a:schemeClr>
-          </a:solidFill>
-          <a:prstDash val="solid"/>
-          <a:miter lim="800000"/>
-        </a:ln>
-        <a:effectLst/>
-      </dsp:spPr>
-      <dsp:style>
-        <a:lnRef idx="2">
-          <a:scrgbClr r="0" g="0" b="0"/>
-        </a:lnRef>
-        <a:fillRef idx="1">
-          <a:scrgbClr r="0" g="0" b="0"/>
-        </a:fillRef>
-        <a:effectRef idx="0">
-          <a:scrgbClr r="0" g="0" b="0"/>
-        </a:effectRef>
-        <a:fontRef idx="minor">
-          <a:schemeClr val="lt1"/>
-        </a:fontRef>
-      </dsp:style>
-    </dsp:sp>
-    <dsp:sp modelId="{C8AF0AA2-E714-4CB1-A409-2A27219D89BF}">
-      <dsp:nvSpPr>
-        <dsp:cNvPr id="0" name=""/>
-        <dsp:cNvSpPr/>
-      </dsp:nvSpPr>
-      <dsp:spPr>
-        <a:xfrm>
-          <a:off x="8312869" y="943198"/>
-          <a:ext cx="2199649" cy="1396777"/>
-        </a:xfrm>
-        <a:prstGeom prst="roundRect">
-          <a:avLst>
-            <a:gd name="adj" fmla="val 10000"/>
-          </a:avLst>
-        </a:prstGeom>
-        <a:solidFill>
-          <a:schemeClr val="lt1">
-            <a:alpha val="90000"/>
-            <a:hueOff val="0"/>
-            <a:satOff val="0"/>
-            <a:lumOff val="0"/>
-            <a:alphaOff val="0"/>
-          </a:schemeClr>
-        </a:solidFill>
-        <a:ln w="19050" cap="flat" cmpd="sng" algn="ctr">
-          <a:solidFill>
-            <a:schemeClr val="accent2">
-              <a:hueOff val="0"/>
-              <a:satOff val="0"/>
-              <a:lumOff val="0"/>
-              <a:alphaOff val="0"/>
-            </a:schemeClr>
-          </a:solidFill>
-          <a:prstDash val="solid"/>
-          <a:miter lim="800000"/>
-        </a:ln>
-        <a:effectLst/>
-      </dsp:spPr>
-      <dsp:style>
-        <a:lnRef idx="2">
-          <a:scrgbClr r="0" g="0" b="0"/>
-        </a:lnRef>
-        <a:fillRef idx="1">
-          <a:scrgbClr r="0" g="0" b="0"/>
-        </a:fillRef>
-        <a:effectRef idx="0">
-          <a:scrgbClr r="0" g="0" b="0"/>
-        </a:effectRef>
-        <a:fontRef idx="minor"/>
-      </dsp:style>
-      <dsp:txBody>
-        <a:bodyPr spcFirstLastPara="0" vert="horz" wrap="square" lIns="72390" tIns="72390" rIns="72390" bIns="72390" numCol="1" spcCol="1270" anchor="ctr" anchorCtr="0">
-          <a:noAutofit/>
-        </a:bodyPr>
-        <a:lstStyle/>
-        <a:p>
-          <a:pPr marL="0" lvl="0" indent="0" algn="ctr" defTabSz="844550">
-            <a:lnSpc>
-              <a:spcPct val="90000"/>
-            </a:lnSpc>
-            <a:spcBef>
-              <a:spcPct val="0"/>
-            </a:spcBef>
-            <a:spcAft>
-              <a:spcPct val="35000"/>
-            </a:spcAft>
-            <a:buNone/>
-          </a:pPr>
-          <a:r>
-            <a:rPr lang="en-US" sz="1900" kern="1200" dirty="0"/>
-            <a:t>Continue Testing/Debugging Project</a:t>
-          </a:r>
-        </a:p>
-      </dsp:txBody>
-      <dsp:txXfrm>
-        <a:off x="8353779" y="984108"/>
-        <a:ext cx="2117829" cy="1314957"/>
       </dsp:txXfrm>
     </dsp:sp>
   </dsp:spTree>
@@ -3548,569 +1867,6 @@
 </dgm:layoutDef>
 </file>
 
-<file path=ppt/diagrams/layout2.xml><?xml version="1.0" encoding="utf-8"?>
-<dgm:layoutDef xmlns:dgm="http://schemas.openxmlformats.org/drawingml/2006/diagram" xmlns:a="http://schemas.openxmlformats.org/drawingml/2006/main" uniqueId="urn:microsoft.com/office/officeart/2005/8/layout/hierarchy1">
-  <dgm:title val=""/>
-  <dgm:desc val=""/>
-  <dgm:catLst>
-    <dgm:cat type="hierarchy" pri="2000"/>
-  </dgm:catLst>
-  <dgm:sampData>
-    <dgm:dataModel>
-      <dgm:ptLst>
-        <dgm:pt modelId="0" type="doc"/>
-        <dgm:pt modelId="1">
-          <dgm:prSet phldr="1"/>
-        </dgm:pt>
-        <dgm:pt modelId="2">
-          <dgm:prSet phldr="1"/>
-        </dgm:pt>
-        <dgm:pt modelId="21">
-          <dgm:prSet phldr="1"/>
-        </dgm:pt>
-        <dgm:pt modelId="22">
-          <dgm:prSet phldr="1"/>
-        </dgm:pt>
-        <dgm:pt modelId="3">
-          <dgm:prSet phldr="1"/>
-        </dgm:pt>
-        <dgm:pt modelId="31">
-          <dgm:prSet phldr="1"/>
-        </dgm:pt>
-      </dgm:ptLst>
-      <dgm:cxnLst>
-        <dgm:cxn modelId="4" srcId="0" destId="1" srcOrd="0" destOrd="0"/>
-        <dgm:cxn modelId="5" srcId="1" destId="2" srcOrd="0" destOrd="0"/>
-        <dgm:cxn modelId="6" srcId="1" destId="3" srcOrd="1" destOrd="0"/>
-        <dgm:cxn modelId="23" srcId="2" destId="21" srcOrd="0" destOrd="0"/>
-        <dgm:cxn modelId="24" srcId="2" destId="22" srcOrd="1" destOrd="0"/>
-        <dgm:cxn modelId="33" srcId="3" destId="31" srcOrd="0" destOrd="0"/>
-      </dgm:cxnLst>
-      <dgm:bg/>
-      <dgm:whole/>
-    </dgm:dataModel>
-  </dgm:sampData>
-  <dgm:styleData>
-    <dgm:dataModel>
-      <dgm:ptLst>
-        <dgm:pt modelId="0" type="doc"/>
-        <dgm:pt modelId="1"/>
-        <dgm:pt modelId="11"/>
-        <dgm:pt modelId="12"/>
-      </dgm:ptLst>
-      <dgm:cxnLst>
-        <dgm:cxn modelId="2" srcId="0" destId="1" srcOrd="0" destOrd="0"/>
-        <dgm:cxn modelId="13" srcId="1" destId="11" srcOrd="0" destOrd="0"/>
-        <dgm:cxn modelId="14" srcId="1" destId="12" srcOrd="1" destOrd="0"/>
-      </dgm:cxnLst>
-      <dgm:bg/>
-      <dgm:whole/>
-    </dgm:dataModel>
-  </dgm:styleData>
-  <dgm:clrData>
-    <dgm:dataModel>
-      <dgm:ptLst>
-        <dgm:pt modelId="0" type="doc"/>
-        <dgm:pt modelId="1"/>
-        <dgm:pt modelId="2"/>
-        <dgm:pt modelId="21"/>
-        <dgm:pt modelId="211"/>
-        <dgm:pt modelId="3"/>
-        <dgm:pt modelId="31"/>
-        <dgm:pt modelId="311"/>
-      </dgm:ptLst>
-      <dgm:cxnLst>
-        <dgm:cxn modelId="4" srcId="0" destId="1" srcOrd="0" destOrd="0"/>
-        <dgm:cxn modelId="5" srcId="1" destId="2" srcOrd="0" destOrd="0"/>
-        <dgm:cxn modelId="6" srcId="1" destId="3" srcOrd="1" destOrd="0"/>
-        <dgm:cxn modelId="23" srcId="2" destId="21" srcOrd="0" destOrd="0"/>
-        <dgm:cxn modelId="24" srcId="21" destId="211" srcOrd="0" destOrd="0"/>
-        <dgm:cxn modelId="33" srcId="3" destId="31" srcOrd="0" destOrd="0"/>
-        <dgm:cxn modelId="34" srcId="31" destId="311" srcOrd="0" destOrd="0"/>
-      </dgm:cxnLst>
-      <dgm:bg/>
-      <dgm:whole/>
-    </dgm:dataModel>
-  </dgm:clrData>
-  <dgm:layoutNode name="hierChild1">
-    <dgm:varLst>
-      <dgm:chPref val="1"/>
-      <dgm:dir/>
-      <dgm:animOne val="branch"/>
-      <dgm:animLvl val="lvl"/>
-      <dgm:resizeHandles/>
-    </dgm:varLst>
-    <dgm:choose name="Name0">
-      <dgm:if name="Name1" func="var" arg="dir" op="equ" val="norm">
-        <dgm:alg type="hierChild">
-          <dgm:param type="linDir" val="fromL"/>
-        </dgm:alg>
-      </dgm:if>
-      <dgm:else name="Name2">
-        <dgm:alg type="hierChild">
-          <dgm:param type="linDir" val="fromR"/>
-        </dgm:alg>
-      </dgm:else>
-    </dgm:choose>
-    <dgm:shape xmlns:r="http://schemas.openxmlformats.org/officeDocument/2006/relationships" r:blip="">
-      <dgm:adjLst/>
-    </dgm:shape>
-    <dgm:presOf/>
-    <dgm:constrLst>
-      <dgm:constr type="primFontSz" for="des" ptType="node" op="equ" val="65"/>
-      <dgm:constr type="w" for="des" forName="composite" refType="w"/>
-      <dgm:constr type="h" for="des" forName="composite" refType="w" refFor="des" refForName="composite" fact="0.667"/>
-      <dgm:constr type="w" for="des" forName="composite2" refType="w" refFor="des" refForName="composite"/>
-      <dgm:constr type="h" for="des" forName="composite2" refType="h" refFor="des" refForName="composite"/>
-      <dgm:constr type="w" for="des" forName="composite3" refType="w" refFor="des" refForName="composite"/>
-      <dgm:constr type="h" for="des" forName="composite3" refType="h" refFor="des" refForName="composite"/>
-      <dgm:constr type="w" for="des" forName="composite4" refType="w" refFor="des" refForName="composite"/>
-      <dgm:constr type="h" for="des" forName="composite4" refType="h" refFor="des" refForName="composite"/>
-      <dgm:constr type="w" for="des" forName="composite5" refType="w" refFor="des" refForName="composite"/>
-      <dgm:constr type="h" for="des" forName="composite5" refType="h" refFor="des" refForName="composite"/>
-      <dgm:constr type="sibSp" refType="w" refFor="des" refForName="composite" fact="0.1"/>
-      <dgm:constr type="sibSp" for="des" forName="hierChild2" refType="sibSp"/>
-      <dgm:constr type="sibSp" for="des" forName="hierChild3" refType="sibSp"/>
-      <dgm:constr type="sibSp" for="des" forName="hierChild4" refType="sibSp"/>
-      <dgm:constr type="sibSp" for="des" forName="hierChild5" refType="sibSp"/>
-      <dgm:constr type="sibSp" for="des" forName="hierChild6" refType="sibSp"/>
-      <dgm:constr type="sp" for="des" forName="hierRoot1" refType="h" refFor="des" refForName="composite" fact="0.25"/>
-      <dgm:constr type="sp" for="des" forName="hierRoot2" refType="sp" refFor="des" refForName="hierRoot1"/>
-      <dgm:constr type="sp" for="des" forName="hierRoot3" refType="sp" refFor="des" refForName="hierRoot1"/>
-      <dgm:constr type="sp" for="des" forName="hierRoot4" refType="sp" refFor="des" refForName="hierRoot1"/>
-      <dgm:constr type="sp" for="des" forName="hierRoot5" refType="sp" refFor="des" refForName="hierRoot1"/>
-    </dgm:constrLst>
-    <dgm:ruleLst/>
-    <dgm:forEach name="Name3" axis="ch">
-      <dgm:forEach name="Name4" axis="self" ptType="node">
-        <dgm:layoutNode name="hierRoot1">
-          <dgm:alg type="hierRoot"/>
-          <dgm:shape xmlns:r="http://schemas.openxmlformats.org/officeDocument/2006/relationships" r:blip="">
-            <dgm:adjLst/>
-          </dgm:shape>
-          <dgm:presOf/>
-          <dgm:constrLst>
-            <dgm:constr type="bendDist" for="des" ptType="parTrans" refType="sp" fact="0.5"/>
-          </dgm:constrLst>
-          <dgm:ruleLst/>
-          <dgm:layoutNode name="composite">
-            <dgm:alg type="composite"/>
-            <dgm:shape xmlns:r="http://schemas.openxmlformats.org/officeDocument/2006/relationships" r:blip="">
-              <dgm:adjLst/>
-            </dgm:shape>
-            <dgm:presOf/>
-            <dgm:constrLst>
-              <dgm:constr type="w" for="ch" forName="background" refType="w" fact="0.9"/>
-              <dgm:constr type="h" for="ch" forName="background" refType="w" refFor="ch" refForName="background" fact="0.635"/>
-              <dgm:constr type="t" for="ch" forName="background"/>
-              <dgm:constr type="l" for="ch" forName="background"/>
-              <dgm:constr type="w" for="ch" forName="text" refType="w" fact="0.9"/>
-              <dgm:constr type="h" for="ch" forName="text" refType="w" refFor="ch" refForName="text" fact="0.635"/>
-              <dgm:constr type="t" for="ch" forName="text" refType="w" fact="0.095"/>
-              <dgm:constr type="l" for="ch" forName="text" refType="w" fact="0.1"/>
-            </dgm:constrLst>
-            <dgm:ruleLst/>
-            <dgm:layoutNode name="background" styleLbl="node0" moveWith="text">
-              <dgm:alg type="sp"/>
-              <dgm:shape xmlns:r="http://schemas.openxmlformats.org/officeDocument/2006/relationships" type="roundRect" r:blip="">
-                <dgm:adjLst>
-                  <dgm:adj idx="1" val="0.1"/>
-                </dgm:adjLst>
-              </dgm:shape>
-              <dgm:presOf/>
-              <dgm:constrLst/>
-              <dgm:ruleLst/>
-            </dgm:layoutNode>
-            <dgm:layoutNode name="text" styleLbl="fgAcc0">
-              <dgm:varLst>
-                <dgm:chPref val="3"/>
-              </dgm:varLst>
-              <dgm:alg type="tx"/>
-              <dgm:shape xmlns:r="http://schemas.openxmlformats.org/officeDocument/2006/relationships" type="roundRect" r:blip="">
-                <dgm:adjLst>
-                  <dgm:adj idx="1" val="0.1"/>
-                </dgm:adjLst>
-              </dgm:shape>
-              <dgm:presOf axis="self"/>
-              <dgm:constrLst>
-                <dgm:constr type="tMarg" refType="primFontSz" fact="0.3"/>
-                <dgm:constr type="bMarg" refType="primFontSz" fact="0.3"/>
-                <dgm:constr type="lMarg" refType="primFontSz" fact="0.3"/>
-                <dgm:constr type="rMarg" refType="primFontSz" fact="0.3"/>
-              </dgm:constrLst>
-              <dgm:ruleLst>
-                <dgm:rule type="primFontSz" val="5" fact="NaN" max="NaN"/>
-              </dgm:ruleLst>
-            </dgm:layoutNode>
-          </dgm:layoutNode>
-          <dgm:layoutNode name="hierChild2">
-            <dgm:choose name="Name5">
-              <dgm:if name="Name6" func="var" arg="dir" op="equ" val="norm">
-                <dgm:alg type="hierChild">
-                  <dgm:param type="linDir" val="fromL"/>
-                </dgm:alg>
-              </dgm:if>
-              <dgm:else name="Name7">
-                <dgm:alg type="hierChild">
-                  <dgm:param type="linDir" val="fromR"/>
-                </dgm:alg>
-              </dgm:else>
-            </dgm:choose>
-            <dgm:shape xmlns:r="http://schemas.openxmlformats.org/officeDocument/2006/relationships" r:blip="">
-              <dgm:adjLst/>
-            </dgm:shape>
-            <dgm:presOf/>
-            <dgm:constrLst/>
-            <dgm:ruleLst/>
-            <dgm:forEach name="Name8" axis="ch">
-              <dgm:forEach name="Name9" axis="self" ptType="parTrans" cnt="1">
-                <dgm:layoutNode name="Name10">
-                  <dgm:alg type="conn">
-                    <dgm:param type="dim" val="1D"/>
-                    <dgm:param type="endSty" val="noArr"/>
-                    <dgm:param type="connRout" val="bend"/>
-                    <dgm:param type="bendPt" val="end"/>
-                    <dgm:param type="begPts" val="bCtr"/>
-                    <dgm:param type="endPts" val="tCtr"/>
-                    <dgm:param type="srcNode" val="background"/>
-                    <dgm:param type="dstNode" val="background2"/>
-                  </dgm:alg>
-                  <dgm:shape xmlns:r="http://schemas.openxmlformats.org/officeDocument/2006/relationships" type="conn" r:blip="" zOrderOff="-999">
-                    <dgm:adjLst/>
-                  </dgm:shape>
-                  <dgm:presOf axis="self"/>
-                  <dgm:constrLst>
-                    <dgm:constr type="begPad"/>
-                    <dgm:constr type="endPad"/>
-                  </dgm:constrLst>
-                  <dgm:ruleLst/>
-                </dgm:layoutNode>
-              </dgm:forEach>
-              <dgm:forEach name="Name11" axis="self" ptType="node">
-                <dgm:layoutNode name="hierRoot2">
-                  <dgm:alg type="hierRoot"/>
-                  <dgm:shape xmlns:r="http://schemas.openxmlformats.org/officeDocument/2006/relationships" r:blip="">
-                    <dgm:adjLst/>
-                  </dgm:shape>
-                  <dgm:presOf/>
-                  <dgm:constrLst>
-                    <dgm:constr type="bendDist" for="des" ptType="parTrans" refType="sp" fact="0.5"/>
-                  </dgm:constrLst>
-                  <dgm:ruleLst/>
-                  <dgm:layoutNode name="composite2">
-                    <dgm:alg type="composite"/>
-                    <dgm:shape xmlns:r="http://schemas.openxmlformats.org/officeDocument/2006/relationships" r:blip="">
-                      <dgm:adjLst/>
-                    </dgm:shape>
-                    <dgm:presOf/>
-                    <dgm:constrLst>
-                      <dgm:constr type="w" for="ch" forName="background2" refType="w" fact="0.9"/>
-                      <dgm:constr type="h" for="ch" forName="background2" refType="w" refFor="ch" refForName="background2" fact="0.635"/>
-                      <dgm:constr type="t" for="ch" forName="background2"/>
-                      <dgm:constr type="l" for="ch" forName="background2"/>
-                      <dgm:constr type="w" for="ch" forName="text2" refType="w" fact="0.9"/>
-                      <dgm:constr type="h" for="ch" forName="text2" refType="w" refFor="ch" refForName="text2" fact="0.635"/>
-                      <dgm:constr type="t" for="ch" forName="text2" refType="w" fact="0.095"/>
-                      <dgm:constr type="l" for="ch" forName="text2" refType="w" fact="0.1"/>
-                    </dgm:constrLst>
-                    <dgm:ruleLst/>
-                    <dgm:layoutNode name="background2" moveWith="text2">
-                      <dgm:alg type="sp"/>
-                      <dgm:shape xmlns:r="http://schemas.openxmlformats.org/officeDocument/2006/relationships" type="roundRect" r:blip="">
-                        <dgm:adjLst>
-                          <dgm:adj idx="1" val="0.1"/>
-                        </dgm:adjLst>
-                      </dgm:shape>
-                      <dgm:presOf/>
-                      <dgm:constrLst/>
-                      <dgm:ruleLst/>
-                    </dgm:layoutNode>
-                    <dgm:layoutNode name="text2" styleLbl="fgAcc2">
-                      <dgm:varLst>
-                        <dgm:chPref val="3"/>
-                      </dgm:varLst>
-                      <dgm:alg type="tx"/>
-                      <dgm:shape xmlns:r="http://schemas.openxmlformats.org/officeDocument/2006/relationships" type="roundRect" r:blip="">
-                        <dgm:adjLst>
-                          <dgm:adj idx="1" val="0.1"/>
-                        </dgm:adjLst>
-                      </dgm:shape>
-                      <dgm:presOf axis="self"/>
-                      <dgm:constrLst>
-                        <dgm:constr type="tMarg" refType="primFontSz" fact="0.3"/>
-                        <dgm:constr type="bMarg" refType="primFontSz" fact="0.3"/>
-                        <dgm:constr type="lMarg" refType="primFontSz" fact="0.3"/>
-                        <dgm:constr type="rMarg" refType="primFontSz" fact="0.3"/>
-                      </dgm:constrLst>
-                      <dgm:ruleLst>
-                        <dgm:rule type="primFontSz" val="5" fact="NaN" max="NaN"/>
-                      </dgm:ruleLst>
-                    </dgm:layoutNode>
-                  </dgm:layoutNode>
-                  <dgm:layoutNode name="hierChild3">
-                    <dgm:choose name="Name12">
-                      <dgm:if name="Name13" func="var" arg="dir" op="equ" val="norm">
-                        <dgm:alg type="hierChild">
-                          <dgm:param type="linDir" val="fromL"/>
-                        </dgm:alg>
-                      </dgm:if>
-                      <dgm:else name="Name14">
-                        <dgm:alg type="hierChild">
-                          <dgm:param type="linDir" val="fromR"/>
-                        </dgm:alg>
-                      </dgm:else>
-                    </dgm:choose>
-                    <dgm:shape xmlns:r="http://schemas.openxmlformats.org/officeDocument/2006/relationships" r:blip="">
-                      <dgm:adjLst/>
-                    </dgm:shape>
-                    <dgm:presOf/>
-                    <dgm:constrLst/>
-                    <dgm:ruleLst/>
-                    <dgm:forEach name="Name15" axis="ch">
-                      <dgm:forEach name="Name16" axis="self" ptType="parTrans" cnt="1">
-                        <dgm:layoutNode name="Name17">
-                          <dgm:alg type="conn">
-                            <dgm:param type="dim" val="1D"/>
-                            <dgm:param type="endSty" val="noArr"/>
-                            <dgm:param type="connRout" val="bend"/>
-                            <dgm:param type="bendPt" val="end"/>
-                            <dgm:param type="begPts" val="bCtr"/>
-                            <dgm:param type="endPts" val="tCtr"/>
-                            <dgm:param type="srcNode" val="background2"/>
-                            <dgm:param type="dstNode" val="background3"/>
-                          </dgm:alg>
-                          <dgm:shape xmlns:r="http://schemas.openxmlformats.org/officeDocument/2006/relationships" type="conn" r:blip="" zOrderOff="-999">
-                            <dgm:adjLst/>
-                          </dgm:shape>
-                          <dgm:presOf axis="self"/>
-                          <dgm:constrLst>
-                            <dgm:constr type="begPad"/>
-                            <dgm:constr type="endPad"/>
-                          </dgm:constrLst>
-                          <dgm:ruleLst/>
-                        </dgm:layoutNode>
-                      </dgm:forEach>
-                      <dgm:forEach name="Name18" axis="self" ptType="node">
-                        <dgm:layoutNode name="hierRoot3">
-                          <dgm:alg type="hierRoot"/>
-                          <dgm:shape xmlns:r="http://schemas.openxmlformats.org/officeDocument/2006/relationships" r:blip="">
-                            <dgm:adjLst/>
-                          </dgm:shape>
-                          <dgm:presOf/>
-                          <dgm:constrLst>
-                            <dgm:constr type="bendDist" for="des" ptType="parTrans" refType="sp" fact="0.5"/>
-                          </dgm:constrLst>
-                          <dgm:ruleLst/>
-                          <dgm:layoutNode name="composite3">
-                            <dgm:alg type="composite"/>
-                            <dgm:shape xmlns:r="http://schemas.openxmlformats.org/officeDocument/2006/relationships" r:blip="">
-                              <dgm:adjLst/>
-                            </dgm:shape>
-                            <dgm:presOf/>
-                            <dgm:constrLst>
-                              <dgm:constr type="w" for="ch" forName="background3" refType="w" fact="0.9"/>
-                              <dgm:constr type="h" for="ch" forName="background3" refType="w" refFor="ch" refForName="background3" fact="0.635"/>
-                              <dgm:constr type="t" for="ch" forName="background3"/>
-                              <dgm:constr type="l" for="ch" forName="background3"/>
-                              <dgm:constr type="w" for="ch" forName="text3" refType="w" fact="0.9"/>
-                              <dgm:constr type="h" for="ch" forName="text3" refType="w" refFor="ch" refForName="text3" fact="0.635"/>
-                              <dgm:constr type="t" for="ch" forName="text3" refType="w" fact="0.095"/>
-                              <dgm:constr type="l" for="ch" forName="text3" refType="w" fact="0.1"/>
-                            </dgm:constrLst>
-                            <dgm:ruleLst/>
-                            <dgm:layoutNode name="background3" moveWith="text3">
-                              <dgm:alg type="sp"/>
-                              <dgm:shape xmlns:r="http://schemas.openxmlformats.org/officeDocument/2006/relationships" type="roundRect" r:blip="">
-                                <dgm:adjLst>
-                                  <dgm:adj idx="1" val="0.1"/>
-                                </dgm:adjLst>
-                              </dgm:shape>
-                              <dgm:presOf/>
-                              <dgm:constrLst/>
-                              <dgm:ruleLst/>
-                            </dgm:layoutNode>
-                            <dgm:layoutNode name="text3" styleLbl="fgAcc3">
-                              <dgm:varLst>
-                                <dgm:chPref val="3"/>
-                              </dgm:varLst>
-                              <dgm:alg type="tx"/>
-                              <dgm:shape xmlns:r="http://schemas.openxmlformats.org/officeDocument/2006/relationships" type="roundRect" r:blip="">
-                                <dgm:adjLst>
-                                  <dgm:adj idx="1" val="0.1"/>
-                                </dgm:adjLst>
-                              </dgm:shape>
-                              <dgm:presOf axis="self"/>
-                              <dgm:constrLst>
-                                <dgm:constr type="tMarg" refType="primFontSz" fact="0.3"/>
-                                <dgm:constr type="bMarg" refType="primFontSz" fact="0.3"/>
-                                <dgm:constr type="lMarg" refType="primFontSz" fact="0.3"/>
-                                <dgm:constr type="rMarg" refType="primFontSz" fact="0.3"/>
-                              </dgm:constrLst>
-                              <dgm:ruleLst>
-                                <dgm:rule type="primFontSz" val="5" fact="NaN" max="NaN"/>
-                              </dgm:ruleLst>
-                            </dgm:layoutNode>
-                          </dgm:layoutNode>
-                          <dgm:layoutNode name="hierChild4">
-                            <dgm:choose name="Name19">
-                              <dgm:if name="Name20" func="var" arg="dir" op="equ" val="norm">
-                                <dgm:alg type="hierChild">
-                                  <dgm:param type="linDir" val="fromL"/>
-                                </dgm:alg>
-                              </dgm:if>
-                              <dgm:else name="Name21">
-                                <dgm:alg type="hierChild">
-                                  <dgm:param type="linDir" val="fromR"/>
-                                </dgm:alg>
-                              </dgm:else>
-                            </dgm:choose>
-                            <dgm:shape xmlns:r="http://schemas.openxmlformats.org/officeDocument/2006/relationships" r:blip="">
-                              <dgm:adjLst/>
-                            </dgm:shape>
-                            <dgm:presOf/>
-                            <dgm:constrLst/>
-                            <dgm:ruleLst/>
-                            <dgm:forEach name="repeat" axis="ch">
-                              <dgm:forEach name="Name22" axis="self" ptType="parTrans" cnt="1">
-                                <dgm:layoutNode name="Name23">
-                                  <dgm:choose name="Name24">
-                                    <dgm:if name="Name25" axis="self" func="depth" op="lte" val="4">
-                                      <dgm:alg type="conn">
-                                        <dgm:param type="dim" val="1D"/>
-                                        <dgm:param type="endSty" val="noArr"/>
-                                        <dgm:param type="connRout" val="bend"/>
-                                        <dgm:param type="bendPt" val="end"/>
-                                        <dgm:param type="begPts" val="bCtr"/>
-                                        <dgm:param type="endPts" val="tCtr"/>
-                                        <dgm:param type="srcNode" val="background3"/>
-                                        <dgm:param type="dstNode" val="background4"/>
-                                      </dgm:alg>
-                                    </dgm:if>
-                                    <dgm:else name="Name26">
-                                      <dgm:alg type="conn">
-                                        <dgm:param type="dim" val="1D"/>
-                                        <dgm:param type="endSty" val="noArr"/>
-                                        <dgm:param type="connRout" val="bend"/>
-                                        <dgm:param type="bendPt" val="end"/>
-                                        <dgm:param type="begPts" val="bCtr"/>
-                                        <dgm:param type="endPts" val="tCtr"/>
-                                        <dgm:param type="srcNode" val="background4"/>
-                                        <dgm:param type="dstNode" val="background4"/>
-                                      </dgm:alg>
-                                    </dgm:else>
-                                  </dgm:choose>
-                                  <dgm:shape xmlns:r="http://schemas.openxmlformats.org/officeDocument/2006/relationships" type="conn" r:blip="" zOrderOff="-999">
-                                    <dgm:adjLst/>
-                                  </dgm:shape>
-                                  <dgm:presOf axis="self"/>
-                                  <dgm:constrLst>
-                                    <dgm:constr type="begPad"/>
-                                    <dgm:constr type="endPad"/>
-                                  </dgm:constrLst>
-                                  <dgm:ruleLst/>
-                                </dgm:layoutNode>
-                              </dgm:forEach>
-                              <dgm:forEach name="Name27" axis="self" ptType="node">
-                                <dgm:layoutNode name="hierRoot4">
-                                  <dgm:alg type="hierRoot"/>
-                                  <dgm:shape xmlns:r="http://schemas.openxmlformats.org/officeDocument/2006/relationships" r:blip="">
-                                    <dgm:adjLst/>
-                                  </dgm:shape>
-                                  <dgm:presOf/>
-                                  <dgm:constrLst>
-                                    <dgm:constr type="bendDist" for="des" ptType="parTrans" refType="sp" fact="0.5"/>
-                                  </dgm:constrLst>
-                                  <dgm:ruleLst/>
-                                  <dgm:layoutNode name="composite4">
-                                    <dgm:alg type="composite"/>
-                                    <dgm:shape xmlns:r="http://schemas.openxmlformats.org/officeDocument/2006/relationships" r:blip="">
-                                      <dgm:adjLst/>
-                                    </dgm:shape>
-                                    <dgm:presOf/>
-                                    <dgm:constrLst>
-                                      <dgm:constr type="w" for="ch" forName="background4" refType="w" fact="0.9"/>
-                                      <dgm:constr type="h" for="ch" forName="background4" refType="w" refFor="ch" refForName="background4" fact="0.635"/>
-                                      <dgm:constr type="t" for="ch" forName="background4"/>
-                                      <dgm:constr type="l" for="ch" forName="background4"/>
-                                      <dgm:constr type="w" for="ch" forName="text4" refType="w" fact="0.9"/>
-                                      <dgm:constr type="h" for="ch" forName="text4" refType="w" refFor="ch" refForName="text4" fact="0.635"/>
-                                      <dgm:constr type="t" for="ch" forName="text4" refType="w" fact="0.095"/>
-                                      <dgm:constr type="l" for="ch" forName="text4" refType="w" fact="0.1"/>
-                                    </dgm:constrLst>
-                                    <dgm:ruleLst/>
-                                    <dgm:layoutNode name="background4" moveWith="text4">
-                                      <dgm:alg type="sp"/>
-                                      <dgm:shape xmlns:r="http://schemas.openxmlformats.org/officeDocument/2006/relationships" type="roundRect" r:blip="">
-                                        <dgm:adjLst>
-                                          <dgm:adj idx="1" val="0.1"/>
-                                        </dgm:adjLst>
-                                      </dgm:shape>
-                                      <dgm:presOf/>
-                                      <dgm:constrLst/>
-                                      <dgm:ruleLst/>
-                                    </dgm:layoutNode>
-                                    <dgm:layoutNode name="text4" styleLbl="fgAcc4">
-                                      <dgm:varLst>
-                                        <dgm:chPref val="3"/>
-                                      </dgm:varLst>
-                                      <dgm:alg type="tx"/>
-                                      <dgm:shape xmlns:r="http://schemas.openxmlformats.org/officeDocument/2006/relationships" type="roundRect" r:blip="">
-                                        <dgm:adjLst>
-                                          <dgm:adj idx="1" val="0.1"/>
-                                        </dgm:adjLst>
-                                      </dgm:shape>
-                                      <dgm:presOf axis="self"/>
-                                      <dgm:constrLst>
-                                        <dgm:constr type="tMarg" refType="primFontSz" fact="0.3"/>
-                                        <dgm:constr type="bMarg" refType="primFontSz" fact="0.3"/>
-                                        <dgm:constr type="lMarg" refType="primFontSz" fact="0.3"/>
-                                        <dgm:constr type="rMarg" refType="primFontSz" fact="0.3"/>
-                                      </dgm:constrLst>
-                                      <dgm:ruleLst>
-                                        <dgm:rule type="primFontSz" val="5" fact="NaN" max="NaN"/>
-                                      </dgm:ruleLst>
-                                    </dgm:layoutNode>
-                                  </dgm:layoutNode>
-                                  <dgm:layoutNode name="hierChild5">
-                                    <dgm:choose name="Name28">
-                                      <dgm:if name="Name29" func="var" arg="dir" op="equ" val="norm">
-                                        <dgm:alg type="hierChild">
-                                          <dgm:param type="linDir" val="fromL"/>
-                                        </dgm:alg>
-                                      </dgm:if>
-                                      <dgm:else name="Name30">
-                                        <dgm:alg type="hierChild">
-                                          <dgm:param type="linDir" val="fromR"/>
-                                        </dgm:alg>
-                                      </dgm:else>
-                                    </dgm:choose>
-                                    <dgm:shape xmlns:r="http://schemas.openxmlformats.org/officeDocument/2006/relationships" r:blip="">
-                                      <dgm:adjLst/>
-                                    </dgm:shape>
-                                    <dgm:presOf/>
-                                    <dgm:constrLst/>
-                                    <dgm:ruleLst/>
-                                    <dgm:forEach name="Name31" ref="repeat"/>
-                                  </dgm:layoutNode>
-                                </dgm:layoutNode>
-                              </dgm:forEach>
-                            </dgm:forEach>
-                          </dgm:layoutNode>
-                        </dgm:layoutNode>
-                      </dgm:forEach>
-                    </dgm:forEach>
-                  </dgm:layoutNode>
-                </dgm:layoutNode>
-              </dgm:forEach>
-            </dgm:forEach>
-          </dgm:layoutNode>
-        </dgm:layoutNode>
-      </dgm:forEach>
-    </dgm:forEach>
-  </dgm:layoutNode>
-</dgm:layoutDef>
-</file>
-
 <file path=ppt/diagrams/quickStyle1.xml><?xml version="1.0" encoding="utf-8"?>
 <dgm:styleDef xmlns:dgm="http://schemas.openxmlformats.org/drawingml/2006/diagram" xmlns:a="http://schemas.openxmlformats.org/drawingml/2006/main" uniqueId="urn:microsoft.com/office/officeart/2005/8/quickstyle/simple5">
   <dgm:title val=""/>
@@ -5117,1040 +2873,6 @@
         <a:scrgbClr r="0" g="0" b="0"/>
       </a:fillRef>
       <a:effectRef idx="3">
-        <a:scrgbClr r="0" g="0" b="0"/>
-      </a:effectRef>
-      <a:fontRef idx="minor"/>
-    </dgm:style>
-  </dgm:styleLbl>
-  <dgm:styleLbl name="revTx">
-    <dgm:scene3d>
-      <a:camera prst="orthographicFront"/>
-      <a:lightRig rig="threePt" dir="t"/>
-    </dgm:scene3d>
-    <dgm:sp3d/>
-    <dgm:txPr/>
-    <dgm:style>
-      <a:lnRef idx="0">
-        <a:scrgbClr r="0" g="0" b="0"/>
-      </a:lnRef>
-      <a:fillRef idx="0">
-        <a:scrgbClr r="0" g="0" b="0"/>
-      </a:fillRef>
-      <a:effectRef idx="0">
-        <a:scrgbClr r="0" g="0" b="0"/>
-      </a:effectRef>
-      <a:fontRef idx="minor"/>
-    </dgm:style>
-  </dgm:styleLbl>
-</dgm:styleDef>
-</file>
-
-<file path=ppt/diagrams/quickStyle2.xml><?xml version="1.0" encoding="utf-8"?>
-<dgm:styleDef xmlns:dgm="http://schemas.openxmlformats.org/drawingml/2006/diagram" xmlns:a="http://schemas.openxmlformats.org/drawingml/2006/main" uniqueId="urn:microsoft.com/office/officeart/2005/8/quickstyle/simple1">
-  <dgm:title val=""/>
-  <dgm:desc val=""/>
-  <dgm:catLst>
-    <dgm:cat type="simple" pri="10100"/>
-  </dgm:catLst>
-  <dgm:scene3d>
-    <a:camera prst="orthographicFront"/>
-    <a:lightRig rig="threePt" dir="t"/>
-  </dgm:scene3d>
-  <dgm:styleLbl name="node0">
-    <dgm:scene3d>
-      <a:camera prst="orthographicFront"/>
-      <a:lightRig rig="threePt" dir="t"/>
-    </dgm:scene3d>
-    <dgm:sp3d/>
-    <dgm:txPr/>
-    <dgm:style>
-      <a:lnRef idx="2">
-        <a:scrgbClr r="0" g="0" b="0"/>
-      </a:lnRef>
-      <a:fillRef idx="1">
-        <a:scrgbClr r="0" g="0" b="0"/>
-      </a:fillRef>
-      <a:effectRef idx="0">
-        <a:scrgbClr r="0" g="0" b="0"/>
-      </a:effectRef>
-      <a:fontRef idx="minor">
-        <a:schemeClr val="lt1"/>
-      </a:fontRef>
-    </dgm:style>
-  </dgm:styleLbl>
-  <dgm:styleLbl name="lnNode1">
-    <dgm:scene3d>
-      <a:camera prst="orthographicFront"/>
-      <a:lightRig rig="threePt" dir="t"/>
-    </dgm:scene3d>
-    <dgm:sp3d/>
-    <dgm:txPr/>
-    <dgm:style>
-      <a:lnRef idx="2">
-        <a:scrgbClr r="0" g="0" b="0"/>
-      </a:lnRef>
-      <a:fillRef idx="1">
-        <a:scrgbClr r="0" g="0" b="0"/>
-      </a:fillRef>
-      <a:effectRef idx="0">
-        <a:scrgbClr r="0" g="0" b="0"/>
-      </a:effectRef>
-      <a:fontRef idx="minor">
-        <a:schemeClr val="lt1"/>
-      </a:fontRef>
-    </dgm:style>
-  </dgm:styleLbl>
-  <dgm:styleLbl name="vennNode1">
-    <dgm:scene3d>
-      <a:camera prst="orthographicFront"/>
-      <a:lightRig rig="threePt" dir="t"/>
-    </dgm:scene3d>
-    <dgm:sp3d/>
-    <dgm:txPr/>
-    <dgm:style>
-      <a:lnRef idx="2">
-        <a:scrgbClr r="0" g="0" b="0"/>
-      </a:lnRef>
-      <a:fillRef idx="1">
-        <a:scrgbClr r="0" g="0" b="0"/>
-      </a:fillRef>
-      <a:effectRef idx="0">
-        <a:scrgbClr r="0" g="0" b="0"/>
-      </a:effectRef>
-      <a:fontRef idx="minor">
-        <a:schemeClr val="tx1"/>
-      </a:fontRef>
-    </dgm:style>
-  </dgm:styleLbl>
-  <dgm:styleLbl name="alignNode1">
-    <dgm:scene3d>
-      <a:camera prst="orthographicFront"/>
-      <a:lightRig rig="threePt" dir="t"/>
-    </dgm:scene3d>
-    <dgm:sp3d/>
-    <dgm:txPr/>
-    <dgm:style>
-      <a:lnRef idx="2">
-        <a:scrgbClr r="0" g="0" b="0"/>
-      </a:lnRef>
-      <a:fillRef idx="1">
-        <a:scrgbClr r="0" g="0" b="0"/>
-      </a:fillRef>
-      <a:effectRef idx="0">
-        <a:scrgbClr r="0" g="0" b="0"/>
-      </a:effectRef>
-      <a:fontRef idx="minor">
-        <a:schemeClr val="lt1"/>
-      </a:fontRef>
-    </dgm:style>
-  </dgm:styleLbl>
-  <dgm:styleLbl name="node1">
-    <dgm:scene3d>
-      <a:camera prst="orthographicFront"/>
-      <a:lightRig rig="threePt" dir="t"/>
-    </dgm:scene3d>
-    <dgm:sp3d/>
-    <dgm:txPr/>
-    <dgm:style>
-      <a:lnRef idx="2">
-        <a:scrgbClr r="0" g="0" b="0"/>
-      </a:lnRef>
-      <a:fillRef idx="1">
-        <a:scrgbClr r="0" g="0" b="0"/>
-      </a:fillRef>
-      <a:effectRef idx="0">
-        <a:scrgbClr r="0" g="0" b="0"/>
-      </a:effectRef>
-      <a:fontRef idx="minor">
-        <a:schemeClr val="lt1"/>
-      </a:fontRef>
-    </dgm:style>
-  </dgm:styleLbl>
-  <dgm:styleLbl name="node2">
-    <dgm:scene3d>
-      <a:camera prst="orthographicFront"/>
-      <a:lightRig rig="threePt" dir="t"/>
-    </dgm:scene3d>
-    <dgm:sp3d/>
-    <dgm:txPr/>
-    <dgm:style>
-      <a:lnRef idx="2">
-        <a:scrgbClr r="0" g="0" b="0"/>
-      </a:lnRef>
-      <a:fillRef idx="1">
-        <a:scrgbClr r="0" g="0" b="0"/>
-      </a:fillRef>
-      <a:effectRef idx="0">
-        <a:scrgbClr r="0" g="0" b="0"/>
-      </a:effectRef>
-      <a:fontRef idx="minor">
-        <a:schemeClr val="lt1"/>
-      </a:fontRef>
-    </dgm:style>
-  </dgm:styleLbl>
-  <dgm:styleLbl name="node3">
-    <dgm:scene3d>
-      <a:camera prst="orthographicFront"/>
-      <a:lightRig rig="threePt" dir="t"/>
-    </dgm:scene3d>
-    <dgm:sp3d/>
-    <dgm:txPr/>
-    <dgm:style>
-      <a:lnRef idx="2">
-        <a:scrgbClr r="0" g="0" b="0"/>
-      </a:lnRef>
-      <a:fillRef idx="1">
-        <a:scrgbClr r="0" g="0" b="0"/>
-      </a:fillRef>
-      <a:effectRef idx="0">
-        <a:scrgbClr r="0" g="0" b="0"/>
-      </a:effectRef>
-      <a:fontRef idx="minor">
-        <a:schemeClr val="lt1"/>
-      </a:fontRef>
-    </dgm:style>
-  </dgm:styleLbl>
-  <dgm:styleLbl name="node4">
-    <dgm:scene3d>
-      <a:camera prst="orthographicFront"/>
-      <a:lightRig rig="threePt" dir="t"/>
-    </dgm:scene3d>
-    <dgm:sp3d/>
-    <dgm:txPr/>
-    <dgm:style>
-      <a:lnRef idx="2">
-        <a:scrgbClr r="0" g="0" b="0"/>
-      </a:lnRef>
-      <a:fillRef idx="1">
-        <a:scrgbClr r="0" g="0" b="0"/>
-      </a:fillRef>
-      <a:effectRef idx="0">
-        <a:scrgbClr r="0" g="0" b="0"/>
-      </a:effectRef>
-      <a:fontRef idx="minor">
-        <a:schemeClr val="lt1"/>
-      </a:fontRef>
-    </dgm:style>
-  </dgm:styleLbl>
-  <dgm:styleLbl name="fgImgPlace1">
-    <dgm:scene3d>
-      <a:camera prst="orthographicFront"/>
-      <a:lightRig rig="threePt" dir="t"/>
-    </dgm:scene3d>
-    <dgm:sp3d/>
-    <dgm:txPr/>
-    <dgm:style>
-      <a:lnRef idx="2">
-        <a:scrgbClr r="0" g="0" b="0"/>
-      </a:lnRef>
-      <a:fillRef idx="1">
-        <a:scrgbClr r="0" g="0" b="0"/>
-      </a:fillRef>
-      <a:effectRef idx="0">
-        <a:scrgbClr r="0" g="0" b="0"/>
-      </a:effectRef>
-      <a:fontRef idx="minor"/>
-    </dgm:style>
-  </dgm:styleLbl>
-  <dgm:styleLbl name="alignImgPlace1">
-    <dgm:scene3d>
-      <a:camera prst="orthographicFront"/>
-      <a:lightRig rig="threePt" dir="t"/>
-    </dgm:scene3d>
-    <dgm:sp3d/>
-    <dgm:txPr/>
-    <dgm:style>
-      <a:lnRef idx="2">
-        <a:scrgbClr r="0" g="0" b="0"/>
-      </a:lnRef>
-      <a:fillRef idx="1">
-        <a:scrgbClr r="0" g="0" b="0"/>
-      </a:fillRef>
-      <a:effectRef idx="0">
-        <a:scrgbClr r="0" g="0" b="0"/>
-      </a:effectRef>
-      <a:fontRef idx="minor"/>
-    </dgm:style>
-  </dgm:styleLbl>
-  <dgm:styleLbl name="bgImgPlace1">
-    <dgm:scene3d>
-      <a:camera prst="orthographicFront"/>
-      <a:lightRig rig="threePt" dir="t"/>
-    </dgm:scene3d>
-    <dgm:sp3d/>
-    <dgm:txPr/>
-    <dgm:style>
-      <a:lnRef idx="2">
-        <a:scrgbClr r="0" g="0" b="0"/>
-      </a:lnRef>
-      <a:fillRef idx="1">
-        <a:scrgbClr r="0" g="0" b="0"/>
-      </a:fillRef>
-      <a:effectRef idx="0">
-        <a:scrgbClr r="0" g="0" b="0"/>
-      </a:effectRef>
-      <a:fontRef idx="minor"/>
-    </dgm:style>
-  </dgm:styleLbl>
-  <dgm:styleLbl name="sibTrans2D1">
-    <dgm:scene3d>
-      <a:camera prst="orthographicFront"/>
-      <a:lightRig rig="threePt" dir="t"/>
-    </dgm:scene3d>
-    <dgm:sp3d/>
-    <dgm:txPr/>
-    <dgm:style>
-      <a:lnRef idx="0">
-        <a:scrgbClr r="0" g="0" b="0"/>
-      </a:lnRef>
-      <a:fillRef idx="1">
-        <a:scrgbClr r="0" g="0" b="0"/>
-      </a:fillRef>
-      <a:effectRef idx="0">
-        <a:scrgbClr r="0" g="0" b="0"/>
-      </a:effectRef>
-      <a:fontRef idx="minor">
-        <a:schemeClr val="lt1"/>
-      </a:fontRef>
-    </dgm:style>
-  </dgm:styleLbl>
-  <dgm:styleLbl name="fgSibTrans2D1">
-    <dgm:scene3d>
-      <a:camera prst="orthographicFront"/>
-      <a:lightRig rig="threePt" dir="t"/>
-    </dgm:scene3d>
-    <dgm:sp3d/>
-    <dgm:txPr/>
-    <dgm:style>
-      <a:lnRef idx="0">
-        <a:scrgbClr r="0" g="0" b="0"/>
-      </a:lnRef>
-      <a:fillRef idx="1">
-        <a:scrgbClr r="0" g="0" b="0"/>
-      </a:fillRef>
-      <a:effectRef idx="0">
-        <a:scrgbClr r="0" g="0" b="0"/>
-      </a:effectRef>
-      <a:fontRef idx="minor">
-        <a:schemeClr val="lt1"/>
-      </a:fontRef>
-    </dgm:style>
-  </dgm:styleLbl>
-  <dgm:styleLbl name="bgSibTrans2D1">
-    <dgm:scene3d>
-      <a:camera prst="orthographicFront"/>
-      <a:lightRig rig="threePt" dir="t"/>
-    </dgm:scene3d>
-    <dgm:sp3d/>
-    <dgm:txPr/>
-    <dgm:style>
-      <a:lnRef idx="0">
-        <a:scrgbClr r="0" g="0" b="0"/>
-      </a:lnRef>
-      <a:fillRef idx="1">
-        <a:scrgbClr r="0" g="0" b="0"/>
-      </a:fillRef>
-      <a:effectRef idx="0">
-        <a:scrgbClr r="0" g="0" b="0"/>
-      </a:effectRef>
-      <a:fontRef idx="minor">
-        <a:schemeClr val="lt1"/>
-      </a:fontRef>
-    </dgm:style>
-  </dgm:styleLbl>
-  <dgm:styleLbl name="sibTrans1D1">
-    <dgm:scene3d>
-      <a:camera prst="orthographicFront"/>
-      <a:lightRig rig="threePt" dir="t"/>
-    </dgm:scene3d>
-    <dgm:sp3d/>
-    <dgm:txPr/>
-    <dgm:style>
-      <a:lnRef idx="1">
-        <a:scrgbClr r="0" g="0" b="0"/>
-      </a:lnRef>
-      <a:fillRef idx="0">
-        <a:scrgbClr r="0" g="0" b="0"/>
-      </a:fillRef>
-      <a:effectRef idx="0">
-        <a:scrgbClr r="0" g="0" b="0"/>
-      </a:effectRef>
-      <a:fontRef idx="minor"/>
-    </dgm:style>
-  </dgm:styleLbl>
-  <dgm:styleLbl name="callout">
-    <dgm:scene3d>
-      <a:camera prst="orthographicFront"/>
-      <a:lightRig rig="threePt" dir="t"/>
-    </dgm:scene3d>
-    <dgm:sp3d/>
-    <dgm:txPr/>
-    <dgm:style>
-      <a:lnRef idx="2">
-        <a:scrgbClr r="0" g="0" b="0"/>
-      </a:lnRef>
-      <a:fillRef idx="1">
-        <a:scrgbClr r="0" g="0" b="0"/>
-      </a:fillRef>
-      <a:effectRef idx="0">
-        <a:scrgbClr r="0" g="0" b="0"/>
-      </a:effectRef>
-      <a:fontRef idx="minor"/>
-    </dgm:style>
-  </dgm:styleLbl>
-  <dgm:styleLbl name="asst0">
-    <dgm:scene3d>
-      <a:camera prst="orthographicFront"/>
-      <a:lightRig rig="threePt" dir="t"/>
-    </dgm:scene3d>
-    <dgm:sp3d/>
-    <dgm:txPr/>
-    <dgm:style>
-      <a:lnRef idx="2">
-        <a:scrgbClr r="0" g="0" b="0"/>
-      </a:lnRef>
-      <a:fillRef idx="1">
-        <a:scrgbClr r="0" g="0" b="0"/>
-      </a:fillRef>
-      <a:effectRef idx="0">
-        <a:scrgbClr r="0" g="0" b="0"/>
-      </a:effectRef>
-      <a:fontRef idx="minor">
-        <a:schemeClr val="lt1"/>
-      </a:fontRef>
-    </dgm:style>
-  </dgm:styleLbl>
-  <dgm:styleLbl name="asst1">
-    <dgm:scene3d>
-      <a:camera prst="orthographicFront"/>
-      <a:lightRig rig="threePt" dir="t"/>
-    </dgm:scene3d>
-    <dgm:sp3d/>
-    <dgm:txPr/>
-    <dgm:style>
-      <a:lnRef idx="2">
-        <a:scrgbClr r="0" g="0" b="0"/>
-      </a:lnRef>
-      <a:fillRef idx="1">
-        <a:scrgbClr r="0" g="0" b="0"/>
-      </a:fillRef>
-      <a:effectRef idx="0">
-        <a:scrgbClr r="0" g="0" b="0"/>
-      </a:effectRef>
-      <a:fontRef idx="minor">
-        <a:schemeClr val="lt1"/>
-      </a:fontRef>
-    </dgm:style>
-  </dgm:styleLbl>
-  <dgm:styleLbl name="asst2">
-    <dgm:scene3d>
-      <a:camera prst="orthographicFront"/>
-      <a:lightRig rig="threePt" dir="t"/>
-    </dgm:scene3d>
-    <dgm:sp3d/>
-    <dgm:txPr/>
-    <dgm:style>
-      <a:lnRef idx="2">
-        <a:scrgbClr r="0" g="0" b="0"/>
-      </a:lnRef>
-      <a:fillRef idx="1">
-        <a:scrgbClr r="0" g="0" b="0"/>
-      </a:fillRef>
-      <a:effectRef idx="0">
-        <a:scrgbClr r="0" g="0" b="0"/>
-      </a:effectRef>
-      <a:fontRef idx="minor">
-        <a:schemeClr val="lt1"/>
-      </a:fontRef>
-    </dgm:style>
-  </dgm:styleLbl>
-  <dgm:styleLbl name="asst3">
-    <dgm:scene3d>
-      <a:camera prst="orthographicFront"/>
-      <a:lightRig rig="threePt" dir="t"/>
-    </dgm:scene3d>
-    <dgm:sp3d/>
-    <dgm:txPr/>
-    <dgm:style>
-      <a:lnRef idx="2">
-        <a:scrgbClr r="0" g="0" b="0"/>
-      </a:lnRef>
-      <a:fillRef idx="1">
-        <a:scrgbClr r="0" g="0" b="0"/>
-      </a:fillRef>
-      <a:effectRef idx="0">
-        <a:scrgbClr r="0" g="0" b="0"/>
-      </a:effectRef>
-      <a:fontRef idx="minor">
-        <a:schemeClr val="lt1"/>
-      </a:fontRef>
-    </dgm:style>
-  </dgm:styleLbl>
-  <dgm:styleLbl name="asst4">
-    <dgm:scene3d>
-      <a:camera prst="orthographicFront"/>
-      <a:lightRig rig="threePt" dir="t"/>
-    </dgm:scene3d>
-    <dgm:sp3d/>
-    <dgm:txPr/>
-    <dgm:style>
-      <a:lnRef idx="2">
-        <a:scrgbClr r="0" g="0" b="0"/>
-      </a:lnRef>
-      <a:fillRef idx="1">
-        <a:scrgbClr r="0" g="0" b="0"/>
-      </a:fillRef>
-      <a:effectRef idx="0">
-        <a:scrgbClr r="0" g="0" b="0"/>
-      </a:effectRef>
-      <a:fontRef idx="minor">
-        <a:schemeClr val="lt1"/>
-      </a:fontRef>
-    </dgm:style>
-  </dgm:styleLbl>
-  <dgm:styleLbl name="parChTrans2D1">
-    <dgm:scene3d>
-      <a:camera prst="orthographicFront"/>
-      <a:lightRig rig="threePt" dir="t"/>
-    </dgm:scene3d>
-    <dgm:sp3d/>
-    <dgm:txPr/>
-    <dgm:style>
-      <a:lnRef idx="2">
-        <a:scrgbClr r="0" g="0" b="0"/>
-      </a:lnRef>
-      <a:fillRef idx="1">
-        <a:scrgbClr r="0" g="0" b="0"/>
-      </a:fillRef>
-      <a:effectRef idx="0">
-        <a:scrgbClr r="0" g="0" b="0"/>
-      </a:effectRef>
-      <a:fontRef idx="minor">
-        <a:schemeClr val="lt1"/>
-      </a:fontRef>
-    </dgm:style>
-  </dgm:styleLbl>
-  <dgm:styleLbl name="parChTrans2D2">
-    <dgm:scene3d>
-      <a:camera prst="orthographicFront"/>
-      <a:lightRig rig="threePt" dir="t"/>
-    </dgm:scene3d>
-    <dgm:sp3d/>
-    <dgm:txPr/>
-    <dgm:style>
-      <a:lnRef idx="2">
-        <a:scrgbClr r="0" g="0" b="0"/>
-      </a:lnRef>
-      <a:fillRef idx="1">
-        <a:scrgbClr r="0" g="0" b="0"/>
-      </a:fillRef>
-      <a:effectRef idx="0">
-        <a:scrgbClr r="0" g="0" b="0"/>
-      </a:effectRef>
-      <a:fontRef idx="minor">
-        <a:schemeClr val="lt1"/>
-      </a:fontRef>
-    </dgm:style>
-  </dgm:styleLbl>
-  <dgm:styleLbl name="parChTrans2D3">
-    <dgm:scene3d>
-      <a:camera prst="orthographicFront"/>
-      <a:lightRig rig="threePt" dir="t"/>
-    </dgm:scene3d>
-    <dgm:sp3d/>
-    <dgm:txPr/>
-    <dgm:style>
-      <a:lnRef idx="2">
-        <a:scrgbClr r="0" g="0" b="0"/>
-      </a:lnRef>
-      <a:fillRef idx="1">
-        <a:scrgbClr r="0" g="0" b="0"/>
-      </a:fillRef>
-      <a:effectRef idx="0">
-        <a:scrgbClr r="0" g="0" b="0"/>
-      </a:effectRef>
-      <a:fontRef idx="minor">
-        <a:schemeClr val="lt1"/>
-      </a:fontRef>
-    </dgm:style>
-  </dgm:styleLbl>
-  <dgm:styleLbl name="parChTrans2D4">
-    <dgm:scene3d>
-      <a:camera prst="orthographicFront"/>
-      <a:lightRig rig="threePt" dir="t"/>
-    </dgm:scene3d>
-    <dgm:sp3d/>
-    <dgm:txPr/>
-    <dgm:style>
-      <a:lnRef idx="2">
-        <a:scrgbClr r="0" g="0" b="0"/>
-      </a:lnRef>
-      <a:fillRef idx="1">
-        <a:scrgbClr r="0" g="0" b="0"/>
-      </a:fillRef>
-      <a:effectRef idx="0">
-        <a:scrgbClr r="0" g="0" b="0"/>
-      </a:effectRef>
-      <a:fontRef idx="minor">
-        <a:schemeClr val="lt1"/>
-      </a:fontRef>
-    </dgm:style>
-  </dgm:styleLbl>
-  <dgm:styleLbl name="parChTrans1D1">
-    <dgm:scene3d>
-      <a:camera prst="orthographicFront"/>
-      <a:lightRig rig="threePt" dir="t"/>
-    </dgm:scene3d>
-    <dgm:sp3d/>
-    <dgm:txPr/>
-    <dgm:style>
-      <a:lnRef idx="2">
-        <a:scrgbClr r="0" g="0" b="0"/>
-      </a:lnRef>
-      <a:fillRef idx="0">
-        <a:scrgbClr r="0" g="0" b="0"/>
-      </a:fillRef>
-      <a:effectRef idx="0">
-        <a:scrgbClr r="0" g="0" b="0"/>
-      </a:effectRef>
-      <a:fontRef idx="minor"/>
-    </dgm:style>
-  </dgm:styleLbl>
-  <dgm:styleLbl name="parChTrans1D2">
-    <dgm:scene3d>
-      <a:camera prst="orthographicFront"/>
-      <a:lightRig rig="threePt" dir="t"/>
-    </dgm:scene3d>
-    <dgm:sp3d/>
-    <dgm:txPr/>
-    <dgm:style>
-      <a:lnRef idx="2">
-        <a:scrgbClr r="0" g="0" b="0"/>
-      </a:lnRef>
-      <a:fillRef idx="0">
-        <a:scrgbClr r="0" g="0" b="0"/>
-      </a:fillRef>
-      <a:effectRef idx="0">
-        <a:scrgbClr r="0" g="0" b="0"/>
-      </a:effectRef>
-      <a:fontRef idx="minor"/>
-    </dgm:style>
-  </dgm:styleLbl>
-  <dgm:styleLbl name="parChTrans1D3">
-    <dgm:scene3d>
-      <a:camera prst="orthographicFront"/>
-      <a:lightRig rig="threePt" dir="t"/>
-    </dgm:scene3d>
-    <dgm:sp3d/>
-    <dgm:txPr/>
-    <dgm:style>
-      <a:lnRef idx="2">
-        <a:scrgbClr r="0" g="0" b="0"/>
-      </a:lnRef>
-      <a:fillRef idx="0">
-        <a:scrgbClr r="0" g="0" b="0"/>
-      </a:fillRef>
-      <a:effectRef idx="0">
-        <a:scrgbClr r="0" g="0" b="0"/>
-      </a:effectRef>
-      <a:fontRef idx="minor"/>
-    </dgm:style>
-  </dgm:styleLbl>
-  <dgm:styleLbl name="parChTrans1D4">
-    <dgm:scene3d>
-      <a:camera prst="orthographicFront"/>
-      <a:lightRig rig="threePt" dir="t"/>
-    </dgm:scene3d>
-    <dgm:sp3d/>
-    <dgm:txPr/>
-    <dgm:style>
-      <a:lnRef idx="2">
-        <a:scrgbClr r="0" g="0" b="0"/>
-      </a:lnRef>
-      <a:fillRef idx="0">
-        <a:scrgbClr r="0" g="0" b="0"/>
-      </a:fillRef>
-      <a:effectRef idx="0">
-        <a:scrgbClr r="0" g="0" b="0"/>
-      </a:effectRef>
-      <a:fontRef idx="minor"/>
-    </dgm:style>
-  </dgm:styleLbl>
-  <dgm:styleLbl name="fgAcc1">
-    <dgm:scene3d>
-      <a:camera prst="orthographicFront"/>
-      <a:lightRig rig="threePt" dir="t"/>
-    </dgm:scene3d>
-    <dgm:sp3d/>
-    <dgm:txPr/>
-    <dgm:style>
-      <a:lnRef idx="2">
-        <a:scrgbClr r="0" g="0" b="0"/>
-      </a:lnRef>
-      <a:fillRef idx="1">
-        <a:scrgbClr r="0" g="0" b="0"/>
-      </a:fillRef>
-      <a:effectRef idx="0">
-        <a:scrgbClr r="0" g="0" b="0"/>
-      </a:effectRef>
-      <a:fontRef idx="minor"/>
-    </dgm:style>
-  </dgm:styleLbl>
-  <dgm:styleLbl name="conFgAcc1">
-    <dgm:scene3d>
-      <a:camera prst="orthographicFront"/>
-      <a:lightRig rig="threePt" dir="t"/>
-    </dgm:scene3d>
-    <dgm:sp3d/>
-    <dgm:txPr/>
-    <dgm:style>
-      <a:lnRef idx="2">
-        <a:scrgbClr r="0" g="0" b="0"/>
-      </a:lnRef>
-      <a:fillRef idx="1">
-        <a:scrgbClr r="0" g="0" b="0"/>
-      </a:fillRef>
-      <a:effectRef idx="0">
-        <a:scrgbClr r="0" g="0" b="0"/>
-      </a:effectRef>
-      <a:fontRef idx="minor"/>
-    </dgm:style>
-  </dgm:styleLbl>
-  <dgm:styleLbl name="alignAcc1">
-    <dgm:scene3d>
-      <a:camera prst="orthographicFront"/>
-      <a:lightRig rig="threePt" dir="t"/>
-    </dgm:scene3d>
-    <dgm:sp3d/>
-    <dgm:txPr/>
-    <dgm:style>
-      <a:lnRef idx="2">
-        <a:scrgbClr r="0" g="0" b="0"/>
-      </a:lnRef>
-      <a:fillRef idx="1">
-        <a:scrgbClr r="0" g="0" b="0"/>
-      </a:fillRef>
-      <a:effectRef idx="0">
-        <a:scrgbClr r="0" g="0" b="0"/>
-      </a:effectRef>
-      <a:fontRef idx="minor"/>
-    </dgm:style>
-  </dgm:styleLbl>
-  <dgm:styleLbl name="trAlignAcc1">
-    <dgm:scene3d>
-      <a:camera prst="orthographicFront"/>
-      <a:lightRig rig="threePt" dir="t"/>
-    </dgm:scene3d>
-    <dgm:sp3d/>
-    <dgm:txPr/>
-    <dgm:style>
-      <a:lnRef idx="1">
-        <a:scrgbClr r="0" g="0" b="0"/>
-      </a:lnRef>
-      <a:fillRef idx="1">
-        <a:scrgbClr r="0" g="0" b="0"/>
-      </a:fillRef>
-      <a:effectRef idx="0">
-        <a:scrgbClr r="0" g="0" b="0"/>
-      </a:effectRef>
-      <a:fontRef idx="minor"/>
-    </dgm:style>
-  </dgm:styleLbl>
-  <dgm:styleLbl name="bgAcc1">
-    <dgm:scene3d>
-      <a:camera prst="orthographicFront"/>
-      <a:lightRig rig="threePt" dir="t"/>
-    </dgm:scene3d>
-    <dgm:sp3d/>
-    <dgm:txPr/>
-    <dgm:style>
-      <a:lnRef idx="2">
-        <a:scrgbClr r="0" g="0" b="0"/>
-      </a:lnRef>
-      <a:fillRef idx="1">
-        <a:scrgbClr r="0" g="0" b="0"/>
-      </a:fillRef>
-      <a:effectRef idx="0">
-        <a:scrgbClr r="0" g="0" b="0"/>
-      </a:effectRef>
-      <a:fontRef idx="minor"/>
-    </dgm:style>
-  </dgm:styleLbl>
-  <dgm:styleLbl name="solidFgAcc1">
-    <dgm:scene3d>
-      <a:camera prst="orthographicFront"/>
-      <a:lightRig rig="threePt" dir="t"/>
-    </dgm:scene3d>
-    <dgm:sp3d/>
-    <dgm:txPr/>
-    <dgm:style>
-      <a:lnRef idx="2">
-        <a:scrgbClr r="0" g="0" b="0"/>
-      </a:lnRef>
-      <a:fillRef idx="1">
-        <a:scrgbClr r="0" g="0" b="0"/>
-      </a:fillRef>
-      <a:effectRef idx="0">
-        <a:scrgbClr r="0" g="0" b="0"/>
-      </a:effectRef>
-      <a:fontRef idx="minor"/>
-    </dgm:style>
-  </dgm:styleLbl>
-  <dgm:styleLbl name="solidAlignAcc1">
-    <dgm:scene3d>
-      <a:camera prst="orthographicFront"/>
-      <a:lightRig rig="threePt" dir="t"/>
-    </dgm:scene3d>
-    <dgm:sp3d/>
-    <dgm:txPr/>
-    <dgm:style>
-      <a:lnRef idx="2">
-        <a:scrgbClr r="0" g="0" b="0"/>
-      </a:lnRef>
-      <a:fillRef idx="1">
-        <a:scrgbClr r="0" g="0" b="0"/>
-      </a:fillRef>
-      <a:effectRef idx="0">
-        <a:scrgbClr r="0" g="0" b="0"/>
-      </a:effectRef>
-      <a:fontRef idx="minor"/>
-    </dgm:style>
-  </dgm:styleLbl>
-  <dgm:styleLbl name="solidBgAcc1">
-    <dgm:scene3d>
-      <a:camera prst="orthographicFront"/>
-      <a:lightRig rig="threePt" dir="t"/>
-    </dgm:scene3d>
-    <dgm:sp3d/>
-    <dgm:txPr/>
-    <dgm:style>
-      <a:lnRef idx="2">
-        <a:scrgbClr r="0" g="0" b="0"/>
-      </a:lnRef>
-      <a:fillRef idx="1">
-        <a:scrgbClr r="0" g="0" b="0"/>
-      </a:fillRef>
-      <a:effectRef idx="0">
-        <a:scrgbClr r="0" g="0" b="0"/>
-      </a:effectRef>
-      <a:fontRef idx="minor"/>
-    </dgm:style>
-  </dgm:styleLbl>
-  <dgm:styleLbl name="fgAccFollowNode1">
-    <dgm:scene3d>
-      <a:camera prst="orthographicFront"/>
-      <a:lightRig rig="threePt" dir="t"/>
-    </dgm:scene3d>
-    <dgm:sp3d/>
-    <dgm:txPr/>
-    <dgm:style>
-      <a:lnRef idx="2">
-        <a:scrgbClr r="0" g="0" b="0"/>
-      </a:lnRef>
-      <a:fillRef idx="1">
-        <a:scrgbClr r="0" g="0" b="0"/>
-      </a:fillRef>
-      <a:effectRef idx="0">
-        <a:scrgbClr r="0" g="0" b="0"/>
-      </a:effectRef>
-      <a:fontRef idx="minor"/>
-    </dgm:style>
-  </dgm:styleLbl>
-  <dgm:styleLbl name="alignAccFollowNode1">
-    <dgm:scene3d>
-      <a:camera prst="orthographicFront"/>
-      <a:lightRig rig="threePt" dir="t"/>
-    </dgm:scene3d>
-    <dgm:sp3d/>
-    <dgm:txPr/>
-    <dgm:style>
-      <a:lnRef idx="2">
-        <a:scrgbClr r="0" g="0" b="0"/>
-      </a:lnRef>
-      <a:fillRef idx="1">
-        <a:scrgbClr r="0" g="0" b="0"/>
-      </a:fillRef>
-      <a:effectRef idx="0">
-        <a:scrgbClr r="0" g="0" b="0"/>
-      </a:effectRef>
-      <a:fontRef idx="minor"/>
-    </dgm:style>
-  </dgm:styleLbl>
-  <dgm:styleLbl name="bgAccFollowNode1">
-    <dgm:scene3d>
-      <a:camera prst="orthographicFront"/>
-      <a:lightRig rig="threePt" dir="t"/>
-    </dgm:scene3d>
-    <dgm:sp3d/>
-    <dgm:txPr/>
-    <dgm:style>
-      <a:lnRef idx="2">
-        <a:scrgbClr r="0" g="0" b="0"/>
-      </a:lnRef>
-      <a:fillRef idx="1">
-        <a:scrgbClr r="0" g="0" b="0"/>
-      </a:fillRef>
-      <a:effectRef idx="0">
-        <a:scrgbClr r="0" g="0" b="0"/>
-      </a:effectRef>
-      <a:fontRef idx="minor"/>
-    </dgm:style>
-  </dgm:styleLbl>
-  <dgm:styleLbl name="fgAcc0">
-    <dgm:scene3d>
-      <a:camera prst="orthographicFront"/>
-      <a:lightRig rig="threePt" dir="t"/>
-    </dgm:scene3d>
-    <dgm:sp3d/>
-    <dgm:txPr/>
-    <dgm:style>
-      <a:lnRef idx="2">
-        <a:scrgbClr r="0" g="0" b="0"/>
-      </a:lnRef>
-      <a:fillRef idx="1">
-        <a:scrgbClr r="0" g="0" b="0"/>
-      </a:fillRef>
-      <a:effectRef idx="0">
-        <a:scrgbClr r="0" g="0" b="0"/>
-      </a:effectRef>
-      <a:fontRef idx="minor"/>
-    </dgm:style>
-  </dgm:styleLbl>
-  <dgm:styleLbl name="fgAcc2">
-    <dgm:scene3d>
-      <a:camera prst="orthographicFront"/>
-      <a:lightRig rig="threePt" dir="t"/>
-    </dgm:scene3d>
-    <dgm:sp3d/>
-    <dgm:txPr/>
-    <dgm:style>
-      <a:lnRef idx="2">
-        <a:scrgbClr r="0" g="0" b="0"/>
-      </a:lnRef>
-      <a:fillRef idx="1">
-        <a:scrgbClr r="0" g="0" b="0"/>
-      </a:fillRef>
-      <a:effectRef idx="0">
-        <a:scrgbClr r="0" g="0" b="0"/>
-      </a:effectRef>
-      <a:fontRef idx="minor"/>
-    </dgm:style>
-  </dgm:styleLbl>
-  <dgm:styleLbl name="fgAcc3">
-    <dgm:scene3d>
-      <a:camera prst="orthographicFront"/>
-      <a:lightRig rig="threePt" dir="t"/>
-    </dgm:scene3d>
-    <dgm:sp3d/>
-    <dgm:txPr/>
-    <dgm:style>
-      <a:lnRef idx="2">
-        <a:scrgbClr r="0" g="0" b="0"/>
-      </a:lnRef>
-      <a:fillRef idx="1">
-        <a:scrgbClr r="0" g="0" b="0"/>
-      </a:fillRef>
-      <a:effectRef idx="0">
-        <a:scrgbClr r="0" g="0" b="0"/>
-      </a:effectRef>
-      <a:fontRef idx="minor"/>
-    </dgm:style>
-  </dgm:styleLbl>
-  <dgm:styleLbl name="fgAcc4">
-    <dgm:scene3d>
-      <a:camera prst="orthographicFront"/>
-      <a:lightRig rig="threePt" dir="t"/>
-    </dgm:scene3d>
-    <dgm:sp3d/>
-    <dgm:txPr/>
-    <dgm:style>
-      <a:lnRef idx="2">
-        <a:scrgbClr r="0" g="0" b="0"/>
-      </a:lnRef>
-      <a:fillRef idx="1">
-        <a:scrgbClr r="0" g="0" b="0"/>
-      </a:fillRef>
-      <a:effectRef idx="0">
-        <a:scrgbClr r="0" g="0" b="0"/>
-      </a:effectRef>
-      <a:fontRef idx="minor"/>
-    </dgm:style>
-  </dgm:styleLbl>
-  <dgm:styleLbl name="bgShp">
-    <dgm:scene3d>
-      <a:camera prst="orthographicFront"/>
-      <a:lightRig rig="threePt" dir="t"/>
-    </dgm:scene3d>
-    <dgm:sp3d/>
-    <dgm:txPr/>
-    <dgm:style>
-      <a:lnRef idx="0">
-        <a:scrgbClr r="0" g="0" b="0"/>
-      </a:lnRef>
-      <a:fillRef idx="1">
-        <a:scrgbClr r="0" g="0" b="0"/>
-      </a:fillRef>
-      <a:effectRef idx="0">
-        <a:scrgbClr r="0" g="0" b="0"/>
-      </a:effectRef>
-      <a:fontRef idx="minor"/>
-    </dgm:style>
-  </dgm:styleLbl>
-  <dgm:styleLbl name="dkBgShp">
-    <dgm:scene3d>
-      <a:camera prst="orthographicFront"/>
-      <a:lightRig rig="threePt" dir="t"/>
-    </dgm:scene3d>
-    <dgm:sp3d/>
-    <dgm:txPr/>
-    <dgm:style>
-      <a:lnRef idx="0">
-        <a:scrgbClr r="0" g="0" b="0"/>
-      </a:lnRef>
-      <a:fillRef idx="1">
-        <a:scrgbClr r="0" g="0" b="0"/>
-      </a:fillRef>
-      <a:effectRef idx="0">
-        <a:scrgbClr r="0" g="0" b="0"/>
-      </a:effectRef>
-      <a:fontRef idx="minor"/>
-    </dgm:style>
-  </dgm:styleLbl>
-  <dgm:styleLbl name="trBgShp">
-    <dgm:scene3d>
-      <a:camera prst="orthographicFront"/>
-      <a:lightRig rig="threePt" dir="t"/>
-    </dgm:scene3d>
-    <dgm:sp3d/>
-    <dgm:txPr/>
-    <dgm:style>
-      <a:lnRef idx="0">
-        <a:scrgbClr r="0" g="0" b="0"/>
-      </a:lnRef>
-      <a:fillRef idx="1">
-        <a:scrgbClr r="0" g="0" b="0"/>
-      </a:fillRef>
-      <a:effectRef idx="0">
-        <a:scrgbClr r="0" g="0" b="0"/>
-      </a:effectRef>
-      <a:fontRef idx="minor"/>
-    </dgm:style>
-  </dgm:styleLbl>
-  <dgm:styleLbl name="fgShp">
-    <dgm:scene3d>
-      <a:camera prst="orthographicFront"/>
-      <a:lightRig rig="threePt" dir="t"/>
-    </dgm:scene3d>
-    <dgm:sp3d/>
-    <dgm:txPr/>
-    <dgm:style>
-      <a:lnRef idx="2">
-        <a:scrgbClr r="0" g="0" b="0"/>
-      </a:lnRef>
-      <a:fillRef idx="1">
-        <a:scrgbClr r="0" g="0" b="0"/>
-      </a:fillRef>
-      <a:effectRef idx="0">
         <a:scrgbClr r="0" g="0" b="0"/>
       </a:effectRef>
       <a:fontRef idx="minor"/>
@@ -6261,7 +2983,7 @@
           <a:p>
             <a:fld id="{B1F2A6E6-BB86-4722-837C-048EA2408876}" type="datetimeFigureOut">
               <a:rPr lang="en-US" smtClean="0"/>
-              <a:t>4/12/2026</a:t>
+              <a:t>4/16/2026</a:t>
             </a:fld>
             <a:endParaRPr lang="en-US"/>
           </a:p>
@@ -6675,7 +3397,7 @@
           <a:p>
             <a:fld id="{C882E6FB-EB88-4936-BED9-9E37159958CA}" type="datetimeFigureOut">
               <a:rPr lang="en-US" smtClean="0"/>
-              <a:t>4/12/2026</a:t>
+              <a:t>4/16/2026</a:t>
             </a:fld>
             <a:endParaRPr lang="en-US"/>
           </a:p>
@@ -6873,7 +3595,7 @@
           <a:p>
             <a:fld id="{C882E6FB-EB88-4936-BED9-9E37159958CA}" type="datetimeFigureOut">
               <a:rPr lang="en-US" smtClean="0"/>
-              <a:t>4/12/2026</a:t>
+              <a:t>4/16/2026</a:t>
             </a:fld>
             <a:endParaRPr lang="en-US"/>
           </a:p>
@@ -7081,7 +3803,7 @@
           <a:p>
             <a:fld id="{C882E6FB-EB88-4936-BED9-9E37159958CA}" type="datetimeFigureOut">
               <a:rPr lang="en-US" smtClean="0"/>
-              <a:t>4/12/2026</a:t>
+              <a:t>4/16/2026</a:t>
             </a:fld>
             <a:endParaRPr lang="en-US"/>
           </a:p>
@@ -7279,7 +4001,7 @@
           <a:p>
             <a:fld id="{C882E6FB-EB88-4936-BED9-9E37159958CA}" type="datetimeFigureOut">
               <a:rPr lang="en-US" smtClean="0"/>
-              <a:t>4/12/2026</a:t>
+              <a:t>4/16/2026</a:t>
             </a:fld>
             <a:endParaRPr lang="en-US"/>
           </a:p>
@@ -7554,7 +4276,7 @@
           <a:p>
             <a:fld id="{C882E6FB-EB88-4936-BED9-9E37159958CA}" type="datetimeFigureOut">
               <a:rPr lang="en-US" smtClean="0"/>
-              <a:t>4/12/2026</a:t>
+              <a:t>4/16/2026</a:t>
             </a:fld>
             <a:endParaRPr lang="en-US"/>
           </a:p>
@@ -7819,7 +4541,7 @@
           <a:p>
             <a:fld id="{C882E6FB-EB88-4936-BED9-9E37159958CA}" type="datetimeFigureOut">
               <a:rPr lang="en-US" smtClean="0"/>
-              <a:t>4/12/2026</a:t>
+              <a:t>4/16/2026</a:t>
             </a:fld>
             <a:endParaRPr lang="en-US"/>
           </a:p>
@@ -8231,7 +4953,7 @@
           <a:p>
             <a:fld id="{C882E6FB-EB88-4936-BED9-9E37159958CA}" type="datetimeFigureOut">
               <a:rPr lang="en-US" smtClean="0"/>
-              <a:t>4/12/2026</a:t>
+              <a:t>4/16/2026</a:t>
             </a:fld>
             <a:endParaRPr lang="en-US"/>
           </a:p>
@@ -8372,7 +5094,7 @@
           <a:p>
             <a:fld id="{C882E6FB-EB88-4936-BED9-9E37159958CA}" type="datetimeFigureOut">
               <a:rPr lang="en-US" smtClean="0"/>
-              <a:t>4/12/2026</a:t>
+              <a:t>4/16/2026</a:t>
             </a:fld>
             <a:endParaRPr lang="en-US"/>
           </a:p>
@@ -8485,7 +5207,7 @@
           <a:p>
             <a:fld id="{C882E6FB-EB88-4936-BED9-9E37159958CA}" type="datetimeFigureOut">
               <a:rPr lang="en-US" smtClean="0"/>
-              <a:t>4/12/2026</a:t>
+              <a:t>4/16/2026</a:t>
             </a:fld>
             <a:endParaRPr lang="en-US"/>
           </a:p>
@@ -8796,7 +5518,7 @@
           <a:p>
             <a:fld id="{C882E6FB-EB88-4936-BED9-9E37159958CA}" type="datetimeFigureOut">
               <a:rPr lang="en-US" smtClean="0"/>
-              <a:t>4/12/2026</a:t>
+              <a:t>4/16/2026</a:t>
             </a:fld>
             <a:endParaRPr lang="en-US"/>
           </a:p>
@@ -9084,7 +5806,7 @@
           <a:p>
             <a:fld id="{C882E6FB-EB88-4936-BED9-9E37159958CA}" type="datetimeFigureOut">
               <a:rPr lang="en-US" smtClean="0"/>
-              <a:t>4/12/2026</a:t>
+              <a:t>4/16/2026</a:t>
             </a:fld>
             <a:endParaRPr lang="en-US"/>
           </a:p>
@@ -9325,7 +6047,7 @@
           <a:p>
             <a:fld id="{C882E6FB-EB88-4936-BED9-9E37159958CA}" type="datetimeFigureOut">
               <a:rPr lang="en-US" smtClean="0"/>
-              <a:t>4/12/2026</a:t>
+              <a:t>4/16/2026</a:t>
             </a:fld>
             <a:endParaRPr lang="en-US"/>
           </a:p>
@@ -11026,7 +7748,7 @@
                   <a:schemeClr val="tx1"/>
                 </a:solidFill>
               </a:rPr>
-              <a:t>Tweaking Components</a:t>
+              <a:t>Final Presentation Slides Progress</a:t>
             </a:r>
           </a:p>
           <a:p>
@@ -11040,7 +7762,7 @@
                   <a:schemeClr val="tx1"/>
                 </a:solidFill>
               </a:rPr>
-              <a:t>Debugging</a:t>
+              <a:t>Picked up printed User Manual </a:t>
             </a:r>
           </a:p>
           <a:p>
@@ -11054,7 +7776,7 @@
                   <a:schemeClr val="tx1"/>
                 </a:solidFill>
               </a:rPr>
-              <a:t>Final Presentation Slides Progress</a:t>
+              <a:t>Practiced presentation</a:t>
             </a:r>
           </a:p>
           <a:p>
@@ -11068,7 +7790,7 @@
                   <a:schemeClr val="tx1"/>
                 </a:solidFill>
               </a:rPr>
-              <a:t>Writing Center appointment</a:t>
+              <a:t>Finished documentation website</a:t>
             </a:r>
           </a:p>
           <a:p>
@@ -11082,7 +7804,7 @@
                   <a:schemeClr val="tx1"/>
                 </a:solidFill>
               </a:rPr>
-              <a:t>Finished User Manual</a:t>
+              <a:t>Prepared app paragraph</a:t>
             </a:r>
           </a:p>
           <a:p>
@@ -11096,7 +7818,7 @@
                   <a:schemeClr val="tx1"/>
                 </a:solidFill>
               </a:rPr>
-              <a:t>Prepare manual for printing </a:t>
+              <a:t>Filled database with test accounts</a:t>
             </a:r>
           </a:p>
           <a:p>
@@ -11438,8 +8160,21 @@
                   <a:schemeClr val="tx1"/>
                 </a:solidFill>
               </a:rPr>
-              <a:t>Writing the user manual with technical and detailed steps for both users and developers to navigate.</a:t>
+              <a:t>PennWest internet blocking App </a:t>
             </a:r>
+            <a:r>
+              <a:rPr lang="en-US" sz="2000" dirty="0" err="1">
+                <a:solidFill>
+                  <a:schemeClr val="tx1"/>
+                </a:solidFill>
+              </a:rPr>
+              <a:t>url</a:t>
+            </a:r>
+            <a:endParaRPr lang="en-US" sz="2000" dirty="0">
+              <a:solidFill>
+                <a:schemeClr val="tx1"/>
+              </a:solidFill>
+            </a:endParaRPr>
           </a:p>
           <a:p>
             <a:pPr marL="342900" indent="-342900">
@@ -11452,7 +8187,21 @@
                   <a:schemeClr val="tx1"/>
                 </a:solidFill>
               </a:rPr>
-              <a:t>Hosting Configuration speed, server reboot time far to  slow</a:t>
+              <a:t>Fix any remaining errors</a:t>
+            </a:r>
+          </a:p>
+          <a:p>
+            <a:pPr marL="342900" indent="-342900">
+              <a:buFont typeface="+mj-lt"/>
+              <a:buAutoNum type="arabicPeriod"/>
+            </a:pPr>
+            <a:r>
+              <a:rPr lang="en-US" sz="2000" dirty="0">
+                <a:solidFill>
+                  <a:schemeClr val="tx1"/>
+                </a:solidFill>
+              </a:rPr>
+              <a:t>Presentation time limit</a:t>
             </a:r>
           </a:p>
         </p:txBody>
@@ -12223,10 +8972,10 @@
       </p:sp>
       <p:sp>
         <p:nvSpPr>
-          <p:cNvPr id="6" name="Text Placeholder 2">
+          <p:cNvPr id="7" name="Text Placeholder 2">
             <a:extLst>
               <a:ext uri="{FF2B5EF4-FFF2-40B4-BE49-F238E27FC236}">
-                <a16:creationId xmlns:a16="http://schemas.microsoft.com/office/drawing/2014/main" id="{3B13CF04-9C06-053E-69E2-58CD31C3D276}"/>
+                <a16:creationId xmlns:a16="http://schemas.microsoft.com/office/drawing/2014/main" id="{23A9500D-5A04-3835-D25E-8A73CF136F8C}"/>
               </a:ext>
             </a:extLst>
           </p:cNvPr>
@@ -12237,7 +8986,7 @@
         </p:nvSpPr>
         <p:spPr>
           <a:xfrm>
-            <a:off x="5790687" y="2361465"/>
+            <a:off x="6096000" y="2267456"/>
             <a:ext cx="5170705" cy="3377638"/>
           </a:xfrm>
           <a:prstGeom prst="rect">
@@ -12441,7 +9190,7 @@
                   <a:schemeClr val="tx1"/>
                 </a:solidFill>
               </a:rPr>
-              <a:t>After taking a step back and attempting to view our project as new users we found areas that needed clear instructions.</a:t>
+              <a:t>Send email to Utech</a:t>
             </a:r>
           </a:p>
           <a:p>
@@ -12455,7 +9204,21 @@
                   <a:schemeClr val="tx1"/>
                 </a:solidFill>
               </a:rPr>
-              <a:t>Increase # of server CPU cores </a:t>
+              <a:t>Group testing and debugging </a:t>
+            </a:r>
+          </a:p>
+          <a:p>
+            <a:pPr marL="342900" indent="-342900">
+              <a:buFont typeface="+mj-lt"/>
+              <a:buAutoNum type="arabicPeriod"/>
+            </a:pPr>
+            <a:r>
+              <a:rPr lang="en-US" sz="2000" dirty="0">
+                <a:solidFill>
+                  <a:schemeClr val="tx1"/>
+                </a:solidFill>
+              </a:rPr>
+              <a:t>Scheduled additional practices</a:t>
             </a:r>
           </a:p>
         </p:txBody>
@@ -12872,358 +9635,6 @@
     </p:bg>
     <p:spTree>
       <p:nvGrpSpPr>
-        <p:cNvPr id="1" name="">
-          <a:extLst>
-            <a:ext uri="{FF2B5EF4-FFF2-40B4-BE49-F238E27FC236}">
-              <a16:creationId xmlns:a16="http://schemas.microsoft.com/office/drawing/2014/main" id="{38138CFD-A501-8AEC-C666-BED845111F6D}"/>
-            </a:ext>
-          </a:extLst>
-        </p:cNvPr>
-        <p:cNvGrpSpPr/>
-        <p:nvPr/>
-      </p:nvGrpSpPr>
-      <p:grpSpPr>
-        <a:xfrm>
-          <a:off x="0" y="0"/>
-          <a:ext cx="0" cy="0"/>
-          <a:chOff x="0" y="0"/>
-          <a:chExt cx="0" cy="0"/>
-        </a:xfrm>
-      </p:grpSpPr>
-      <p:sp useBgFill="1">
-        <p:nvSpPr>
-          <p:cNvPr id="21" name="Rectangle 20">
-            <a:extLst>
-              <a:ext uri="{FF2B5EF4-FFF2-40B4-BE49-F238E27FC236}">
-                <a16:creationId xmlns:a16="http://schemas.microsoft.com/office/drawing/2014/main" id="{356F68EF-088F-20DD-B4B1-6BCF0A8C9BF2}"/>
-              </a:ext>
-              <a:ext uri="{C183D7F6-B498-43B3-948B-1728B52AA6E4}">
-                <adec:decorative xmlns:adec="http://schemas.microsoft.com/office/drawing/2017/decorative" val="1"/>
-              </a:ext>
-            </a:extLst>
-          </p:cNvPr>
-          <p:cNvSpPr>
-            <a:spLocks noGrp="1" noRot="1" noChangeAspect="1" noMove="1" noResize="1" noEditPoints="1" noAdjustHandles="1" noChangeArrowheads="1" noChangeShapeType="1" noTextEdit="1"/>
-          </p:cNvSpPr>
-          <p:nvPr>
-            <p:extLst>
-              <p:ext uri="{386F3935-93C4-4BCD-93E2-E3B085C9AB24}">
-                <p16:designElem xmlns:p16="http://schemas.microsoft.com/office/powerpoint/2015/main" val="1"/>
-              </p:ext>
-            </p:extLst>
-          </p:nvPr>
-        </p:nvSpPr>
-        <p:spPr>
-          <a:xfrm>
-            <a:off x="0" y="0"/>
-            <a:ext cx="12191999" cy="6857365"/>
-          </a:xfrm>
-          <a:prstGeom prst="rect">
-            <a:avLst/>
-          </a:prstGeom>
-          <a:ln>
-            <a:noFill/>
-          </a:ln>
-        </p:spPr>
-        <p:style>
-          <a:lnRef idx="2">
-            <a:schemeClr val="accent1">
-              <a:shade val="50000"/>
-            </a:schemeClr>
-          </a:lnRef>
-          <a:fillRef idx="1">
-            <a:schemeClr val="accent1"/>
-          </a:fillRef>
-          <a:effectRef idx="0">
-            <a:schemeClr val="accent1"/>
-          </a:effectRef>
-          <a:fontRef idx="minor">
-            <a:schemeClr val="lt1"/>
-          </a:fontRef>
-        </p:style>
-        <p:txBody>
-          <a:bodyPr rtlCol="0" anchor="ctr"/>
-          <a:lstStyle/>
-          <a:p>
-            <a:pPr algn="ctr"/>
-            <a:endParaRPr lang="en-US"/>
-          </a:p>
-        </p:txBody>
-      </p:sp>
-      <p:sp>
-        <p:nvSpPr>
-          <p:cNvPr id="22" name="Rectangle 21">
-            <a:extLst>
-              <a:ext uri="{FF2B5EF4-FFF2-40B4-BE49-F238E27FC236}">
-                <a16:creationId xmlns:a16="http://schemas.microsoft.com/office/drawing/2014/main" id="{9EF082FE-D96F-0D2A-34AA-F987D0796D34}"/>
-              </a:ext>
-              <a:ext uri="{C183D7F6-B498-43B3-948B-1728B52AA6E4}">
-                <adec:decorative xmlns:adec="http://schemas.microsoft.com/office/drawing/2017/decorative" val="1"/>
-              </a:ext>
-            </a:extLst>
-          </p:cNvPr>
-          <p:cNvSpPr>
-            <a:spLocks noGrp="1" noRot="1" noChangeAspect="1" noMove="1" noResize="1" noEditPoints="1" noAdjustHandles="1" noChangeArrowheads="1" noChangeShapeType="1" noTextEdit="1"/>
-          </p:cNvSpPr>
-          <p:nvPr>
-            <p:extLst>
-              <p:ext uri="{386F3935-93C4-4BCD-93E2-E3B085C9AB24}">
-                <p16:designElem xmlns:p16="http://schemas.microsoft.com/office/powerpoint/2015/main" val="1"/>
-              </p:ext>
-            </p:extLst>
-          </p:nvPr>
-        </p:nvSpPr>
-        <p:spPr>
-          <a:xfrm>
-            <a:off x="0" y="1"/>
-            <a:ext cx="12192000" cy="5187142"/>
-          </a:xfrm>
-          <a:prstGeom prst="rect">
-            <a:avLst/>
-          </a:prstGeom>
-          <a:solidFill>
-            <a:schemeClr val="accent4"/>
-          </a:solidFill>
-          <a:ln>
-            <a:noFill/>
-          </a:ln>
-        </p:spPr>
-        <p:style>
-          <a:lnRef idx="2">
-            <a:schemeClr val="accent1">
-              <a:shade val="50000"/>
-            </a:schemeClr>
-          </a:lnRef>
-          <a:fillRef idx="1">
-            <a:schemeClr val="accent1"/>
-          </a:fillRef>
-          <a:effectRef idx="0">
-            <a:schemeClr val="accent1"/>
-          </a:effectRef>
-          <a:fontRef idx="minor">
-            <a:schemeClr val="lt1"/>
-          </a:fontRef>
-        </p:style>
-        <p:txBody>
-          <a:bodyPr rtlCol="0" anchor="ctr"/>
-          <a:lstStyle/>
-          <a:p>
-            <a:pPr algn="ctr"/>
-            <a:endParaRPr lang="en-US" dirty="0"/>
-          </a:p>
-        </p:txBody>
-      </p:sp>
-      <p:sp>
-        <p:nvSpPr>
-          <p:cNvPr id="23" name="Rectangle 22">
-            <a:extLst>
-              <a:ext uri="{FF2B5EF4-FFF2-40B4-BE49-F238E27FC236}">
-                <a16:creationId xmlns:a16="http://schemas.microsoft.com/office/drawing/2014/main" id="{0BE13FF0-F6F1-375E-D271-70DAE72E1AC7}"/>
-              </a:ext>
-              <a:ext uri="{C183D7F6-B498-43B3-948B-1728B52AA6E4}">
-                <adec:decorative xmlns:adec="http://schemas.microsoft.com/office/drawing/2017/decorative" val="1"/>
-              </a:ext>
-            </a:extLst>
-          </p:cNvPr>
-          <p:cNvSpPr>
-            <a:spLocks noGrp="1" noRot="1" noChangeAspect="1" noMove="1" noResize="1" noEditPoints="1" noAdjustHandles="1" noChangeArrowheads="1" noChangeShapeType="1" noTextEdit="1"/>
-          </p:cNvSpPr>
-          <p:nvPr>
-            <p:extLst>
-              <p:ext uri="{386F3935-93C4-4BCD-93E2-E3B085C9AB24}">
-                <p16:designElem xmlns:p16="http://schemas.microsoft.com/office/powerpoint/2015/main" val="1"/>
-              </p:ext>
-            </p:extLst>
-          </p:nvPr>
-        </p:nvSpPr>
-        <p:spPr>
-          <a:xfrm>
-            <a:off x="596464" y="551961"/>
-            <a:ext cx="10999072" cy="5399950"/>
-          </a:xfrm>
-          <a:prstGeom prst="rect">
-            <a:avLst/>
-          </a:prstGeom>
-          <a:solidFill>
-            <a:schemeClr val="bg1"/>
-          </a:solidFill>
-          <a:ln>
-            <a:noFill/>
-          </a:ln>
-          <a:effectLst>
-            <a:outerShdw blurRad="139700" dist="127000" dir="5400000" algn="t" rotWithShape="0">
-              <a:prstClr val="black">
-                <a:alpha val="15000"/>
-              </a:prstClr>
-            </a:outerShdw>
-          </a:effectLst>
-        </p:spPr>
-        <p:style>
-          <a:lnRef idx="2">
-            <a:schemeClr val="accent1">
-              <a:shade val="50000"/>
-            </a:schemeClr>
-          </a:lnRef>
-          <a:fillRef idx="1">
-            <a:schemeClr val="accent1"/>
-          </a:fillRef>
-          <a:effectRef idx="0">
-            <a:schemeClr val="accent1"/>
-          </a:effectRef>
-          <a:fontRef idx="minor">
-            <a:schemeClr val="lt1"/>
-          </a:fontRef>
-        </p:style>
-        <p:txBody>
-          <a:bodyPr rtlCol="0" anchor="ctr"/>
-          <a:lstStyle/>
-          <a:p>
-            <a:pPr algn="ctr"/>
-            <a:endParaRPr lang="en-US"/>
-          </a:p>
-        </p:txBody>
-      </p:sp>
-      <p:cxnSp>
-        <p:nvCxnSpPr>
-          <p:cNvPr id="25" name="Straight Connector 24">
-            <a:extLst>
-              <a:ext uri="{FF2B5EF4-FFF2-40B4-BE49-F238E27FC236}">
-                <a16:creationId xmlns:a16="http://schemas.microsoft.com/office/drawing/2014/main" id="{3A7F67B2-22A5-7F2D-13EB-E06229F5CB46}"/>
-              </a:ext>
-              <a:ext uri="{C183D7F6-B498-43B3-948B-1728B52AA6E4}">
-                <adec:decorative xmlns:adec="http://schemas.microsoft.com/office/drawing/2017/decorative" val="1"/>
-              </a:ext>
-            </a:extLst>
-          </p:cNvPr>
-          <p:cNvCxnSpPr>
-            <a:cxnSpLocks noGrp="1" noRot="1" noChangeAspect="1" noMove="1" noResize="1" noEditPoints="1" noAdjustHandles="1" noChangeArrowheads="1" noChangeShapeType="1"/>
-          </p:cNvCxnSpPr>
-          <p:nvPr>
-            <p:extLst>
-              <p:ext uri="{386F3935-93C4-4BCD-93E2-E3B085C9AB24}">
-                <p16:designElem xmlns:p16="http://schemas.microsoft.com/office/powerpoint/2015/main" val="1"/>
-              </p:ext>
-            </p:extLst>
-          </p:nvPr>
-        </p:nvCxnSpPr>
-        <p:spPr>
-          <a:xfrm flipH="1">
-            <a:off x="596464" y="6329769"/>
-            <a:ext cx="11000232" cy="0"/>
-          </a:xfrm>
-          <a:prstGeom prst="line">
-            <a:avLst/>
-          </a:prstGeom>
-          <a:ln w="152400">
-            <a:solidFill>
-              <a:schemeClr val="accent4"/>
-            </a:solidFill>
-          </a:ln>
-        </p:spPr>
-        <p:style>
-          <a:lnRef idx="1">
-            <a:schemeClr val="accent1"/>
-          </a:lnRef>
-          <a:fillRef idx="0">
-            <a:schemeClr val="accent1"/>
-          </a:fillRef>
-          <a:effectRef idx="0">
-            <a:schemeClr val="accent1"/>
-          </a:effectRef>
-          <a:fontRef idx="minor">
-            <a:schemeClr val="tx1"/>
-          </a:fontRef>
-        </p:style>
-      </p:cxnSp>
-      <p:sp>
-        <p:nvSpPr>
-          <p:cNvPr id="9" name="Title 1">
-            <a:extLst>
-              <a:ext uri="{FF2B5EF4-FFF2-40B4-BE49-F238E27FC236}">
-                <a16:creationId xmlns:a16="http://schemas.microsoft.com/office/drawing/2014/main" id="{D6D36DC8-D9BF-8C26-69EA-ED89E34DB644}"/>
-              </a:ext>
-            </a:extLst>
-          </p:cNvPr>
-          <p:cNvSpPr>
-            <a:spLocks noGrp="1"/>
-          </p:cNvSpPr>
-          <p:nvPr>
-            <p:ph type="title"/>
-          </p:nvPr>
-        </p:nvSpPr>
-        <p:spPr>
-          <a:xfrm>
-            <a:off x="4008559" y="768350"/>
-            <a:ext cx="4162181" cy="920920"/>
-          </a:xfrm>
-        </p:spPr>
-        <p:txBody>
-          <a:bodyPr>
-            <a:normAutofit fontScale="90000"/>
-          </a:bodyPr>
-          <a:lstStyle/>
-          <a:p>
-            <a:r>
-              <a:rPr lang="en-US" dirty="0"/>
-              <a:t>Week 14 Plan</a:t>
-            </a:r>
-          </a:p>
-        </p:txBody>
-      </p:sp>
-      <p:graphicFrame>
-        <p:nvGraphicFramePr>
-          <p:cNvPr id="27" name="Text Placeholder 2">
-            <a:extLst>
-              <a:ext uri="{FF2B5EF4-FFF2-40B4-BE49-F238E27FC236}">
-                <a16:creationId xmlns:a16="http://schemas.microsoft.com/office/drawing/2014/main" id="{D6B93F0B-FEB0-EDAB-CFE1-A57DEFE97FCD}"/>
-              </a:ext>
-            </a:extLst>
-          </p:cNvPr>
-          <p:cNvGraphicFramePr/>
-          <p:nvPr>
-            <p:extLst>
-              <p:ext uri="{D42A27DB-BD31-4B8C-83A1-F6EECF244321}">
-                <p14:modId xmlns:p14="http://schemas.microsoft.com/office/powerpoint/2010/main" val="3567164370"/>
-              </p:ext>
-            </p:extLst>
-          </p:nvPr>
-        </p:nvGraphicFramePr>
-        <p:xfrm>
-          <a:off x="838199" y="2688113"/>
-          <a:ext cx="10515600" cy="3050990"/>
-        </p:xfrm>
-        <a:graphic>
-          <a:graphicData uri="http://schemas.openxmlformats.org/drawingml/2006/diagram">
-            <dgm:relIds xmlns:dgm="http://schemas.openxmlformats.org/drawingml/2006/diagram" xmlns:r="http://schemas.openxmlformats.org/officeDocument/2006/relationships" r:dm="rId2" r:lo="rId3" r:qs="rId4" r:cs="rId5"/>
-          </a:graphicData>
-        </a:graphic>
-      </p:graphicFrame>
-    </p:spTree>
-    <p:extLst>
-      <p:ext uri="{BB962C8B-B14F-4D97-AF65-F5344CB8AC3E}">
-        <p14:creationId xmlns:p14="http://schemas.microsoft.com/office/powerpoint/2010/main" val="2561402868"/>
-      </p:ext>
-    </p:extLst>
-  </p:cSld>
-  <p:clrMapOvr>
-    <a:masterClrMapping/>
-  </p:clrMapOvr>
-</p:sld>
-</file>
-
-<file path=ppt/slides/slide7.xml><?xml version="1.0" encoding="utf-8"?>
-<p:sld xmlns:a="http://schemas.openxmlformats.org/drawingml/2006/main" xmlns:r="http://schemas.openxmlformats.org/officeDocument/2006/relationships" xmlns:p="http://schemas.openxmlformats.org/presentationml/2006/main">
-  <p:cSld>
-    <p:bg>
-      <p:bgPr>
-        <a:solidFill>
-          <a:schemeClr val="bg1"/>
-        </a:solidFill>
-        <a:effectLst/>
-      </p:bgPr>
-    </p:bg>
-    <p:spTree>
-      <p:nvGrpSpPr>
         <p:cNvPr id="1" name=""/>
         <p:cNvGrpSpPr/>
         <p:nvPr/>
@@ -13599,7 +10010,7 @@
 </p:sld>
 </file>
 
-<file path=ppt/slides/slide8.xml><?xml version="1.0" encoding="utf-8"?>
+<file path=ppt/slides/slide7.xml><?xml version="1.0" encoding="utf-8"?>
 <p:sld xmlns:a="http://schemas.openxmlformats.org/drawingml/2006/main" xmlns:r="http://schemas.openxmlformats.org/officeDocument/2006/relationships" xmlns:p="http://schemas.openxmlformats.org/presentationml/2006/main">
   <p:cSld>
     <p:bg>

--- a/Documentation/Weekly Report/week14/CMSC-4920-Week14Report-Group2.pptx
+++ b/Documentation/Weekly Report/week14/CMSC-4920-Week14Report-Group2.pptx
@@ -5,16 +5,17 @@
     <p:sldMasterId id="2147483648" r:id="rId1"/>
   </p:sldMasterIdLst>
   <p:notesMasterIdLst>
-    <p:notesMasterId r:id="rId9"/>
+    <p:notesMasterId r:id="rId10"/>
   </p:notesMasterIdLst>
   <p:sldIdLst>
     <p:sldId id="256" r:id="rId2"/>
     <p:sldId id="257" r:id="rId3"/>
     <p:sldId id="265" r:id="rId4"/>
     <p:sldId id="266" r:id="rId5"/>
-    <p:sldId id="258" r:id="rId6"/>
-    <p:sldId id="259" r:id="rId7"/>
-    <p:sldId id="260" r:id="rId8"/>
+    <p:sldId id="267" r:id="rId6"/>
+    <p:sldId id="258" r:id="rId7"/>
+    <p:sldId id="259" r:id="rId8"/>
+    <p:sldId id="260" r:id="rId9"/>
   </p:sldIdLst>
   <p:sldSz cx="12192000" cy="6858000"/>
   <p:notesSz cx="6858000" cy="9144000"/>
@@ -124,7 +125,7 @@
 <file path=ppt/revisionInfo.xml><?xml version="1.0" encoding="utf-8"?>
 <p1510:revInfo xmlns:a="http://schemas.openxmlformats.org/drawingml/2006/main" xmlns:r="http://schemas.openxmlformats.org/officeDocument/2006/relationships" xmlns:p1510="http://schemas.microsoft.com/office/powerpoint/2015/10/main">
   <p1510:revLst>
-    <p1510:client id="{CCB6696A-4F6B-4729-BD3B-FECB1658CA32}" v="2" dt="2026-04-16T20:33:55.802"/>
+    <p1510:client id="{CCB6696A-4F6B-4729-BD3B-FECB1658CA32}" v="16" dt="2026-04-19T16:46:20.451"/>
   </p1510:revLst>
 </p1510:revInfo>
 </file>
@@ -181,31 +182,71 @@
   <pc:docChgLst>
     <pc:chgData name="Margo Bonal" userId="18c9fa0f-b53d-478b-9dc0-6ad88786c19f" providerId="ADAL" clId="{93D479E5-F67F-4B8A-A78F-A0B574A116B6}"/>
     <pc:docChg chg="undo redo custSel addSld delSld modSld">
-      <pc:chgData name="Margo Bonal" userId="18c9fa0f-b53d-478b-9dc0-6ad88786c19f" providerId="ADAL" clId="{93D479E5-F67F-4B8A-A78F-A0B574A116B6}" dt="2026-04-16T20:37:33.721" v="1798" actId="20577"/>
+      <pc:chgData name="Margo Bonal" userId="18c9fa0f-b53d-478b-9dc0-6ad88786c19f" providerId="ADAL" clId="{93D479E5-F67F-4B8A-A78F-A0B574A116B6}" dt="2026-04-19T16:46:20.913" v="1836" actId="20577"/>
       <pc:docMkLst>
         <pc:docMk/>
       </pc:docMkLst>
-      <pc:sldChg chg="addSp delSp modSp mod">
-        <pc:chgData name="Margo Bonal" userId="18c9fa0f-b53d-478b-9dc0-6ad88786c19f" providerId="ADAL" clId="{93D479E5-F67F-4B8A-A78F-A0B574A116B6}" dt="2026-04-12T10:51:28.860" v="1342" actId="14100"/>
+      <pc:sldChg chg="addSp delSp modSp add del mod">
+        <pc:chgData name="Margo Bonal" userId="18c9fa0f-b53d-478b-9dc0-6ad88786c19f" providerId="ADAL" clId="{93D479E5-F67F-4B8A-A78F-A0B574A116B6}" dt="2026-04-19T16:45:13.626" v="1822" actId="14100"/>
         <pc:sldMkLst>
           <pc:docMk/>
           <pc:sldMk cId="3713997872" sldId="259"/>
         </pc:sldMkLst>
-        <pc:picChg chg="add mod">
-          <ac:chgData name="Margo Bonal" userId="18c9fa0f-b53d-478b-9dc0-6ad88786c19f" providerId="ADAL" clId="{93D479E5-F67F-4B8A-A78F-A0B574A116B6}" dt="2026-04-12T10:51:28.860" v="1342" actId="14100"/>
+        <pc:picChg chg="add del mod">
+          <ac:chgData name="Margo Bonal" userId="18c9fa0f-b53d-478b-9dc0-6ad88786c19f" providerId="ADAL" clId="{93D479E5-F67F-4B8A-A78F-A0B574A116B6}" dt="2026-04-19T16:44:51.534" v="1816" actId="478"/>
           <ac:picMkLst>
             <pc:docMk/>
             <pc:sldMk cId="3713997872" sldId="259"/>
             <ac:picMk id="5" creationId="{B0894097-9C9B-8B23-3BC5-11C154EBBAD5}"/>
           </ac:picMkLst>
         </pc:picChg>
+        <pc:picChg chg="add mod">
+          <ac:chgData name="Margo Bonal" userId="18c9fa0f-b53d-478b-9dc0-6ad88786c19f" providerId="ADAL" clId="{93D479E5-F67F-4B8A-A78F-A0B574A116B6}" dt="2026-04-19T16:45:13.626" v="1822" actId="14100"/>
+          <ac:picMkLst>
+            <pc:docMk/>
+            <pc:sldMk cId="3713997872" sldId="259"/>
+            <ac:picMk id="6" creationId="{39CFE319-1228-241C-E27B-2F090068170E}"/>
+          </ac:picMkLst>
+        </pc:picChg>
       </pc:sldChg>
-      <pc:sldChg chg="modSp del mod">
-        <pc:chgData name="Margo Bonal" userId="18c9fa0f-b53d-478b-9dc0-6ad88786c19f" providerId="ADAL" clId="{93D479E5-F67F-4B8A-A78F-A0B574A116B6}" dt="2026-04-16T20:30:48.780" v="1491" actId="2696"/>
+      <pc:sldChg chg="addSp delSp modSp mod">
+        <pc:chgData name="Margo Bonal" userId="18c9fa0f-b53d-478b-9dc0-6ad88786c19f" providerId="ADAL" clId="{93D479E5-F67F-4B8A-A78F-A0B574A116B6}" dt="2026-04-19T16:46:20.913" v="1836" actId="20577"/>
         <pc:sldMkLst>
           <pc:docMk/>
-          <pc:sldMk cId="2561402868" sldId="264"/>
+          <pc:sldMk cId="3921983173" sldId="260"/>
         </pc:sldMkLst>
+        <pc:spChg chg="del">
+          <ac:chgData name="Margo Bonal" userId="18c9fa0f-b53d-478b-9dc0-6ad88786c19f" providerId="ADAL" clId="{93D479E5-F67F-4B8A-A78F-A0B574A116B6}" dt="2026-04-19T16:45:57.441" v="1829" actId="478"/>
+          <ac:spMkLst>
+            <pc:docMk/>
+            <pc:sldMk cId="3921983173" sldId="260"/>
+            <ac:spMk id="2" creationId="{9C9AD6B9-1CEE-7976-0BB7-22F5E9535735}"/>
+          </ac:spMkLst>
+        </pc:spChg>
+        <pc:spChg chg="add mod">
+          <ac:chgData name="Margo Bonal" userId="18c9fa0f-b53d-478b-9dc0-6ad88786c19f" providerId="ADAL" clId="{93D479E5-F67F-4B8A-A78F-A0B574A116B6}" dt="2026-04-19T16:45:38.715" v="1828"/>
+          <ac:spMkLst>
+            <pc:docMk/>
+            <pc:sldMk cId="3921983173" sldId="260"/>
+            <ac:spMk id="3" creationId="{267F5CC8-9B6E-F99B-0D5E-470962CD289B}"/>
+          </ac:spMkLst>
+        </pc:spChg>
+        <pc:spChg chg="add del mod">
+          <ac:chgData name="Margo Bonal" userId="18c9fa0f-b53d-478b-9dc0-6ad88786c19f" providerId="ADAL" clId="{93D479E5-F67F-4B8A-A78F-A0B574A116B6}" dt="2026-04-19T16:45:59.757" v="1830"/>
+          <ac:spMkLst>
+            <pc:docMk/>
+            <pc:sldMk cId="3921983173" sldId="260"/>
+            <ac:spMk id="5" creationId="{2923A220-7682-DF2A-2735-6ADA53EF7455}"/>
+          </ac:spMkLst>
+        </pc:spChg>
+        <pc:spChg chg="add mod">
+          <ac:chgData name="Margo Bonal" userId="18c9fa0f-b53d-478b-9dc0-6ad88786c19f" providerId="ADAL" clId="{93D479E5-F67F-4B8A-A78F-A0B574A116B6}" dt="2026-04-19T16:46:20.913" v="1836" actId="20577"/>
+          <ac:spMkLst>
+            <pc:docMk/>
+            <pc:sldMk cId="3921983173" sldId="260"/>
+            <ac:spMk id="6" creationId="{41FAB8FA-2602-2A18-903D-B03E3D5EF300}"/>
+          </ac:spMkLst>
+        </pc:spChg>
       </pc:sldChg>
       <pc:sldChg chg="delSp modSp mod">
         <pc:chgData name="Margo Bonal" userId="18c9fa0f-b53d-478b-9dc0-6ad88786c19f" providerId="ADAL" clId="{93D479E5-F67F-4B8A-A78F-A0B574A116B6}" dt="2026-04-16T20:37:33.721" v="1798" actId="20577"/>
@@ -223,7 +264,7 @@
         </pc:spChg>
       </pc:sldChg>
       <pc:sldChg chg="addSp delSp modSp mod">
-        <pc:chgData name="Margo Bonal" userId="18c9fa0f-b53d-478b-9dc0-6ad88786c19f" providerId="ADAL" clId="{93D479E5-F67F-4B8A-A78F-A0B574A116B6}" dt="2026-04-16T20:34:54.221" v="1762" actId="20577"/>
+        <pc:chgData name="Margo Bonal" userId="18c9fa0f-b53d-478b-9dc0-6ad88786c19f" providerId="ADAL" clId="{93D479E5-F67F-4B8A-A78F-A0B574A116B6}" dt="2026-04-19T16:43:41.897" v="1801"/>
         <pc:sldMkLst>
           <pc:docMk/>
           <pc:sldMk cId="3526335932" sldId="266"/>
@@ -244,12 +285,12 @@
             <ac:spMk id="4" creationId="{86ED9EE4-56A8-6AFD-BE9A-A35D2ABC59A0}"/>
           </ac:spMkLst>
         </pc:spChg>
-        <pc:spChg chg="del mod">
-          <ac:chgData name="Margo Bonal" userId="18c9fa0f-b53d-478b-9dc0-6ad88786c19f" providerId="ADAL" clId="{93D479E5-F67F-4B8A-A78F-A0B574A116B6}" dt="2026-04-16T20:33:52.540" v="1645" actId="478"/>
+        <pc:spChg chg="add">
+          <ac:chgData name="Margo Bonal" userId="18c9fa0f-b53d-478b-9dc0-6ad88786c19f" providerId="ADAL" clId="{93D479E5-F67F-4B8A-A78F-A0B574A116B6}" dt="2026-04-19T16:43:34.331" v="1799"/>
           <ac:spMkLst>
             <pc:docMk/>
             <pc:sldMk cId="3526335932" sldId="266"/>
-            <ac:spMk id="6" creationId="{3B13CF04-9C06-053E-69E2-58CD31C3D276}"/>
+            <ac:spMk id="6" creationId="{AD648F99-27D0-941D-3C1B-ED58B6E33280}"/>
           </ac:spMkLst>
         </pc:spChg>
         <pc:spChg chg="add mod">
@@ -260,6 +301,93 @@
             <ac:spMk id="7" creationId="{23A9500D-5A04-3835-D25E-8A73CF136F8C}"/>
           </ac:spMkLst>
         </pc:spChg>
+        <pc:spChg chg="add">
+          <ac:chgData name="Margo Bonal" userId="18c9fa0f-b53d-478b-9dc0-6ad88786c19f" providerId="ADAL" clId="{93D479E5-F67F-4B8A-A78F-A0B574A116B6}" dt="2026-04-19T16:43:38.573" v="1800"/>
+          <ac:spMkLst>
+            <pc:docMk/>
+            <pc:sldMk cId="3526335932" sldId="266"/>
+            <ac:spMk id="9" creationId="{3F1528D0-FC78-D30B-7AFC-D7D686E9417D}"/>
+          </ac:spMkLst>
+        </pc:spChg>
+        <pc:picChg chg="add">
+          <ac:chgData name="Margo Bonal" userId="18c9fa0f-b53d-478b-9dc0-6ad88786c19f" providerId="ADAL" clId="{93D479E5-F67F-4B8A-A78F-A0B574A116B6}" dt="2026-04-19T16:43:41.897" v="1801"/>
+          <ac:picMkLst>
+            <pc:docMk/>
+            <pc:sldMk cId="3526335932" sldId="266"/>
+            <ac:picMk id="10" creationId="{F8127E8A-66B9-70E3-BA82-C443670F37B8}"/>
+          </ac:picMkLst>
+        </pc:picChg>
+      </pc:sldChg>
+      <pc:sldChg chg="addSp delSp modSp new mod setBg">
+        <pc:chgData name="Margo Bonal" userId="18c9fa0f-b53d-478b-9dc0-6ad88786c19f" providerId="ADAL" clId="{93D479E5-F67F-4B8A-A78F-A0B574A116B6}" dt="2026-04-19T16:44:14.865" v="1813" actId="14100"/>
+        <pc:sldMkLst>
+          <pc:docMk/>
+          <pc:sldMk cId="3689565289" sldId="267"/>
+        </pc:sldMkLst>
+        <pc:spChg chg="del">
+          <ac:chgData name="Margo Bonal" userId="18c9fa0f-b53d-478b-9dc0-6ad88786c19f" providerId="ADAL" clId="{93D479E5-F67F-4B8A-A78F-A0B574A116B6}" dt="2026-04-19T16:43:48.562" v="1803" actId="478"/>
+          <ac:spMkLst>
+            <pc:docMk/>
+            <pc:sldMk cId="3689565289" sldId="267"/>
+            <ac:spMk id="2" creationId="{E23360D1-A062-B2FC-EEAA-E5E535804AF1}"/>
+          </ac:spMkLst>
+        </pc:spChg>
+        <pc:spChg chg="del">
+          <ac:chgData name="Margo Bonal" userId="18c9fa0f-b53d-478b-9dc0-6ad88786c19f" providerId="ADAL" clId="{93D479E5-F67F-4B8A-A78F-A0B574A116B6}" dt="2026-04-19T16:43:51.542" v="1804" actId="478"/>
+          <ac:spMkLst>
+            <pc:docMk/>
+            <pc:sldMk cId="3689565289" sldId="267"/>
+            <ac:spMk id="3" creationId="{510F054A-47CA-4B84-B793-4D6D16E7A686}"/>
+          </ac:spMkLst>
+        </pc:spChg>
+        <pc:spChg chg="add">
+          <ac:chgData name="Margo Bonal" userId="18c9fa0f-b53d-478b-9dc0-6ad88786c19f" providerId="ADAL" clId="{93D479E5-F67F-4B8A-A78F-A0B574A116B6}" dt="2026-04-19T16:43:52.185" v="1805"/>
+          <ac:spMkLst>
+            <pc:docMk/>
+            <pc:sldMk cId="3689565289" sldId="267"/>
+            <ac:spMk id="4" creationId="{3DEE947E-A037-4125-F15A-949CF0CCE2B6}"/>
+          </ac:spMkLst>
+        </pc:spChg>
+        <pc:spChg chg="add del">
+          <ac:chgData name="Margo Bonal" userId="18c9fa0f-b53d-478b-9dc0-6ad88786c19f" providerId="ADAL" clId="{93D479E5-F67F-4B8A-A78F-A0B574A116B6}" dt="2026-04-19T16:44:01.876" v="1808" actId="26606"/>
+          <ac:spMkLst>
+            <pc:docMk/>
+            <pc:sldMk cId="3689565289" sldId="267"/>
+            <ac:spMk id="10" creationId="{3A930249-8242-4E2B-AF17-C01826488321}"/>
+          </ac:spMkLst>
+        </pc:spChg>
+        <pc:spChg chg="add del">
+          <ac:chgData name="Margo Bonal" userId="18c9fa0f-b53d-478b-9dc0-6ad88786c19f" providerId="ADAL" clId="{93D479E5-F67F-4B8A-A78F-A0B574A116B6}" dt="2026-04-19T16:44:01.876" v="1808" actId="26606"/>
+          <ac:spMkLst>
+            <pc:docMk/>
+            <pc:sldMk cId="3689565289" sldId="267"/>
+            <ac:spMk id="12" creationId="{A5BDD999-C5E1-4B3E-A710-768673819165}"/>
+          </ac:spMkLst>
+        </pc:spChg>
+        <pc:spChg chg="add del">
+          <ac:chgData name="Margo Bonal" userId="18c9fa0f-b53d-478b-9dc0-6ad88786c19f" providerId="ADAL" clId="{93D479E5-F67F-4B8A-A78F-A0B574A116B6}" dt="2026-04-19T16:44:10.449" v="1812" actId="26606"/>
+          <ac:spMkLst>
+            <pc:docMk/>
+            <pc:sldMk cId="3689565289" sldId="267"/>
+            <ac:spMk id="14" creationId="{7B1AB9FE-36F5-4FD1-9850-DB5C5AD4828F}"/>
+          </ac:spMkLst>
+        </pc:spChg>
+        <pc:spChg chg="add del">
+          <ac:chgData name="Margo Bonal" userId="18c9fa0f-b53d-478b-9dc0-6ad88786c19f" providerId="ADAL" clId="{93D479E5-F67F-4B8A-A78F-A0B574A116B6}" dt="2026-04-19T16:44:10.449" v="1812" actId="26606"/>
+          <ac:spMkLst>
+            <pc:docMk/>
+            <pc:sldMk cId="3689565289" sldId="267"/>
+            <ac:spMk id="15" creationId="{F489C2E0-4895-4B72-85EA-7EE9FAFFDC7E}"/>
+          </ac:spMkLst>
+        </pc:spChg>
+        <pc:picChg chg="add mod">
+          <ac:chgData name="Margo Bonal" userId="18c9fa0f-b53d-478b-9dc0-6ad88786c19f" providerId="ADAL" clId="{93D479E5-F67F-4B8A-A78F-A0B574A116B6}" dt="2026-04-19T16:44:14.865" v="1813" actId="14100"/>
+          <ac:picMkLst>
+            <pc:docMk/>
+            <pc:sldMk cId="3689565289" sldId="267"/>
+            <ac:picMk id="5" creationId="{655C8360-2059-FEEA-AE80-0C2B88E1A066}"/>
+          </ac:picMkLst>
+        </pc:picChg>
       </pc:sldChg>
     </pc:docChg>
   </pc:docChgLst>
@@ -2983,7 +3111,7 @@
           <a:p>
             <a:fld id="{B1F2A6E6-BB86-4722-837C-048EA2408876}" type="datetimeFigureOut">
               <a:rPr lang="en-US" smtClean="0"/>
-              <a:t>4/16/2026</a:t>
+              <a:t>4/19/2026</a:t>
             </a:fld>
             <a:endParaRPr lang="en-US"/>
           </a:p>
@@ -3397,7 +3525,7 @@
           <a:p>
             <a:fld id="{C882E6FB-EB88-4936-BED9-9E37159958CA}" type="datetimeFigureOut">
               <a:rPr lang="en-US" smtClean="0"/>
-              <a:t>4/16/2026</a:t>
+              <a:t>4/19/2026</a:t>
             </a:fld>
             <a:endParaRPr lang="en-US"/>
           </a:p>
@@ -3595,7 +3723,7 @@
           <a:p>
             <a:fld id="{C882E6FB-EB88-4936-BED9-9E37159958CA}" type="datetimeFigureOut">
               <a:rPr lang="en-US" smtClean="0"/>
-              <a:t>4/16/2026</a:t>
+              <a:t>4/19/2026</a:t>
             </a:fld>
             <a:endParaRPr lang="en-US"/>
           </a:p>
@@ -3803,7 +3931,7 @@
           <a:p>
             <a:fld id="{C882E6FB-EB88-4936-BED9-9E37159958CA}" type="datetimeFigureOut">
               <a:rPr lang="en-US" smtClean="0"/>
-              <a:t>4/16/2026</a:t>
+              <a:t>4/19/2026</a:t>
             </a:fld>
             <a:endParaRPr lang="en-US"/>
           </a:p>
@@ -4001,7 +4129,7 @@
           <a:p>
             <a:fld id="{C882E6FB-EB88-4936-BED9-9E37159958CA}" type="datetimeFigureOut">
               <a:rPr lang="en-US" smtClean="0"/>
-              <a:t>4/16/2026</a:t>
+              <a:t>4/19/2026</a:t>
             </a:fld>
             <a:endParaRPr lang="en-US"/>
           </a:p>
@@ -4276,7 +4404,7 @@
           <a:p>
             <a:fld id="{C882E6FB-EB88-4936-BED9-9E37159958CA}" type="datetimeFigureOut">
               <a:rPr lang="en-US" smtClean="0"/>
-              <a:t>4/16/2026</a:t>
+              <a:t>4/19/2026</a:t>
             </a:fld>
             <a:endParaRPr lang="en-US"/>
           </a:p>
@@ -4541,7 +4669,7 @@
           <a:p>
             <a:fld id="{C882E6FB-EB88-4936-BED9-9E37159958CA}" type="datetimeFigureOut">
               <a:rPr lang="en-US" smtClean="0"/>
-              <a:t>4/16/2026</a:t>
+              <a:t>4/19/2026</a:t>
             </a:fld>
             <a:endParaRPr lang="en-US"/>
           </a:p>
@@ -4953,7 +5081,7 @@
           <a:p>
             <a:fld id="{C882E6FB-EB88-4936-BED9-9E37159958CA}" type="datetimeFigureOut">
               <a:rPr lang="en-US" smtClean="0"/>
-              <a:t>4/16/2026</a:t>
+              <a:t>4/19/2026</a:t>
             </a:fld>
             <a:endParaRPr lang="en-US"/>
           </a:p>
@@ -5094,7 +5222,7 @@
           <a:p>
             <a:fld id="{C882E6FB-EB88-4936-BED9-9E37159958CA}" type="datetimeFigureOut">
               <a:rPr lang="en-US" smtClean="0"/>
-              <a:t>4/16/2026</a:t>
+              <a:t>4/19/2026</a:t>
             </a:fld>
             <a:endParaRPr lang="en-US"/>
           </a:p>
@@ -5207,7 +5335,7 @@
           <a:p>
             <a:fld id="{C882E6FB-EB88-4936-BED9-9E37159958CA}" type="datetimeFigureOut">
               <a:rPr lang="en-US" smtClean="0"/>
-              <a:t>4/16/2026</a:t>
+              <a:t>4/19/2026</a:t>
             </a:fld>
             <a:endParaRPr lang="en-US"/>
           </a:p>
@@ -5518,7 +5646,7 @@
           <a:p>
             <a:fld id="{C882E6FB-EB88-4936-BED9-9E37159958CA}" type="datetimeFigureOut">
               <a:rPr lang="en-US" smtClean="0"/>
-              <a:t>4/16/2026</a:t>
+              <a:t>4/19/2026</a:t>
             </a:fld>
             <a:endParaRPr lang="en-US"/>
           </a:p>
@@ -5806,7 +5934,7 @@
           <a:p>
             <a:fld id="{C882E6FB-EB88-4936-BED9-9E37159958CA}" type="datetimeFigureOut">
               <a:rPr lang="en-US" smtClean="0"/>
-              <a:t>4/16/2026</a:t>
+              <a:t>4/19/2026</a:t>
             </a:fld>
             <a:endParaRPr lang="en-US"/>
           </a:p>
@@ -6047,7 +6175,7 @@
           <a:p>
             <a:fld id="{C882E6FB-EB88-4936-BED9-9E37159958CA}" type="datetimeFigureOut">
               <a:rPr lang="en-US" smtClean="0"/>
-              <a:t>4/16/2026</a:t>
+              <a:t>4/19/2026</a:t>
             </a:fld>
             <a:endParaRPr lang="en-US"/>
           </a:p>
@@ -9239,6 +9367,66 @@
 <file path=ppt/slides/slide5.xml><?xml version="1.0" encoding="utf-8"?>
 <p:sld xmlns:a="http://schemas.openxmlformats.org/drawingml/2006/main" xmlns:r="http://schemas.openxmlformats.org/officeDocument/2006/relationships" xmlns:p="http://schemas.openxmlformats.org/presentationml/2006/main">
   <p:cSld>
+    <p:spTree>
+      <p:nvGrpSpPr>
+        <p:cNvPr id="1" name=""/>
+        <p:cNvGrpSpPr/>
+        <p:nvPr/>
+      </p:nvGrpSpPr>
+      <p:grpSpPr>
+        <a:xfrm>
+          <a:off x="0" y="0"/>
+          <a:ext cx="0" cy="0"/>
+          <a:chOff x="0" y="0"/>
+          <a:chExt cx="0" cy="0"/>
+        </a:xfrm>
+      </p:grpSpPr>
+      <p:pic>
+        <p:nvPicPr>
+          <p:cNvPr id="5" name="Picture 4">
+            <a:extLst>
+              <a:ext uri="{FF2B5EF4-FFF2-40B4-BE49-F238E27FC236}">
+                <a16:creationId xmlns:a16="http://schemas.microsoft.com/office/drawing/2014/main" id="{655C8360-2059-FEEA-AE80-0C2B88E1A066}"/>
+              </a:ext>
+            </a:extLst>
+          </p:cNvPr>
+          <p:cNvPicPr>
+            <a:picLocks noChangeAspect="1"/>
+          </p:cNvPicPr>
+          <p:nvPr/>
+        </p:nvPicPr>
+        <p:blipFill>
+          <a:blip r:embed="rId2"/>
+          <a:stretch>
+            <a:fillRect/>
+          </a:stretch>
+        </p:blipFill>
+        <p:spPr>
+          <a:xfrm>
+            <a:off x="0" y="-42389"/>
+            <a:ext cx="12192000" cy="6664532"/>
+          </a:xfrm>
+          <a:prstGeom prst="rect">
+            <a:avLst/>
+          </a:prstGeom>
+        </p:spPr>
+      </p:pic>
+    </p:spTree>
+    <p:extLst>
+      <p:ext uri="{BB962C8B-B14F-4D97-AF65-F5344CB8AC3E}">
+        <p14:creationId xmlns:p14="http://schemas.microsoft.com/office/powerpoint/2010/main" val="3689565289"/>
+      </p:ext>
+    </p:extLst>
+  </p:cSld>
+  <p:clrMapOvr>
+    <a:masterClrMapping/>
+  </p:clrMapOvr>
+</p:sld>
+</file>
+
+<file path=ppt/slides/slide6.xml><?xml version="1.0" encoding="utf-8"?>
+<p:sld xmlns:a="http://schemas.openxmlformats.org/drawingml/2006/main" xmlns:r="http://schemas.openxmlformats.org/officeDocument/2006/relationships" xmlns:p="http://schemas.openxmlformats.org/presentationml/2006/main">
+  <p:cSld>
     <p:bg>
       <p:bgPr>
         <a:solidFill>
@@ -9622,7 +9810,7 @@
 </p:sld>
 </file>
 
-<file path=ppt/slides/slide6.xml><?xml version="1.0" encoding="utf-8"?>
+<file path=ppt/slides/slide7.xml><?xml version="1.0" encoding="utf-8"?>
 <p:sld xmlns:a="http://schemas.openxmlformats.org/drawingml/2006/main" xmlns:r="http://schemas.openxmlformats.org/officeDocument/2006/relationships" xmlns:p="http://schemas.openxmlformats.org/presentationml/2006/main">
   <p:cSld>
     <p:bg>
@@ -9964,10 +10152,10 @@
       </p:sp>
       <p:pic>
         <p:nvPicPr>
-          <p:cNvPr id="5" name="Picture 4">
+          <p:cNvPr id="6" name="Picture 5">
             <a:extLst>
               <a:ext uri="{FF2B5EF4-FFF2-40B4-BE49-F238E27FC236}">
-                <a16:creationId xmlns:a16="http://schemas.microsoft.com/office/drawing/2014/main" id="{B0894097-9C9B-8B23-3BC5-11C154EBBAD5}"/>
+                <a16:creationId xmlns:a16="http://schemas.microsoft.com/office/drawing/2014/main" id="{39CFE319-1228-241C-E27B-2F090068170E}"/>
               </a:ext>
             </a:extLst>
           </p:cNvPr>
@@ -9984,17 +10172,12 @@
         </p:blipFill>
         <p:spPr>
           <a:xfrm>
-            <a:off x="0" y="1929448"/>
-            <a:ext cx="12192000" cy="4928551"/>
+            <a:off x="-1" y="1949607"/>
+            <a:ext cx="12143555" cy="4908393"/>
           </a:xfrm>
           <a:prstGeom prst="rect">
             <a:avLst/>
           </a:prstGeom>
-          <a:ln>
-            <a:solidFill>
-              <a:schemeClr val="accent1"/>
-            </a:solidFill>
-          </a:ln>
         </p:spPr>
       </p:pic>
     </p:spTree>
@@ -10010,7 +10193,7 @@
 </p:sld>
 </file>
 
-<file path=ppt/slides/slide7.xml><?xml version="1.0" encoding="utf-8"?>
+<file path=ppt/slides/slide8.xml><?xml version="1.0" encoding="utf-8"?>
 <p:sld xmlns:a="http://schemas.openxmlformats.org/drawingml/2006/main" xmlns:r="http://schemas.openxmlformats.org/officeDocument/2006/relationships" xmlns:p="http://schemas.openxmlformats.org/presentationml/2006/main">
   <p:cSld>
     <p:bg>
@@ -10228,75 +10411,6 @@
           </a:p>
         </p:txBody>
       </p:sp>
-      <p:sp>
-        <p:nvSpPr>
-          <p:cNvPr id="2" name="Title 1">
-            <a:extLst>
-              <a:ext uri="{FF2B5EF4-FFF2-40B4-BE49-F238E27FC236}">
-                <a16:creationId xmlns:a16="http://schemas.microsoft.com/office/drawing/2014/main" id="{9C9AD6B9-1CEE-7976-0BB7-22F5E9535735}"/>
-              </a:ext>
-            </a:extLst>
-          </p:cNvPr>
-          <p:cNvSpPr>
-            <a:spLocks noGrp="1"/>
-          </p:cNvSpPr>
-          <p:nvPr>
-            <p:ph type="title"/>
-          </p:nvPr>
-        </p:nvSpPr>
-        <p:spPr>
-          <a:xfrm>
-            <a:off x="1523999" y="1180494"/>
-            <a:ext cx="9144000" cy="2387600"/>
-          </a:xfrm>
-        </p:spPr>
-        <p:txBody>
-          <a:bodyPr vert="horz" lIns="91440" tIns="45720" rIns="91440" bIns="45720" rtlCol="0" anchor="b">
-            <a:normAutofit/>
-          </a:bodyPr>
-          <a:lstStyle/>
-          <a:p>
-            <a:pPr algn="ctr"/>
-            <a:r>
-              <a:rPr lang="en-US" sz="3500" kern="1200" dirty="0">
-                <a:solidFill>
-                  <a:schemeClr val="tx1"/>
-                </a:solidFill>
-                <a:latin typeface="+mj-lt"/>
-                <a:ea typeface="+mj-ea"/>
-                <a:cs typeface="+mj-cs"/>
-              </a:rPr>
-              <a:t>Website: </a:t>
-            </a:r>
-            <a:r>
-              <a:rPr lang="en-US" sz="3500" kern="1200" dirty="0">
-                <a:solidFill>
-                  <a:srgbClr val="0070C0"/>
-                </a:solidFill>
-                <a:latin typeface="+mj-lt"/>
-                <a:ea typeface="+mj-ea"/>
-                <a:cs typeface="+mj-cs"/>
-                <a:hlinkClick r:id="rId2">
-                  <a:extLst>
-                    <a:ext uri="{A12FA001-AC4F-418D-AE19-62706E023703}">
-                      <ahyp:hlinkClr xmlns:ahyp="http://schemas.microsoft.com/office/drawing/2018/hyperlinkcolor" val="tx"/>
-                    </a:ext>
-                  </a:extLst>
-                </a:hlinkClick>
-              </a:rPr>
-              <a:t>https://jjdeuce06.github.io/VulcanActivityTracker/</a:t>
-            </a:r>
-            <a:endParaRPr lang="en-US" sz="3500" kern="1200" dirty="0">
-              <a:solidFill>
-                <a:srgbClr val="0070C0"/>
-              </a:solidFill>
-              <a:latin typeface="+mj-lt"/>
-              <a:ea typeface="+mj-ea"/>
-              <a:cs typeface="+mj-cs"/>
-            </a:endParaRPr>
-          </a:p>
-        </p:txBody>
-      </p:sp>
       <p:cxnSp>
         <p:nvCxnSpPr>
           <p:cNvPr id="13" name="Straight Connector 12">
@@ -10349,6 +10463,121 @@
           </a:fontRef>
         </p:style>
       </p:cxnSp>
+      <p:sp>
+        <p:nvSpPr>
+          <p:cNvPr id="6" name="Title 1">
+            <a:extLst>
+              <a:ext uri="{FF2B5EF4-FFF2-40B4-BE49-F238E27FC236}">
+                <a16:creationId xmlns:a16="http://schemas.microsoft.com/office/drawing/2014/main" id="{41FAB8FA-2602-2A18-903D-B03E3D5EF300}"/>
+              </a:ext>
+            </a:extLst>
+          </p:cNvPr>
+          <p:cNvSpPr txBox="1">
+            <a:spLocks noGrp="1"/>
+          </p:cNvSpPr>
+          <p:nvPr>
+            <p:ph type="title"/>
+          </p:nvPr>
+        </p:nvSpPr>
+        <p:spPr>
+          <a:xfrm>
+            <a:off x="831850" y="1709738"/>
+            <a:ext cx="10515600" cy="2852737"/>
+          </a:xfrm>
+          <a:prstGeom prst="rect">
+            <a:avLst/>
+          </a:prstGeom>
+        </p:spPr>
+        <p:txBody>
+          <a:bodyPr vert="horz" lIns="91440" tIns="45720" rIns="91440" bIns="45720" rtlCol="0" anchor="b">
+            <a:normAutofit fontScale="92500"/>
+          </a:bodyPr>
+          <a:lstStyle>
+            <a:lvl1pPr algn="l" defTabSz="914400" rtl="0" eaLnBrk="1" latinLnBrk="0" hangingPunct="1">
+              <a:lnSpc>
+                <a:spcPct val="90000"/>
+              </a:lnSpc>
+              <a:spcBef>
+                <a:spcPct val="0"/>
+              </a:spcBef>
+              <a:buNone/>
+              <a:defRPr sz="6000" kern="1200">
+                <a:solidFill>
+                  <a:schemeClr val="tx1"/>
+                </a:solidFill>
+                <a:latin typeface="+mj-lt"/>
+                <a:ea typeface="+mj-ea"/>
+                <a:cs typeface="+mj-cs"/>
+              </a:defRPr>
+            </a:lvl1pPr>
+          </a:lstStyle>
+          <a:p>
+            <a:pPr algn="ctr"/>
+            <a:r>
+              <a:rPr lang="en-US" sz="3500" dirty="0"/>
+              <a:t>Documentation: </a:t>
+            </a:r>
+            <a:r>
+              <a:rPr lang="en-US" sz="3500" dirty="0">
+                <a:solidFill>
+                  <a:srgbClr val="0070C0"/>
+                </a:solidFill>
+                <a:hlinkClick r:id="rId2">
+                  <a:extLst>
+                    <a:ext uri="{A12FA001-AC4F-418D-AE19-62706E023703}">
+                      <ahyp:hlinkClr xmlns:ahyp="http://schemas.microsoft.com/office/drawing/2018/hyperlinkcolor" val="tx"/>
+                    </a:ext>
+                  </a:extLst>
+                </a:hlinkClick>
+              </a:rPr>
+              <a:t>https://jjdeuce06.github.io/VulcanActivityTracker/</a:t>
+            </a:r>
+            <a:endParaRPr lang="en-US" sz="3500" dirty="0">
+              <a:solidFill>
+                <a:srgbClr val="0070C0"/>
+              </a:solidFill>
+            </a:endParaRPr>
+          </a:p>
+          <a:p>
+            <a:endParaRPr lang="en-US" sz="3500" dirty="0">
+              <a:solidFill>
+                <a:srgbClr val="0070C0"/>
+              </a:solidFill>
+            </a:endParaRPr>
+          </a:p>
+          <a:p>
+            <a:pPr algn="ctr"/>
+            <a:r>
+              <a:rPr lang="en-US" sz="3500" dirty="0"/>
+              <a:t>Live: </a:t>
+            </a:r>
+            <a:br>
+              <a:rPr lang="en-US" sz="3500" dirty="0"/>
+            </a:br>
+            <a:r>
+              <a:rPr lang="en-US" sz="3500" dirty="0">
+                <a:solidFill>
+                  <a:srgbClr val="0070C0"/>
+                </a:solidFill>
+              </a:rPr>
+              <a:t>https://vulcanactivitytracker.onrender</a:t>
+            </a:r>
+            <a:r>
+              <a:rPr lang="en-US" sz="3500">
+                <a:solidFill>
+                  <a:srgbClr val="0070C0"/>
+                </a:solidFill>
+              </a:rPr>
+              <a:t>.com</a:t>
+            </a:r>
+            <a:endParaRPr lang="en-US" sz="3500" dirty="0">
+              <a:solidFill>
+                <a:srgbClr val="0070C0"/>
+              </a:solidFill>
+            </a:endParaRPr>
+          </a:p>
+        </p:txBody>
+      </p:sp>
     </p:spTree>
     <p:extLst>
       <p:ext uri="{BB962C8B-B14F-4D97-AF65-F5344CB8AC3E}">
